--- a/ai101/slides/week-07.pptx
+++ b/ai101/slides/week-07.pptx
@@ -12,6 +12,7 @@
     <p:sldId id="260" r:id="rId11"/>
     <p:sldId id="261" r:id="rId12"/>
     <p:sldId id="262" r:id="rId13"/>
+    <p:sldId id="263" r:id="rId14"/>
   </p:sldIdLst>
   <p:sldSz cx="12191695" cy="6858000" type="screen4x3"/>
   <p:notesSz cx="6858000" cy="9144000"/>
@@ -3436,7 +3437,7 @@
                   <a:srgbClr val="1F2A37"/>
                 </a:solidFill>
               </a:rPr>
-              <a:t>An array is a list</a:t>
+              <a:t>How would you store 100 messages?</a:t>
             </a:r>
           </a:p>
         </p:txBody>
@@ -3474,7 +3475,7 @@
                   <a:srgbClr val="01AEFD"/>
                 </a:solidFill>
               </a:rPr>
-              <a:t>const history = []</a:t>
+              <a:t>Game.messageA, Game.messageB, Game.messageC...</a:t>
             </a:r>
           </a:p>
           <a:p>
@@ -3489,7 +3490,7 @@
                   <a:srgbClr val="1F2A37"/>
                 </a:solidFill>
               </a:rPr>
-              <a:t>• Like your list of enemies in pygame</a:t>
+              <a:t>• That is what PixelPad made you do</a:t>
             </a:r>
           </a:p>
           <a:p>
@@ -3504,7 +3505,7 @@
                   <a:srgbClr val="1F2A37"/>
                 </a:solidFill>
               </a:rPr>
-              <a:t>• push adds to the end</a:t>
+              <a:t>• It never let you have a list</a:t>
             </a:r>
           </a:p>
           <a:p>
@@ -3519,7 +3520,7 @@
                   <a:srgbClr val="1F2A37"/>
                 </a:solidFill>
               </a:rPr>
-              <a:t>• Each item is { role, content }</a:t>
+              <a:t>• There is a better way</a:t>
             </a:r>
           </a:p>
         </p:txBody>
@@ -3563,7 +3564,7 @@
                   <a:srgbClr val="1F2A37"/>
                 </a:solidFill>
               </a:rPr>
-              <a:t>Push BOTH sides</a:t>
+              <a:t>Your first array</a:t>
             </a:r>
           </a:p>
         </p:txBody>
@@ -3596,12 +3597,12 @@
               </a:spcAft>
             </a:pPr>
             <a:r>
-              <a:rPr sz="2400">
-                <a:solidFill>
-                  <a:srgbClr val="1F2A37"/>
+              <a:rPr sz="2800">
+                <a:solidFill>
+                  <a:srgbClr val="01AEFD"/>
                 </a:solidFill>
               </a:rPr>
-              <a:t>• history.push user - what you said</a:t>
+              <a:t>const history = []</a:t>
             </a:r>
           </a:p>
           <a:p>
@@ -3616,7 +3617,7 @@
                   <a:srgbClr val="1F2A37"/>
                 </a:solidFill>
               </a:rPr>
-              <a:t>• history.push assistant - what it said</a:t>
+              <a:t>• One name, any number of things inside</a:t>
             </a:r>
           </a:p>
           <a:p>
@@ -3631,7 +3632,22 @@
                   <a:srgbClr val="1F2A37"/>
                 </a:solidFill>
               </a:rPr>
-              <a:t>• Miss the second and it hears half a conversation</a:t>
+              <a:t>• push adds to the end</a:t>
+            </a:r>
+          </a:p>
+          <a:p>
+            <a:pPr>
+              <a:spcAft>
+                <a:spcPts val="1400"/>
+              </a:spcAft>
+            </a:pPr>
+            <a:r>
+              <a:rPr sz="2400">
+                <a:solidFill>
+                  <a:srgbClr val="1F2A37"/>
+                </a:solidFill>
+              </a:rPr>
+              <a:t>• Each item is { role, content }</a:t>
             </a:r>
           </a:p>
         </p:txBody>
@@ -3675,7 +3691,7 @@
                   <a:srgbClr val="1F2A37"/>
                 </a:solidFill>
               </a:rPr>
-              <a:t>Tip them all in</a:t>
+              <a:t>Push BOTH sides</a:t>
             </a:r>
           </a:p>
         </p:txBody>
@@ -3708,12 +3724,12 @@
               </a:spcAft>
             </a:pPr>
             <a:r>
-              <a:rPr sz="2800">
-                <a:solidFill>
-                  <a:srgbClr val="01AEFD"/>
+              <a:rPr sz="2400">
+                <a:solidFill>
+                  <a:srgbClr val="1F2A37"/>
                 </a:solidFill>
               </a:rPr>
-              <a:t>messages: [ system, ...history ]</a:t>
+              <a:t>• history.push user - what you said</a:t>
             </a:r>
           </a:p>
           <a:p>
@@ -3728,7 +3744,7 @@
                   <a:srgbClr val="1F2A37"/>
                 </a:solidFill>
               </a:rPr>
-              <a:t>• ... means spread every item into the list</a:t>
+              <a:t>• history.push assistant - what it said</a:t>
             </a:r>
           </a:p>
           <a:p>
@@ -3743,7 +3759,7 @@
                   <a:srgbClr val="1F2A37"/>
                 </a:solidFill>
               </a:rPr>
-              <a:t>• Oldest first, newest last</a:t>
+              <a:t>• Miss the second and it hears half a conversation</a:t>
             </a:r>
           </a:p>
         </p:txBody>
@@ -3757,6 +3773,118 @@
 </file>
 
 <file path=ppt/slides/slide7.xml><?xml version="1.0" encoding="utf-8"?>
+<p:sld xmlns:a="http://schemas.openxmlformats.org/drawingml/2006/main" xmlns:p="http://schemas.openxmlformats.org/presentationml/2006/main" xmlns:r="http://schemas.openxmlformats.org/officeDocument/2006/relationships">
+  <p:cSld>
+    <p:spTree>
+      <p:nvGrpSpPr>
+        <p:cNvPr id="1" name=""/>
+        <p:cNvGrpSpPr/>
+        <p:nvPr/>
+      </p:nvGrpSpPr>
+      <p:grpSpPr/>
+      <p:sp>
+        <p:nvSpPr>
+          <p:cNvPr id="2" name="Title 1"/>
+          <p:cNvSpPr>
+            <a:spLocks noGrp="1"/>
+          </p:cNvSpPr>
+          <p:nvPr>
+            <p:ph type="title"/>
+          </p:nvPr>
+        </p:nvSpPr>
+        <p:spPr/>
+        <p:txBody>
+          <a:bodyPr/>
+          <a:lstStyle/>
+          <a:p>
+            <a:r>
+              <a:rPr sz="3800" b="1">
+                <a:solidFill>
+                  <a:srgbClr val="1F2A37"/>
+                </a:solidFill>
+              </a:rPr>
+              <a:t>Tip them all in</a:t>
+            </a:r>
+          </a:p>
+        </p:txBody>
+      </p:sp>
+      <p:sp>
+        <p:nvSpPr>
+          <p:cNvPr id="3" name="TextBox 2"/>
+          <p:cNvSpPr txBox="1"/>
+          <p:nvPr/>
+        </p:nvSpPr>
+        <p:spPr>
+          <a:xfrm>
+            <a:off x="822960" y="1828800"/>
+            <a:ext cx="10515600" cy="4206240"/>
+          </a:xfrm>
+          <a:prstGeom prst="rect">
+            <a:avLst/>
+          </a:prstGeom>
+          <a:noFill/>
+        </p:spPr>
+        <p:txBody>
+          <a:bodyPr wrap="square">
+            <a:spAutoFit/>
+          </a:bodyPr>
+          <a:lstStyle/>
+          <a:p>
+            <a:pPr>
+              <a:spcAft>
+                <a:spcPts val="1400"/>
+              </a:spcAft>
+            </a:pPr>
+            <a:r>
+              <a:rPr sz="2800">
+                <a:solidFill>
+                  <a:srgbClr val="01AEFD"/>
+                </a:solidFill>
+              </a:rPr>
+              <a:t>messages: [ system, ...history ]</a:t>
+            </a:r>
+          </a:p>
+          <a:p>
+            <a:pPr>
+              <a:spcAft>
+                <a:spcPts val="1400"/>
+              </a:spcAft>
+            </a:pPr>
+            <a:r>
+              <a:rPr sz="2400">
+                <a:solidFill>
+                  <a:srgbClr val="1F2A37"/>
+                </a:solidFill>
+              </a:rPr>
+              <a:t>• ... means spread every item into the list</a:t>
+            </a:r>
+          </a:p>
+          <a:p>
+            <a:pPr>
+              <a:spcAft>
+                <a:spcPts val="1400"/>
+              </a:spcAft>
+            </a:pPr>
+            <a:r>
+              <a:rPr sz="2400">
+                <a:solidFill>
+                  <a:srgbClr val="1F2A37"/>
+                </a:solidFill>
+              </a:rPr>
+              <a:t>• Oldest first, newest last</a:t>
+            </a:r>
+          </a:p>
+        </p:txBody>
+      </p:sp>
+    </p:spTree>
+  </p:cSld>
+  <p:clrMapOvr>
+    <a:masterClrMapping/>
+  </p:clrMapOvr>
+</p:sld>
+</file>
+
+<file path=ppt/slides/slide8.xml><?xml version="1.0" encoding="utf-8"?>
 <p:sld xmlns:a="http://schemas.openxmlformats.org/drawingml/2006/main" xmlns:p="http://schemas.openxmlformats.org/presentationml/2006/main" xmlns:r="http://schemas.openxmlformats.org/officeDocument/2006/relationships">
   <p:cSld>
     <p:spTree>

--- a/ai101/slides/week-07.pptx
+++ b/ai101/slides/week-07.pptx
@@ -13,6 +13,18 @@
     <p:sldId id="261" r:id="rId12"/>
     <p:sldId id="262" r:id="rId13"/>
     <p:sldId id="263" r:id="rId14"/>
+    <p:sldId id="264" r:id="rId15"/>
+    <p:sldId id="265" r:id="rId16"/>
+    <p:sldId id="266" r:id="rId17"/>
+    <p:sldId id="267" r:id="rId18"/>
+    <p:sldId id="268" r:id="rId19"/>
+    <p:sldId id="269" r:id="rId20"/>
+    <p:sldId id="270" r:id="rId21"/>
+    <p:sldId id="271" r:id="rId22"/>
+    <p:sldId id="272" r:id="rId23"/>
+    <p:sldId id="273" r:id="rId24"/>
+    <p:sldId id="274" r:id="rId25"/>
+    <p:sldId id="275" r:id="rId26"/>
   </p:sldIdLst>
   <p:sldSz cx="12191695" cy="6858000" type="screen4x3"/>
   <p:notesSz cx="6858000" cy="9144000"/>
@@ -3167,6 +3179,2951 @@
 </p:sld>
 </file>
 
+<file path=ppt/slides/slide10.xml><?xml version="1.0" encoding="utf-8"?>
+<p:sld xmlns:a="http://schemas.openxmlformats.org/drawingml/2006/main" xmlns:p="http://schemas.openxmlformats.org/presentationml/2006/main" xmlns:r="http://schemas.openxmlformats.org/officeDocument/2006/relationships">
+  <p:cSld>
+    <p:spTree>
+      <p:nvGrpSpPr>
+        <p:cNvPr id="1" name=""/>
+        <p:cNvGrpSpPr/>
+        <p:nvPr/>
+      </p:nvGrpSpPr>
+      <p:grpSpPr/>
+      <p:sp>
+        <p:nvSpPr>
+          <p:cNvPr id="2" name="Title 1"/>
+          <p:cNvSpPr>
+            <a:spLocks noGrp="1"/>
+          </p:cNvSpPr>
+          <p:nvPr>
+            <p:ph type="title"/>
+          </p:nvPr>
+        </p:nvSpPr>
+        <p:spPr/>
+        <p:txBody>
+          <a:bodyPr/>
+          <a:lstStyle/>
+          <a:p>
+            <a:r>
+              <a:rPr sz="3800" b="1">
+                <a:solidFill>
+                  <a:srgbClr val="1F2A37"/>
+                </a:solidFill>
+              </a:rPr>
+              <a:t>Tip them all in</a:t>
+            </a:r>
+          </a:p>
+        </p:txBody>
+      </p:sp>
+      <p:sp>
+        <p:nvSpPr>
+          <p:cNvPr id="3" name="TextBox 2"/>
+          <p:cNvSpPr txBox="1"/>
+          <p:nvPr/>
+        </p:nvSpPr>
+        <p:spPr>
+          <a:xfrm>
+            <a:off x="822960" y="1828800"/>
+            <a:ext cx="10515600" cy="4206240"/>
+          </a:xfrm>
+          <a:prstGeom prst="rect">
+            <a:avLst/>
+          </a:prstGeom>
+          <a:noFill/>
+        </p:spPr>
+        <p:txBody>
+          <a:bodyPr wrap="square">
+            <a:spAutoFit/>
+          </a:bodyPr>
+          <a:lstStyle/>
+          <a:p>
+            <a:pPr>
+              <a:spcAft>
+                <a:spcPts val="1400"/>
+              </a:spcAft>
+            </a:pPr>
+            <a:r>
+              <a:rPr sz="2800">
+                <a:solidFill>
+                  <a:srgbClr val="01AEFD"/>
+                </a:solidFill>
+              </a:rPr>
+              <a:t>messages: [ system, ...history ]</a:t>
+            </a:r>
+          </a:p>
+          <a:p>
+            <a:pPr>
+              <a:spcAft>
+                <a:spcPts val="1400"/>
+              </a:spcAft>
+            </a:pPr>
+            <a:r>
+              <a:rPr sz="2400">
+                <a:solidFill>
+                  <a:srgbClr val="1F2A37"/>
+                </a:solidFill>
+              </a:rPr>
+              <a:t>• ... means spread every item into the list</a:t>
+            </a:r>
+          </a:p>
+          <a:p>
+            <a:pPr>
+              <a:spcAft>
+                <a:spcPts val="1400"/>
+              </a:spcAft>
+            </a:pPr>
+            <a:r>
+              <a:rPr sz="2400">
+                <a:solidFill>
+                  <a:srgbClr val="1F2A37"/>
+                </a:solidFill>
+              </a:rPr>
+              <a:t>• Oldest first, newest last</a:t>
+            </a:r>
+          </a:p>
+        </p:txBody>
+      </p:sp>
+    </p:spTree>
+  </p:cSld>
+  <p:clrMapOvr>
+    <a:masterClrMapping/>
+  </p:clrMapOvr>
+</p:sld>
+</file>
+
+<file path=ppt/slides/slide11.xml><?xml version="1.0" encoding="utf-8"?>
+<p:sld xmlns:a="http://schemas.openxmlformats.org/drawingml/2006/main" xmlns:p="http://schemas.openxmlformats.org/presentationml/2006/main" xmlns:r="http://schemas.openxmlformats.org/officeDocument/2006/relationships">
+  <p:cSld>
+    <p:bg>
+      <p:bgPr>
+        <a:solidFill>
+          <a:srgbClr val="102127"/>
+        </a:solidFill>
+        <a:effectLst/>
+      </p:bgPr>
+    </p:bg>
+    <p:spTree>
+      <p:nvGrpSpPr>
+        <p:cNvPr id="1" name=""/>
+        <p:cNvGrpSpPr/>
+        <p:nvPr/>
+      </p:nvGrpSpPr>
+      <p:grpSpPr/>
+      <p:sp>
+        <p:nvSpPr>
+          <p:cNvPr id="2" name="TextBox 1"/>
+          <p:cNvSpPr txBox="1"/>
+          <p:nvPr/>
+        </p:nvSpPr>
+        <p:spPr>
+          <a:xfrm>
+            <a:off x="502920" y="274320"/>
+            <a:ext cx="11155680" cy="731520"/>
+          </a:xfrm>
+          <a:prstGeom prst="rect">
+            <a:avLst/>
+          </a:prstGeom>
+          <a:noFill/>
+        </p:spPr>
+        <p:txBody>
+          <a:bodyPr wrap="none">
+            <a:spAutoFit/>
+          </a:bodyPr>
+          <a:lstStyle/>
+          <a:p>
+            <a:r>
+              <a:rPr sz="2600" b="1">
+                <a:solidFill>
+                  <a:srgbClr val="01AEFD"/>
+                </a:solidFill>
+              </a:rPr>
+              <a:t>Type this into script.js  (1 of 3)</a:t>
+            </a:r>
+          </a:p>
+        </p:txBody>
+      </p:sp>
+      <p:sp>
+        <p:nvSpPr>
+          <p:cNvPr id="3" name="TextBox 2"/>
+          <p:cNvSpPr txBox="1"/>
+          <p:nvPr/>
+        </p:nvSpPr>
+        <p:spPr>
+          <a:xfrm>
+            <a:off x="502920" y="1051560"/>
+            <a:ext cx="11155680" cy="5394960"/>
+          </a:xfrm>
+          <a:prstGeom prst="rect">
+            <a:avLst/>
+          </a:prstGeom>
+          <a:noFill/>
+        </p:spPr>
+        <p:txBody>
+          <a:bodyPr wrap="none">
+            <a:spAutoFit/>
+          </a:bodyPr>
+          <a:lstStyle/>
+          <a:p>
+            <a:pPr>
+              <a:spcAft>
+                <a:spcPts val="0"/>
+              </a:spcAft>
+            </a:pPr>
+            <a:r>
+              <a:rPr sz="1400">
+                <a:solidFill>
+                  <a:srgbClr val="6D8C97"/>
+                </a:solidFill>
+                <a:latin typeface="Consolas"/>
+              </a:rPr>
+              <a:t>  48  </a:t>
+            </a:r>
+            <a:r>
+              <a:rPr sz="1400">
+                <a:solidFill>
+                  <a:srgbClr val="DCECEF"/>
+                </a:solidFill>
+                <a:latin typeface="Consolas"/>
+              </a:rPr>
+              <a:t> </a:t>
+            </a:r>
+          </a:p>
+          <a:p>
+            <a:pPr>
+              <a:spcAft>
+                <a:spcPts val="0"/>
+              </a:spcAft>
+            </a:pPr>
+            <a:r>
+              <a:rPr sz="1400">
+                <a:solidFill>
+                  <a:srgbClr val="6D8C97"/>
+                </a:solidFill>
+                <a:latin typeface="Consolas"/>
+              </a:rPr>
+              <a:t>  49  </a:t>
+            </a:r>
+            <a:r>
+              <a:rPr sz="1400">
+                <a:solidFill>
+                  <a:srgbClr val="DCECEF"/>
+                </a:solidFill>
+                <a:latin typeface="Consolas"/>
+              </a:rPr>
+              <a:t>// Week 4: ask the AI a real question.</a:t>
+            </a:r>
+          </a:p>
+          <a:p>
+            <a:pPr>
+              <a:spcAft>
+                <a:spcPts val="0"/>
+              </a:spcAft>
+            </a:pPr>
+            <a:r>
+              <a:rPr sz="1400">
+                <a:solidFill>
+                  <a:srgbClr val="6D8C97"/>
+                </a:solidFill>
+                <a:latin typeface="Consolas"/>
+              </a:rPr>
+              <a:t>  50  </a:t>
+            </a:r>
+            <a:r>
+              <a:rPr sz="1400">
+                <a:solidFill>
+                  <a:srgbClr val="DCECEF"/>
+                </a:solidFill>
+                <a:latin typeface="Consolas"/>
+              </a:rPr>
+              <a:t>// A chat request is a LIST of messages. Each one says who said it.</a:t>
+            </a:r>
+          </a:p>
+          <a:p>
+            <a:pPr>
+              <a:spcAft>
+                <a:spcPts val="0"/>
+              </a:spcAft>
+            </a:pPr>
+            <a:r>
+              <a:rPr sz="1400">
+                <a:solidFill>
+                  <a:srgbClr val="6D8C97"/>
+                </a:solidFill>
+                <a:latin typeface="Consolas"/>
+              </a:rPr>
+              <a:t>  51  </a:t>
+            </a:r>
+            <a:r>
+              <a:rPr sz="1400">
+                <a:solidFill>
+                  <a:srgbClr val="7FE0A0"/>
+                </a:solidFill>
+                <a:latin typeface="Consolas"/>
+              </a:rPr>
+              <a:t>async function askAI() {</a:t>
+            </a:r>
+          </a:p>
+          <a:p>
+            <a:pPr>
+              <a:spcAft>
+                <a:spcPts val="0"/>
+              </a:spcAft>
+            </a:pPr>
+            <a:r>
+              <a:rPr sz="1400">
+                <a:solidFill>
+                  <a:srgbClr val="6D8C97"/>
+                </a:solidFill>
+                <a:latin typeface="Consolas"/>
+              </a:rPr>
+              <a:t>  52  </a:t>
+            </a:r>
+            <a:r>
+              <a:rPr sz="1400">
+                <a:solidFill>
+                  <a:srgbClr val="DCECEF"/>
+                </a:solidFill>
+                <a:latin typeface="Consolas"/>
+              </a:rPr>
+              <a:t>  const res = await fetch(AI_BASE + '/v1/chat/completions', {</a:t>
+            </a:r>
+          </a:p>
+          <a:p>
+            <a:pPr>
+              <a:spcAft>
+                <a:spcPts val="0"/>
+              </a:spcAft>
+            </a:pPr>
+            <a:r>
+              <a:rPr sz="1400">
+                <a:solidFill>
+                  <a:srgbClr val="6D8C97"/>
+                </a:solidFill>
+                <a:latin typeface="Consolas"/>
+              </a:rPr>
+              <a:t>  53  </a:t>
+            </a:r>
+            <a:r>
+              <a:rPr sz="1400">
+                <a:solidFill>
+                  <a:srgbClr val="DCECEF"/>
+                </a:solidFill>
+                <a:latin typeface="Consolas"/>
+              </a:rPr>
+              <a:t>    method: 'POST',                       // POST = I am sending you something</a:t>
+            </a:r>
+          </a:p>
+          <a:p>
+            <a:pPr>
+              <a:spcAft>
+                <a:spcPts val="0"/>
+              </a:spcAft>
+            </a:pPr>
+            <a:r>
+              <a:rPr sz="1400">
+                <a:solidFill>
+                  <a:srgbClr val="6D8C97"/>
+                </a:solidFill>
+                <a:latin typeface="Consolas"/>
+              </a:rPr>
+              <a:t>  54  </a:t>
+            </a:r>
+            <a:r>
+              <a:rPr sz="1400">
+                <a:solidFill>
+                  <a:srgbClr val="DCECEF"/>
+                </a:solidFill>
+                <a:latin typeface="Consolas"/>
+              </a:rPr>
+              <a:t>    headers: {</a:t>
+            </a:r>
+          </a:p>
+          <a:p>
+            <a:pPr>
+              <a:spcAft>
+                <a:spcPts val="0"/>
+              </a:spcAft>
+            </a:pPr>
+            <a:r>
+              <a:rPr sz="1400">
+                <a:solidFill>
+                  <a:srgbClr val="6D8C97"/>
+                </a:solidFill>
+                <a:latin typeface="Consolas"/>
+              </a:rPr>
+              <a:t>  55  </a:t>
+            </a:r>
+            <a:r>
+              <a:rPr sz="1400">
+                <a:solidFill>
+                  <a:srgbClr val="DCECEF"/>
+                </a:solidFill>
+                <a:latin typeface="Consolas"/>
+              </a:rPr>
+              <a:t>      'Content-Type': 'application/json', // what I am sending is JSON</a:t>
+            </a:r>
+          </a:p>
+          <a:p>
+            <a:pPr>
+              <a:spcAft>
+                <a:spcPts val="0"/>
+              </a:spcAft>
+            </a:pPr>
+            <a:r>
+              <a:rPr sz="1400">
+                <a:solidFill>
+                  <a:srgbClr val="6D8C97"/>
+                </a:solidFill>
+                <a:latin typeface="Consolas"/>
+              </a:rPr>
+              <a:t>  56  </a:t>
+            </a:r>
+            <a:r>
+              <a:rPr sz="1400">
+                <a:solidFill>
+                  <a:srgbClr val="DCECEF"/>
+                </a:solidFill>
+                <a:latin typeface="Consolas"/>
+              </a:rPr>
+              <a:t>      'Authorization': 'Bearer ' + API_KEY</a:t>
+            </a:r>
+          </a:p>
+          <a:p>
+            <a:pPr>
+              <a:spcAft>
+                <a:spcPts val="0"/>
+              </a:spcAft>
+            </a:pPr>
+            <a:r>
+              <a:rPr sz="1400">
+                <a:solidFill>
+                  <a:srgbClr val="6D8C97"/>
+                </a:solidFill>
+                <a:latin typeface="Consolas"/>
+              </a:rPr>
+              <a:t>  57  </a:t>
+            </a:r>
+            <a:r>
+              <a:rPr sz="1400">
+                <a:solidFill>
+                  <a:srgbClr val="DCECEF"/>
+                </a:solidFill>
+                <a:latin typeface="Consolas"/>
+              </a:rPr>
+              <a:t>    },</a:t>
+            </a:r>
+          </a:p>
+          <a:p>
+            <a:pPr>
+              <a:spcAft>
+                <a:spcPts val="0"/>
+              </a:spcAft>
+            </a:pPr>
+            <a:r>
+              <a:rPr sz="1400">
+                <a:solidFill>
+                  <a:srgbClr val="6D8C97"/>
+                </a:solidFill>
+                <a:latin typeface="Consolas"/>
+              </a:rPr>
+              <a:t>  58  </a:t>
+            </a:r>
+            <a:r>
+              <a:rPr sz="1400">
+                <a:solidFill>
+                  <a:srgbClr val="DCECEF"/>
+                </a:solidFill>
+                <a:latin typeface="Consolas"/>
+              </a:rPr>
+              <a:t>    body: JSON.stringify({</a:t>
+            </a:r>
+          </a:p>
+          <a:p>
+            <a:pPr>
+              <a:spcAft>
+                <a:spcPts val="0"/>
+              </a:spcAft>
+            </a:pPr>
+            <a:r>
+              <a:rPr sz="1400">
+                <a:solidFill>
+                  <a:srgbClr val="6D8C97"/>
+                </a:solidFill>
+                <a:latin typeface="Consolas"/>
+              </a:rPr>
+              <a:t>  59  </a:t>
+            </a:r>
+            <a:r>
+              <a:rPr sz="1400">
+                <a:solidFill>
+                  <a:srgbClr val="DCECEF"/>
+                </a:solidFill>
+                <a:latin typeface="Consolas"/>
+              </a:rPr>
+              <a:t>      model: 'fast',</a:t>
+            </a:r>
+          </a:p>
+          <a:p>
+            <a:pPr>
+              <a:spcAft>
+                <a:spcPts val="0"/>
+              </a:spcAft>
+            </a:pPr>
+            <a:r>
+              <a:rPr sz="1400">
+                <a:solidFill>
+                  <a:srgbClr val="6D8C97"/>
+                </a:solidFill>
+                <a:latin typeface="Consolas"/>
+              </a:rPr>
+              <a:t>  60  </a:t>
+            </a:r>
+            <a:r>
+              <a:rPr sz="1400">
+                <a:solidFill>
+                  <a:srgbClr val="DCECEF"/>
+                </a:solidFill>
+                <a:latin typeface="Consolas"/>
+              </a:rPr>
+              <a:t>      messages: [</a:t>
+            </a:r>
+          </a:p>
+          <a:p>
+            <a:pPr>
+              <a:spcAft>
+                <a:spcPts val="0"/>
+              </a:spcAft>
+            </a:pPr>
+            <a:r>
+              <a:rPr sz="1400">
+                <a:solidFill>
+                  <a:srgbClr val="6D8C97"/>
+                </a:solidFill>
+                <a:latin typeface="Consolas"/>
+              </a:rPr>
+              <a:t>  61  </a:t>
+            </a:r>
+            <a:r>
+              <a:rPr sz="1400">
+                <a:solidFill>
+                  <a:srgbClr val="DCECEF"/>
+                </a:solidFill>
+                <a:latin typeface="Consolas"/>
+              </a:rPr>
+              <a:t>        // Week 6: the standing instruction, read before every single reply.</a:t>
+            </a:r>
+          </a:p>
+          <a:p>
+            <a:pPr>
+              <a:spcAft>
+                <a:spcPts val="0"/>
+              </a:spcAft>
+            </a:pPr>
+            <a:r>
+              <a:rPr sz="1400">
+                <a:solidFill>
+                  <a:srgbClr val="6D8C97"/>
+                </a:solidFill>
+                <a:latin typeface="Consolas"/>
+              </a:rPr>
+              <a:t>  62  </a:t>
+            </a:r>
+            <a:r>
+              <a:rPr sz="1400">
+                <a:solidFill>
+                  <a:srgbClr val="DCECEF"/>
+                </a:solidFill>
+                <a:latin typeface="Consolas"/>
+              </a:rPr>
+              <a:t>        { role: 'system', content: personaBox.value },</a:t>
+            </a:r>
+          </a:p>
+        </p:txBody>
+      </p:sp>
+    </p:spTree>
+  </p:cSld>
+  <p:clrMapOvr>
+    <a:masterClrMapping/>
+  </p:clrMapOvr>
+</p:sld>
+</file>
+
+<file path=ppt/slides/slide12.xml><?xml version="1.0" encoding="utf-8"?>
+<p:sld xmlns:a="http://schemas.openxmlformats.org/drawingml/2006/main" xmlns:p="http://schemas.openxmlformats.org/presentationml/2006/main" xmlns:r="http://schemas.openxmlformats.org/officeDocument/2006/relationships">
+  <p:cSld>
+    <p:bg>
+      <p:bgPr>
+        <a:solidFill>
+          <a:srgbClr val="102127"/>
+        </a:solidFill>
+        <a:effectLst/>
+      </p:bgPr>
+    </p:bg>
+    <p:spTree>
+      <p:nvGrpSpPr>
+        <p:cNvPr id="1" name=""/>
+        <p:cNvGrpSpPr/>
+        <p:nvPr/>
+      </p:nvGrpSpPr>
+      <p:grpSpPr/>
+      <p:sp>
+        <p:nvSpPr>
+          <p:cNvPr id="2" name="TextBox 1"/>
+          <p:cNvSpPr txBox="1"/>
+          <p:nvPr/>
+        </p:nvSpPr>
+        <p:spPr>
+          <a:xfrm>
+            <a:off x="502920" y="274320"/>
+            <a:ext cx="11155680" cy="731520"/>
+          </a:xfrm>
+          <a:prstGeom prst="rect">
+            <a:avLst/>
+          </a:prstGeom>
+          <a:noFill/>
+        </p:spPr>
+        <p:txBody>
+          <a:bodyPr wrap="none">
+            <a:spAutoFit/>
+          </a:bodyPr>
+          <a:lstStyle/>
+          <a:p>
+            <a:r>
+              <a:rPr sz="2600" b="1">
+                <a:solidFill>
+                  <a:srgbClr val="01AEFD"/>
+                </a:solidFill>
+              </a:rPr>
+              <a:t>Type this into script.js  (2 of 3)</a:t>
+            </a:r>
+          </a:p>
+        </p:txBody>
+      </p:sp>
+      <p:sp>
+        <p:nvSpPr>
+          <p:cNvPr id="3" name="TextBox 2"/>
+          <p:cNvSpPr txBox="1"/>
+          <p:nvPr/>
+        </p:nvSpPr>
+        <p:spPr>
+          <a:xfrm>
+            <a:off x="502920" y="1051560"/>
+            <a:ext cx="11155680" cy="5394960"/>
+          </a:xfrm>
+          <a:prstGeom prst="rect">
+            <a:avLst/>
+          </a:prstGeom>
+          <a:noFill/>
+        </p:spPr>
+        <p:txBody>
+          <a:bodyPr wrap="none">
+            <a:spAutoFit/>
+          </a:bodyPr>
+          <a:lstStyle/>
+          <a:p>
+            <a:pPr>
+              <a:spcAft>
+                <a:spcPts val="0"/>
+              </a:spcAft>
+            </a:pPr>
+            <a:r>
+              <a:rPr sz="1400">
+                <a:solidFill>
+                  <a:srgbClr val="6D8C97"/>
+                </a:solidFill>
+                <a:latin typeface="Consolas"/>
+              </a:rPr>
+              <a:t>  63  </a:t>
+            </a:r>
+            <a:r>
+              <a:rPr sz="1400">
+                <a:solidFill>
+                  <a:srgbClr val="7FE0A0"/>
+                </a:solidFill>
+                <a:latin typeface="Consolas"/>
+              </a:rPr>
+              <a:t>        // Week 7: everything said so far, oldest first.</a:t>
+            </a:r>
+          </a:p>
+          <a:p>
+            <a:pPr>
+              <a:spcAft>
+                <a:spcPts val="0"/>
+              </a:spcAft>
+            </a:pPr>
+            <a:r>
+              <a:rPr sz="1400">
+                <a:solidFill>
+                  <a:srgbClr val="6D8C97"/>
+                </a:solidFill>
+                <a:latin typeface="Consolas"/>
+              </a:rPr>
+              <a:t>  64  </a:t>
+            </a:r>
+            <a:r>
+              <a:rPr sz="1400">
+                <a:solidFill>
+                  <a:srgbClr val="7FE0A0"/>
+                </a:solidFill>
+                <a:latin typeface="Consolas"/>
+              </a:rPr>
+              <a:t>        ...history</a:t>
+            </a:r>
+          </a:p>
+          <a:p>
+            <a:pPr>
+              <a:spcAft>
+                <a:spcPts val="0"/>
+              </a:spcAft>
+            </a:pPr>
+            <a:r>
+              <a:rPr sz="1400">
+                <a:solidFill>
+                  <a:srgbClr val="6D8C97"/>
+                </a:solidFill>
+                <a:latin typeface="Consolas"/>
+              </a:rPr>
+              <a:t>  65  </a:t>
+            </a:r>
+            <a:r>
+              <a:rPr sz="1400">
+                <a:solidFill>
+                  <a:srgbClr val="DCECEF"/>
+                </a:solidFill>
+                <a:latin typeface="Consolas"/>
+              </a:rPr>
+              <a:t>      ]</a:t>
+            </a:r>
+          </a:p>
+          <a:p>
+            <a:pPr>
+              <a:spcAft>
+                <a:spcPts val="0"/>
+              </a:spcAft>
+            </a:pPr>
+            <a:r>
+              <a:rPr sz="1400">
+                <a:solidFill>
+                  <a:srgbClr val="6D8C97"/>
+                </a:solidFill>
+                <a:latin typeface="Consolas"/>
+              </a:rPr>
+              <a:t>  66  </a:t>
+            </a:r>
+            <a:r>
+              <a:rPr sz="1400">
+                <a:solidFill>
+                  <a:srgbClr val="DCECEF"/>
+                </a:solidFill>
+                <a:latin typeface="Consolas"/>
+              </a:rPr>
+              <a:t>    })</a:t>
+            </a:r>
+          </a:p>
+          <a:p>
+            <a:pPr>
+              <a:spcAft>
+                <a:spcPts val="0"/>
+              </a:spcAft>
+            </a:pPr>
+            <a:r>
+              <a:rPr sz="1400">
+                <a:solidFill>
+                  <a:srgbClr val="6D8C97"/>
+                </a:solidFill>
+                <a:latin typeface="Consolas"/>
+              </a:rPr>
+              <a:t>  67  </a:t>
+            </a:r>
+            <a:r>
+              <a:rPr sz="1400">
+                <a:solidFill>
+                  <a:srgbClr val="DCECEF"/>
+                </a:solidFill>
+                <a:latin typeface="Consolas"/>
+              </a:rPr>
+              <a:t>  });</a:t>
+            </a:r>
+          </a:p>
+          <a:p>
+            <a:pPr>
+              <a:spcAft>
+                <a:spcPts val="0"/>
+              </a:spcAft>
+            </a:pPr>
+            <a:r>
+              <a:rPr sz="1400">
+                <a:solidFill>
+                  <a:srgbClr val="6D8C97"/>
+                </a:solidFill>
+                <a:latin typeface="Consolas"/>
+              </a:rPr>
+              <a:t>  68  </a:t>
+            </a:r>
+            <a:r>
+              <a:rPr sz="1400">
+                <a:solidFill>
+                  <a:srgbClr val="DCECEF"/>
+                </a:solidFill>
+                <a:latin typeface="Consolas"/>
+              </a:rPr>
+              <a:t> </a:t>
+            </a:r>
+          </a:p>
+          <a:p>
+            <a:pPr>
+              <a:spcAft>
+                <a:spcPts val="0"/>
+              </a:spcAft>
+            </a:pPr>
+            <a:r>
+              <a:rPr sz="1400">
+                <a:solidFill>
+                  <a:srgbClr val="6D8C97"/>
+                </a:solidFill>
+                <a:latin typeface="Consolas"/>
+              </a:rPr>
+              <a:t>  69  </a:t>
+            </a:r>
+            <a:r>
+              <a:rPr sz="1400">
+                <a:solidFill>
+                  <a:srgbClr val="DCECEF"/>
+                </a:solidFill>
+                <a:latin typeface="Consolas"/>
+              </a:rPr>
+              <a:t>  // Week 5: fetch does NOT throw when the server says no. A 429 arrives</a:t>
+            </a:r>
+          </a:p>
+          <a:p>
+            <a:pPr>
+              <a:spcAft>
+                <a:spcPts val="0"/>
+              </a:spcAft>
+            </a:pPr>
+            <a:r>
+              <a:rPr sz="1400">
+                <a:solidFill>
+                  <a:srgbClr val="6D8C97"/>
+                </a:solidFill>
+                <a:latin typeface="Consolas"/>
+              </a:rPr>
+              <a:t>  70  </a:t>
+            </a:r>
+            <a:r>
+              <a:rPr sz="1400">
+                <a:solidFill>
+                  <a:srgbClr val="DCECEF"/>
+                </a:solidFill>
+                <a:latin typeface="Consolas"/>
+              </a:rPr>
+              <a:t>  // looking just like a success until you actually check.</a:t>
+            </a:r>
+          </a:p>
+          <a:p>
+            <a:pPr>
+              <a:spcAft>
+                <a:spcPts val="0"/>
+              </a:spcAft>
+            </a:pPr>
+            <a:r>
+              <a:rPr sz="1400">
+                <a:solidFill>
+                  <a:srgbClr val="6D8C97"/>
+                </a:solidFill>
+                <a:latin typeface="Consolas"/>
+              </a:rPr>
+              <a:t>  71  </a:t>
+            </a:r>
+            <a:r>
+              <a:rPr sz="1400">
+                <a:solidFill>
+                  <a:srgbClr val="DCECEF"/>
+                </a:solidFill>
+                <a:latin typeface="Consolas"/>
+              </a:rPr>
+              <a:t>  if (!res.ok) {</a:t>
+            </a:r>
+          </a:p>
+          <a:p>
+            <a:pPr>
+              <a:spcAft>
+                <a:spcPts val="0"/>
+              </a:spcAft>
+            </a:pPr>
+            <a:r>
+              <a:rPr sz="1400">
+                <a:solidFill>
+                  <a:srgbClr val="6D8C97"/>
+                </a:solidFill>
+                <a:latin typeface="Consolas"/>
+              </a:rPr>
+              <a:t>  72  </a:t>
+            </a:r>
+            <a:r>
+              <a:rPr sz="1400">
+                <a:solidFill>
+                  <a:srgbClr val="DCECEF"/>
+                </a:solidFill>
+                <a:latin typeface="Consolas"/>
+              </a:rPr>
+              <a:t>    const problem = await res.json();</a:t>
+            </a:r>
+          </a:p>
+          <a:p>
+            <a:pPr>
+              <a:spcAft>
+                <a:spcPts val="0"/>
+              </a:spcAft>
+            </a:pPr>
+            <a:r>
+              <a:rPr sz="1400">
+                <a:solidFill>
+                  <a:srgbClr val="6D8C97"/>
+                </a:solidFill>
+                <a:latin typeface="Consolas"/>
+              </a:rPr>
+              <a:t>  73  </a:t>
+            </a:r>
+            <a:r>
+              <a:rPr sz="1400">
+                <a:solidFill>
+                  <a:srgbClr val="DCECEF"/>
+                </a:solidFill>
+                <a:latin typeface="Consolas"/>
+              </a:rPr>
+              <a:t>    throw new Error(explain(res.status, problem));</a:t>
+            </a:r>
+          </a:p>
+          <a:p>
+            <a:pPr>
+              <a:spcAft>
+                <a:spcPts val="0"/>
+              </a:spcAft>
+            </a:pPr>
+            <a:r>
+              <a:rPr sz="1400">
+                <a:solidFill>
+                  <a:srgbClr val="6D8C97"/>
+                </a:solidFill>
+                <a:latin typeface="Consolas"/>
+              </a:rPr>
+              <a:t>  74  </a:t>
+            </a:r>
+            <a:r>
+              <a:rPr sz="1400">
+                <a:solidFill>
+                  <a:srgbClr val="DCECEF"/>
+                </a:solidFill>
+                <a:latin typeface="Consolas"/>
+              </a:rPr>
+              <a:t>  }</a:t>
+            </a:r>
+          </a:p>
+          <a:p>
+            <a:pPr>
+              <a:spcAft>
+                <a:spcPts val="0"/>
+              </a:spcAft>
+            </a:pPr>
+            <a:r>
+              <a:rPr sz="1400">
+                <a:solidFill>
+                  <a:srgbClr val="6D8C97"/>
+                </a:solidFill>
+                <a:latin typeface="Consolas"/>
+              </a:rPr>
+              <a:t>  75  </a:t>
+            </a:r>
+            <a:r>
+              <a:rPr sz="1400">
+                <a:solidFill>
+                  <a:srgbClr val="DCECEF"/>
+                </a:solidFill>
+                <a:latin typeface="Consolas"/>
+              </a:rPr>
+              <a:t> </a:t>
+            </a:r>
+          </a:p>
+          <a:p>
+            <a:pPr>
+              <a:spcAft>
+                <a:spcPts val="0"/>
+              </a:spcAft>
+            </a:pPr>
+            <a:r>
+              <a:rPr sz="1400">
+                <a:solidFill>
+                  <a:srgbClr val="6D8C97"/>
+                </a:solidFill>
+                <a:latin typeface="Consolas"/>
+              </a:rPr>
+              <a:t>  76  </a:t>
+            </a:r>
+            <a:r>
+              <a:rPr sz="1400">
+                <a:solidFill>
+                  <a:srgbClr val="DCECEF"/>
+                </a:solidFill>
+                <a:latin typeface="Consolas"/>
+              </a:rPr>
+              <a:t>  const data = await res.json();</a:t>
+            </a:r>
+          </a:p>
+          <a:p>
+            <a:pPr>
+              <a:spcAft>
+                <a:spcPts val="0"/>
+              </a:spcAft>
+            </a:pPr>
+            <a:r>
+              <a:rPr sz="1400">
+                <a:solidFill>
+                  <a:srgbClr val="6D8C97"/>
+                </a:solidFill>
+                <a:latin typeface="Consolas"/>
+              </a:rPr>
+              <a:t>  77  </a:t>
+            </a:r>
+            <a:r>
+              <a:rPr sz="1400">
+                <a:solidFill>
+                  <a:srgbClr val="DCECEF"/>
+                </a:solidFill>
+                <a:latin typeface="Consolas"/>
+              </a:rPr>
+              <a:t>  return data.choices[0].message.content;</a:t>
+            </a:r>
+          </a:p>
+        </p:txBody>
+      </p:sp>
+    </p:spTree>
+  </p:cSld>
+  <p:clrMapOvr>
+    <a:masterClrMapping/>
+  </p:clrMapOvr>
+</p:sld>
+</file>
+
+<file path=ppt/slides/slide13.xml><?xml version="1.0" encoding="utf-8"?>
+<p:sld xmlns:a="http://schemas.openxmlformats.org/drawingml/2006/main" xmlns:p="http://schemas.openxmlformats.org/presentationml/2006/main" xmlns:r="http://schemas.openxmlformats.org/officeDocument/2006/relationships">
+  <p:cSld>
+    <p:bg>
+      <p:bgPr>
+        <a:solidFill>
+          <a:srgbClr val="102127"/>
+        </a:solidFill>
+        <a:effectLst/>
+      </p:bgPr>
+    </p:bg>
+    <p:spTree>
+      <p:nvGrpSpPr>
+        <p:cNvPr id="1" name=""/>
+        <p:cNvGrpSpPr/>
+        <p:nvPr/>
+      </p:nvGrpSpPr>
+      <p:grpSpPr/>
+      <p:sp>
+        <p:nvSpPr>
+          <p:cNvPr id="2" name="TextBox 1"/>
+          <p:cNvSpPr txBox="1"/>
+          <p:nvPr/>
+        </p:nvSpPr>
+        <p:spPr>
+          <a:xfrm>
+            <a:off x="502920" y="274320"/>
+            <a:ext cx="11155680" cy="731520"/>
+          </a:xfrm>
+          <a:prstGeom prst="rect">
+            <a:avLst/>
+          </a:prstGeom>
+          <a:noFill/>
+        </p:spPr>
+        <p:txBody>
+          <a:bodyPr wrap="none">
+            <a:spAutoFit/>
+          </a:bodyPr>
+          <a:lstStyle/>
+          <a:p>
+            <a:r>
+              <a:rPr sz="2600" b="1">
+                <a:solidFill>
+                  <a:srgbClr val="01AEFD"/>
+                </a:solidFill>
+              </a:rPr>
+              <a:t>Type this into script.js  (3 of 3)</a:t>
+            </a:r>
+          </a:p>
+        </p:txBody>
+      </p:sp>
+      <p:sp>
+        <p:nvSpPr>
+          <p:cNvPr id="3" name="TextBox 2"/>
+          <p:cNvSpPr txBox="1"/>
+          <p:nvPr/>
+        </p:nvSpPr>
+        <p:spPr>
+          <a:xfrm>
+            <a:off x="502920" y="1051560"/>
+            <a:ext cx="11155680" cy="5394960"/>
+          </a:xfrm>
+          <a:prstGeom prst="rect">
+            <a:avLst/>
+          </a:prstGeom>
+          <a:noFill/>
+        </p:spPr>
+        <p:txBody>
+          <a:bodyPr wrap="none">
+            <a:spAutoFit/>
+          </a:bodyPr>
+          <a:lstStyle/>
+          <a:p>
+            <a:pPr>
+              <a:spcAft>
+                <a:spcPts val="0"/>
+              </a:spcAft>
+            </a:pPr>
+            <a:r>
+              <a:rPr sz="1700">
+                <a:solidFill>
+                  <a:srgbClr val="6D8C97"/>
+                </a:solidFill>
+                <a:latin typeface="Consolas"/>
+              </a:rPr>
+              <a:t>  78  </a:t>
+            </a:r>
+            <a:r>
+              <a:rPr sz="1700">
+                <a:solidFill>
+                  <a:srgbClr val="DCECEF"/>
+                </a:solidFill>
+                <a:latin typeface="Consolas"/>
+              </a:rPr>
+              <a:t>}</a:t>
+            </a:r>
+          </a:p>
+        </p:txBody>
+      </p:sp>
+    </p:spTree>
+  </p:cSld>
+  <p:clrMapOvr>
+    <a:masterClrMapping/>
+  </p:clrMapOvr>
+</p:sld>
+</file>
+
+<file path=ppt/slides/slide14.xml><?xml version="1.0" encoding="utf-8"?>
+<p:sld xmlns:a="http://schemas.openxmlformats.org/drawingml/2006/main" xmlns:p="http://schemas.openxmlformats.org/presentationml/2006/main" xmlns:r="http://schemas.openxmlformats.org/officeDocument/2006/relationships">
+  <p:cSld>
+    <p:spTree>
+      <p:nvGrpSpPr>
+        <p:cNvPr id="1" name=""/>
+        <p:cNvGrpSpPr/>
+        <p:nvPr/>
+      </p:nvGrpSpPr>
+      <p:grpSpPr/>
+      <p:sp>
+        <p:nvSpPr>
+          <p:cNvPr id="2" name="Title 1"/>
+          <p:cNvSpPr>
+            <a:spLocks noGrp="1"/>
+          </p:cNvSpPr>
+          <p:nvPr>
+            <p:ph type="title"/>
+          </p:nvPr>
+        </p:nvSpPr>
+        <p:spPr/>
+        <p:txBody>
+          <a:bodyPr/>
+          <a:lstStyle/>
+          <a:p>
+            <a:r>
+              <a:rPr sz="3800" b="1">
+                <a:solidFill>
+                  <a:srgbClr val="1F2A37"/>
+                </a:solidFill>
+              </a:rPr>
+              <a:t>Now make it look like a chat</a:t>
+            </a:r>
+          </a:p>
+        </p:txBody>
+      </p:sp>
+      <p:sp>
+        <p:nvSpPr>
+          <p:cNvPr id="3" name="TextBox 2"/>
+          <p:cNvSpPr txBox="1"/>
+          <p:nvPr/>
+        </p:nvSpPr>
+        <p:spPr>
+          <a:xfrm>
+            <a:off x="822960" y="1828800"/>
+            <a:ext cx="10515600" cy="4206240"/>
+          </a:xfrm>
+          <a:prstGeom prst="rect">
+            <a:avLst/>
+          </a:prstGeom>
+          <a:noFill/>
+        </p:spPr>
+        <p:txBody>
+          <a:bodyPr wrap="square">
+            <a:spAutoFit/>
+          </a:bodyPr>
+          <a:lstStyle/>
+          <a:p>
+            <a:pPr>
+              <a:spcAft>
+                <a:spcPts val="1400"/>
+              </a:spcAft>
+            </a:pPr>
+            <a:r>
+              <a:rPr sz="2800">
+                <a:solidFill>
+                  <a:srgbClr val="01AEFD"/>
+                </a:solidFill>
+              </a:rPr>
+              <a:t>Bubbles instead of lines</a:t>
+            </a:r>
+          </a:p>
+          <a:p>
+            <a:pPr>
+              <a:spcAft>
+                <a:spcPts val="1400"/>
+              </a:spcAft>
+            </a:pPr>
+            <a:r>
+              <a:rPr sz="2400">
+                <a:solidFill>
+                  <a:srgbClr val="1F2A37"/>
+                </a:solidFill>
+              </a:rPr>
+              <a:t>• addLine builds a styled div now</a:t>
+            </a:r>
+          </a:p>
+          <a:p>
+            <a:pPr>
+              <a:spcAft>
+                <a:spcPts val="1400"/>
+              </a:spcAft>
+            </a:pPr>
+            <a:r>
+              <a:rPr sz="2400">
+                <a:solidFill>
+                  <a:srgbClr val="1F2A37"/>
+                </a:solidFill>
+              </a:rPr>
+              <a:t>• Your messages go right, its go left</a:t>
+            </a:r>
+          </a:p>
+          <a:p>
+            <a:pPr>
+              <a:spcAft>
+                <a:spcPts val="1400"/>
+              </a:spcAft>
+            </a:pPr>
+            <a:r>
+              <a:rPr sz="2400">
+                <a:solidFill>
+                  <a:srgbClr val="1F2A37"/>
+                </a:solidFill>
+              </a:rPr>
+              <a:t>• The chat box needs a height before it can scroll</a:t>
+            </a:r>
+          </a:p>
+        </p:txBody>
+      </p:sp>
+    </p:spTree>
+  </p:cSld>
+  <p:clrMapOvr>
+    <a:masterClrMapping/>
+  </p:clrMapOvr>
+</p:sld>
+</file>
+
+<file path=ppt/slides/slide15.xml><?xml version="1.0" encoding="utf-8"?>
+<p:sld xmlns:a="http://schemas.openxmlformats.org/drawingml/2006/main" xmlns:p="http://schemas.openxmlformats.org/presentationml/2006/main" xmlns:r="http://schemas.openxmlformats.org/officeDocument/2006/relationships">
+  <p:cSld>
+    <p:bg>
+      <p:bgPr>
+        <a:solidFill>
+          <a:srgbClr val="102127"/>
+        </a:solidFill>
+        <a:effectLst/>
+      </p:bgPr>
+    </p:bg>
+    <p:spTree>
+      <p:nvGrpSpPr>
+        <p:cNvPr id="1" name=""/>
+        <p:cNvGrpSpPr/>
+        <p:nvPr/>
+      </p:nvGrpSpPr>
+      <p:grpSpPr/>
+      <p:sp>
+        <p:nvSpPr>
+          <p:cNvPr id="2" name="TextBox 1"/>
+          <p:cNvSpPr txBox="1"/>
+          <p:nvPr/>
+        </p:nvSpPr>
+        <p:spPr>
+          <a:xfrm>
+            <a:off x="502920" y="274320"/>
+            <a:ext cx="11155680" cy="731520"/>
+          </a:xfrm>
+          <a:prstGeom prst="rect">
+            <a:avLst/>
+          </a:prstGeom>
+          <a:noFill/>
+        </p:spPr>
+        <p:txBody>
+          <a:bodyPr wrap="none">
+            <a:spAutoFit/>
+          </a:bodyPr>
+          <a:lstStyle/>
+          <a:p>
+            <a:r>
+              <a:rPr sz="2600" b="1">
+                <a:solidFill>
+                  <a:srgbClr val="01AEFD"/>
+                </a:solidFill>
+              </a:rPr>
+              <a:t>Type this into script.js  (1 of 5)</a:t>
+            </a:r>
+          </a:p>
+        </p:txBody>
+      </p:sp>
+      <p:sp>
+        <p:nvSpPr>
+          <p:cNvPr id="3" name="TextBox 2"/>
+          <p:cNvSpPr txBox="1"/>
+          <p:nvPr/>
+        </p:nvSpPr>
+        <p:spPr>
+          <a:xfrm>
+            <a:off x="502920" y="1051560"/>
+            <a:ext cx="11155680" cy="5394960"/>
+          </a:xfrm>
+          <a:prstGeom prst="rect">
+            <a:avLst/>
+          </a:prstGeom>
+          <a:noFill/>
+        </p:spPr>
+        <p:txBody>
+          <a:bodyPr wrap="none">
+            <a:spAutoFit/>
+          </a:bodyPr>
+          <a:lstStyle/>
+          <a:p>
+            <a:pPr>
+              <a:spcAft>
+                <a:spcPts val="0"/>
+              </a:spcAft>
+            </a:pPr>
+            <a:r>
+              <a:rPr sz="1700">
+                <a:solidFill>
+                  <a:srgbClr val="6D8C97"/>
+                </a:solidFill>
+                <a:latin typeface="Consolas"/>
+              </a:rPr>
+              <a:t>  19  </a:t>
+            </a:r>
+            <a:r>
+              <a:rPr sz="1700">
+                <a:solidFill>
+                  <a:srgbClr val="7FE0A0"/>
+                </a:solidFill>
+                <a:latin typeface="Consolas"/>
+              </a:rPr>
+              <a:t> </a:t>
+            </a:r>
+          </a:p>
+          <a:p>
+            <a:pPr>
+              <a:spcAft>
+                <a:spcPts val="0"/>
+              </a:spcAft>
+            </a:pPr>
+            <a:r>
+              <a:rPr sz="1700">
+                <a:solidFill>
+                  <a:srgbClr val="6D8C97"/>
+                </a:solidFill>
+                <a:latin typeface="Consolas"/>
+              </a:rPr>
+              <a:t>  20  </a:t>
+            </a:r>
+            <a:r>
+              <a:rPr sz="1700">
+                <a:solidFill>
+                  <a:srgbClr val="7FE0A0"/>
+                </a:solidFill>
+                <a:latin typeface="Consolas"/>
+              </a:rPr>
+              <a:t>// Put one message into the chat box as a bubble.</a:t>
+            </a:r>
+          </a:p>
+          <a:p>
+            <a:pPr>
+              <a:spcAft>
+                <a:spcPts val="0"/>
+              </a:spcAft>
+            </a:pPr>
+            <a:r>
+              <a:rPr sz="1700">
+                <a:solidFill>
+                  <a:srgbClr val="6D8C97"/>
+                </a:solidFill>
+                <a:latin typeface="Consolas"/>
+              </a:rPr>
+              <a:t>  21  </a:t>
+            </a:r>
+            <a:r>
+              <a:rPr sz="1700">
+                <a:solidFill>
+                  <a:srgbClr val="7FE0A0"/>
+                </a:solidFill>
+                <a:latin typeface="Consolas"/>
+              </a:rPr>
+              <a:t>// 'who' is 'you', 'bot' or 'problem' - it picks the style.</a:t>
+            </a:r>
+          </a:p>
+          <a:p>
+            <a:pPr>
+              <a:spcAft>
+                <a:spcPts val="0"/>
+              </a:spcAft>
+            </a:pPr>
+            <a:r>
+              <a:rPr sz="1700">
+                <a:solidFill>
+                  <a:srgbClr val="6D8C97"/>
+                </a:solidFill>
+                <a:latin typeface="Consolas"/>
+              </a:rPr>
+              <a:t>  22  </a:t>
+            </a:r>
+            <a:r>
+              <a:rPr sz="1700">
+                <a:solidFill>
+                  <a:srgbClr val="DCECEF"/>
+                </a:solidFill>
+                <a:latin typeface="Consolas"/>
+              </a:rPr>
+              <a:t>function addLine(who, text) {</a:t>
+            </a:r>
+          </a:p>
+          <a:p>
+            <a:pPr>
+              <a:spcAft>
+                <a:spcPts val="0"/>
+              </a:spcAft>
+            </a:pPr>
+            <a:r>
+              <a:rPr sz="1700">
+                <a:solidFill>
+                  <a:srgbClr val="6D8C97"/>
+                </a:solidFill>
+                <a:latin typeface="Consolas"/>
+              </a:rPr>
+              <a:t>  23  </a:t>
+            </a:r>
+            <a:r>
+              <a:rPr sz="1700">
+                <a:solidFill>
+                  <a:srgbClr val="7FE0A0"/>
+                </a:solidFill>
+                <a:latin typeface="Consolas"/>
+              </a:rPr>
+              <a:t>  const bubble = document.createElement('div');</a:t>
+            </a:r>
+          </a:p>
+          <a:p>
+            <a:pPr>
+              <a:spcAft>
+                <a:spcPts val="0"/>
+              </a:spcAft>
+            </a:pPr>
+            <a:r>
+              <a:rPr sz="1700">
+                <a:solidFill>
+                  <a:srgbClr val="6D8C97"/>
+                </a:solidFill>
+                <a:latin typeface="Consolas"/>
+              </a:rPr>
+              <a:t>  24  </a:t>
+            </a:r>
+            <a:r>
+              <a:rPr sz="1700">
+                <a:solidFill>
+                  <a:srgbClr val="7FE0A0"/>
+                </a:solidFill>
+                <a:latin typeface="Consolas"/>
+              </a:rPr>
+              <a:t>  bubble.className = 'bubble ' + who;</a:t>
+            </a:r>
+          </a:p>
+          <a:p>
+            <a:pPr>
+              <a:spcAft>
+                <a:spcPts val="0"/>
+              </a:spcAft>
+            </a:pPr>
+            <a:r>
+              <a:rPr sz="1700">
+                <a:solidFill>
+                  <a:srgbClr val="6D8C97"/>
+                </a:solidFill>
+                <a:latin typeface="Consolas"/>
+              </a:rPr>
+              <a:t>  25  </a:t>
+            </a:r>
+            <a:r>
+              <a:rPr sz="1700">
+                <a:solidFill>
+                  <a:srgbClr val="7FE0A0"/>
+                </a:solidFill>
+                <a:latin typeface="Consolas"/>
+              </a:rPr>
+              <a:t>  bubble.textContent = text;</a:t>
+            </a:r>
+          </a:p>
+          <a:p>
+            <a:pPr>
+              <a:spcAft>
+                <a:spcPts val="0"/>
+              </a:spcAft>
+            </a:pPr>
+            <a:r>
+              <a:rPr sz="1700">
+                <a:solidFill>
+                  <a:srgbClr val="6D8C97"/>
+                </a:solidFill>
+                <a:latin typeface="Consolas"/>
+              </a:rPr>
+              <a:t>  26  </a:t>
+            </a:r>
+            <a:r>
+              <a:rPr sz="1700">
+                <a:solidFill>
+                  <a:srgbClr val="7FE0A0"/>
+                </a:solidFill>
+                <a:latin typeface="Consolas"/>
+              </a:rPr>
+              <a:t>  chat.appendChild(bubble);</a:t>
+            </a:r>
+          </a:p>
+          <a:p>
+            <a:pPr>
+              <a:spcAft>
+                <a:spcPts val="0"/>
+              </a:spcAft>
+            </a:pPr>
+            <a:r>
+              <a:rPr sz="1700">
+                <a:solidFill>
+                  <a:srgbClr val="6D8C97"/>
+                </a:solidFill>
+                <a:latin typeface="Consolas"/>
+              </a:rPr>
+              <a:t>  27  </a:t>
+            </a:r>
+            <a:r>
+              <a:rPr sz="1700">
+                <a:solidFill>
+                  <a:srgbClr val="7FE0A0"/>
+                </a:solidFill>
+                <a:latin typeface="Consolas"/>
+              </a:rPr>
+              <a:t>  chat.scrollTop = chat.scrollHeight;   // keep the newest message in view</a:t>
+            </a:r>
+          </a:p>
+          <a:p>
+            <a:pPr>
+              <a:spcAft>
+                <a:spcPts val="0"/>
+              </a:spcAft>
+            </a:pPr>
+            <a:r>
+              <a:rPr sz="1700">
+                <a:solidFill>
+                  <a:srgbClr val="6D8C97"/>
+                </a:solidFill>
+                <a:latin typeface="Consolas"/>
+              </a:rPr>
+              <a:t>  28  </a:t>
+            </a:r>
+            <a:r>
+              <a:rPr sz="1700">
+                <a:solidFill>
+                  <a:srgbClr val="7FE0A0"/>
+                </a:solidFill>
+                <a:latin typeface="Consolas"/>
+              </a:rPr>
+              <a:t>  return bubble;</a:t>
+            </a:r>
+          </a:p>
+          <a:p>
+            <a:pPr>
+              <a:spcAft>
+                <a:spcPts val="0"/>
+              </a:spcAft>
+            </a:pPr>
+            <a:r>
+              <a:rPr sz="1700">
+                <a:solidFill>
+                  <a:srgbClr val="6D8C97"/>
+                </a:solidFill>
+                <a:latin typeface="Consolas"/>
+              </a:rPr>
+              <a:t>  29  </a:t>
+            </a:r>
+            <a:r>
+              <a:rPr sz="1700">
+                <a:solidFill>
+                  <a:srgbClr val="DCECEF"/>
+                </a:solidFill>
+                <a:latin typeface="Consolas"/>
+              </a:rPr>
+              <a:t>}</a:t>
+            </a:r>
+          </a:p>
+        </p:txBody>
+      </p:sp>
+    </p:spTree>
+  </p:cSld>
+  <p:clrMapOvr>
+    <a:masterClrMapping/>
+  </p:clrMapOvr>
+</p:sld>
+</file>
+
+<file path=ppt/slides/slide16.xml><?xml version="1.0" encoding="utf-8"?>
+<p:sld xmlns:a="http://schemas.openxmlformats.org/drawingml/2006/main" xmlns:p="http://schemas.openxmlformats.org/presentationml/2006/main" xmlns:r="http://schemas.openxmlformats.org/officeDocument/2006/relationships">
+  <p:cSld>
+    <p:bg>
+      <p:bgPr>
+        <a:solidFill>
+          <a:srgbClr val="102127"/>
+        </a:solidFill>
+        <a:effectLst/>
+      </p:bgPr>
+    </p:bg>
+    <p:spTree>
+      <p:nvGrpSpPr>
+        <p:cNvPr id="1" name=""/>
+        <p:cNvGrpSpPr/>
+        <p:nvPr/>
+      </p:nvGrpSpPr>
+      <p:grpSpPr/>
+      <p:sp>
+        <p:nvSpPr>
+          <p:cNvPr id="2" name="TextBox 1"/>
+          <p:cNvSpPr txBox="1"/>
+          <p:nvPr/>
+        </p:nvSpPr>
+        <p:spPr>
+          <a:xfrm>
+            <a:off x="502920" y="274320"/>
+            <a:ext cx="11155680" cy="731520"/>
+          </a:xfrm>
+          <a:prstGeom prst="rect">
+            <a:avLst/>
+          </a:prstGeom>
+          <a:noFill/>
+        </p:spPr>
+        <p:txBody>
+          <a:bodyPr wrap="none">
+            <a:spAutoFit/>
+          </a:bodyPr>
+          <a:lstStyle/>
+          <a:p>
+            <a:r>
+              <a:rPr sz="2600" b="1">
+                <a:solidFill>
+                  <a:srgbClr val="01AEFD"/>
+                </a:solidFill>
+              </a:rPr>
+              <a:t>Type this into style.css  (2 of 5)</a:t>
+            </a:r>
+          </a:p>
+        </p:txBody>
+      </p:sp>
+      <p:sp>
+        <p:nvSpPr>
+          <p:cNvPr id="3" name="TextBox 2"/>
+          <p:cNvSpPr txBox="1"/>
+          <p:nvPr/>
+        </p:nvSpPr>
+        <p:spPr>
+          <a:xfrm>
+            <a:off x="502920" y="1051560"/>
+            <a:ext cx="11155680" cy="5394960"/>
+          </a:xfrm>
+          <a:prstGeom prst="rect">
+            <a:avLst/>
+          </a:prstGeom>
+          <a:noFill/>
+        </p:spPr>
+        <p:txBody>
+          <a:bodyPr wrap="none">
+            <a:spAutoFit/>
+          </a:bodyPr>
+          <a:lstStyle/>
+          <a:p>
+            <a:pPr>
+              <a:spcAft>
+                <a:spcPts val="0"/>
+              </a:spcAft>
+            </a:pPr>
+            <a:r>
+              <a:rPr sz="1400">
+                <a:solidFill>
+                  <a:srgbClr val="6D8C97"/>
+                </a:solidFill>
+                <a:latin typeface="Consolas"/>
+              </a:rPr>
+              <a:t>  35  </a:t>
+            </a:r>
+            <a:r>
+              <a:rPr sz="1400">
+                <a:solidFill>
+                  <a:srgbClr val="7FE0A0"/>
+                </a:solidFill>
+                <a:latin typeface="Consolas"/>
+              </a:rPr>
+              <a:t>.bubble {</a:t>
+            </a:r>
+          </a:p>
+          <a:p>
+            <a:pPr>
+              <a:spcAft>
+                <a:spcPts val="0"/>
+              </a:spcAft>
+            </a:pPr>
+            <a:r>
+              <a:rPr sz="1400">
+                <a:solidFill>
+                  <a:srgbClr val="6D8C97"/>
+                </a:solidFill>
+                <a:latin typeface="Consolas"/>
+              </a:rPr>
+              <a:t>  36  </a:t>
+            </a:r>
+            <a:r>
+              <a:rPr sz="1400">
+                <a:solidFill>
+                  <a:srgbClr val="7FE0A0"/>
+                </a:solidFill>
+                <a:latin typeface="Consolas"/>
+              </a:rPr>
+              <a:t>  max-width: 78%;</a:t>
+            </a:r>
+          </a:p>
+          <a:p>
+            <a:pPr>
+              <a:spcAft>
+                <a:spcPts val="0"/>
+              </a:spcAft>
+            </a:pPr>
+            <a:r>
+              <a:rPr sz="1400">
+                <a:solidFill>
+                  <a:srgbClr val="6D8C97"/>
+                </a:solidFill>
+                <a:latin typeface="Consolas"/>
+              </a:rPr>
+              <a:t>  37  </a:t>
+            </a:r>
+            <a:r>
+              <a:rPr sz="1400">
+                <a:solidFill>
+                  <a:srgbClr val="7FE0A0"/>
+                </a:solidFill>
+                <a:latin typeface="Consolas"/>
+              </a:rPr>
+              <a:t>  margin: 0 0 10px;</a:t>
+            </a:r>
+          </a:p>
+          <a:p>
+            <a:pPr>
+              <a:spcAft>
+                <a:spcPts val="0"/>
+              </a:spcAft>
+            </a:pPr>
+            <a:r>
+              <a:rPr sz="1400">
+                <a:solidFill>
+                  <a:srgbClr val="6D8C97"/>
+                </a:solidFill>
+                <a:latin typeface="Consolas"/>
+              </a:rPr>
+              <a:t>  38  </a:t>
+            </a:r>
+            <a:r>
+              <a:rPr sz="1400">
+                <a:solidFill>
+                  <a:srgbClr val="7FE0A0"/>
+                </a:solidFill>
+                <a:latin typeface="Consolas"/>
+              </a:rPr>
+              <a:t>  padding: 10px 13px;</a:t>
+            </a:r>
+          </a:p>
+          <a:p>
+            <a:pPr>
+              <a:spcAft>
+                <a:spcPts val="0"/>
+              </a:spcAft>
+            </a:pPr>
+            <a:r>
+              <a:rPr sz="1400">
+                <a:solidFill>
+                  <a:srgbClr val="6D8C97"/>
+                </a:solidFill>
+                <a:latin typeface="Consolas"/>
+              </a:rPr>
+              <a:t>  39  </a:t>
+            </a:r>
+            <a:r>
+              <a:rPr sz="1400">
+                <a:solidFill>
+                  <a:srgbClr val="7FE0A0"/>
+                </a:solidFill>
+                <a:latin typeface="Consolas"/>
+              </a:rPr>
+              <a:t>  border-radius: 12px;</a:t>
+            </a:r>
+          </a:p>
+          <a:p>
+            <a:pPr>
+              <a:spcAft>
+                <a:spcPts val="0"/>
+              </a:spcAft>
+            </a:pPr>
+            <a:r>
+              <a:rPr sz="1400">
+                <a:solidFill>
+                  <a:srgbClr val="6D8C97"/>
+                </a:solidFill>
+                <a:latin typeface="Consolas"/>
+              </a:rPr>
+              <a:t>  40  </a:t>
+            </a:r>
+            <a:r>
+              <a:rPr sz="1400">
+                <a:solidFill>
+                  <a:srgbClr val="7FE0A0"/>
+                </a:solidFill>
+                <a:latin typeface="Consolas"/>
+              </a:rPr>
+              <a:t>  line-height: 1.5;</a:t>
+            </a:r>
+          </a:p>
+          <a:p>
+            <a:pPr>
+              <a:spcAft>
+                <a:spcPts val="0"/>
+              </a:spcAft>
+            </a:pPr>
+            <a:r>
+              <a:rPr sz="1400">
+                <a:solidFill>
+                  <a:srgbClr val="6D8C97"/>
+                </a:solidFill>
+                <a:latin typeface="Consolas"/>
+              </a:rPr>
+              <a:t>  41  </a:t>
+            </a:r>
+            <a:r>
+              <a:rPr sz="1400">
+                <a:solidFill>
+                  <a:srgbClr val="7FE0A0"/>
+                </a:solidFill>
+                <a:latin typeface="Consolas"/>
+              </a:rPr>
+              <a:t>  white-space: pre-wrap;</a:t>
+            </a:r>
+          </a:p>
+          <a:p>
+            <a:pPr>
+              <a:spcAft>
+                <a:spcPts val="0"/>
+              </a:spcAft>
+            </a:pPr>
+            <a:r>
+              <a:rPr sz="1400">
+                <a:solidFill>
+                  <a:srgbClr val="6D8C97"/>
+                </a:solidFill>
+                <a:latin typeface="Consolas"/>
+              </a:rPr>
+              <a:t>  42  </a:t>
+            </a:r>
+            <a:r>
+              <a:rPr sz="1400">
+                <a:solidFill>
+                  <a:srgbClr val="7FE0A0"/>
+                </a:solidFill>
+                <a:latin typeface="Consolas"/>
+              </a:rPr>
+              <a:t>}</a:t>
+            </a:r>
+          </a:p>
+          <a:p>
+            <a:pPr>
+              <a:spcAft>
+                <a:spcPts val="0"/>
+              </a:spcAft>
+            </a:pPr>
+            <a:r>
+              <a:rPr sz="1400">
+                <a:solidFill>
+                  <a:srgbClr val="6D8C97"/>
+                </a:solidFill>
+                <a:latin typeface="Consolas"/>
+              </a:rPr>
+              <a:t>  43  </a:t>
+            </a:r>
+            <a:r>
+              <a:rPr sz="1400">
+                <a:solidFill>
+                  <a:srgbClr val="7FE0A0"/>
+                </a:solidFill>
+                <a:latin typeface="Consolas"/>
+              </a:rPr>
+              <a:t>.bubble.you {</a:t>
+            </a:r>
+          </a:p>
+          <a:p>
+            <a:pPr>
+              <a:spcAft>
+                <a:spcPts val="0"/>
+              </a:spcAft>
+            </a:pPr>
+            <a:r>
+              <a:rPr sz="1400">
+                <a:solidFill>
+                  <a:srgbClr val="6D8C97"/>
+                </a:solidFill>
+                <a:latin typeface="Consolas"/>
+              </a:rPr>
+              <a:t>  44  </a:t>
+            </a:r>
+            <a:r>
+              <a:rPr sz="1400">
+                <a:solidFill>
+                  <a:srgbClr val="7FE0A0"/>
+                </a:solidFill>
+                <a:latin typeface="Consolas"/>
+              </a:rPr>
+              <a:t>  margin-left: auto;</a:t>
+            </a:r>
+          </a:p>
+          <a:p>
+            <a:pPr>
+              <a:spcAft>
+                <a:spcPts val="0"/>
+              </a:spcAft>
+            </a:pPr>
+            <a:r>
+              <a:rPr sz="1400">
+                <a:solidFill>
+                  <a:srgbClr val="6D8C97"/>
+                </a:solidFill>
+                <a:latin typeface="Consolas"/>
+              </a:rPr>
+              <a:t>  45  </a:t>
+            </a:r>
+            <a:r>
+              <a:rPr sz="1400">
+                <a:solidFill>
+                  <a:srgbClr val="7FE0A0"/>
+                </a:solidFill>
+                <a:latin typeface="Consolas"/>
+              </a:rPr>
+              <a:t>  background: #01aefd;</a:t>
+            </a:r>
+          </a:p>
+          <a:p>
+            <a:pPr>
+              <a:spcAft>
+                <a:spcPts val="0"/>
+              </a:spcAft>
+            </a:pPr>
+            <a:r>
+              <a:rPr sz="1400">
+                <a:solidFill>
+                  <a:srgbClr val="6D8C97"/>
+                </a:solidFill>
+                <a:latin typeface="Consolas"/>
+              </a:rPr>
+              <a:t>  46  </a:t>
+            </a:r>
+            <a:r>
+              <a:rPr sz="1400">
+                <a:solidFill>
+                  <a:srgbClr val="7FE0A0"/>
+                </a:solidFill>
+                <a:latin typeface="Consolas"/>
+              </a:rPr>
+              <a:t>  color: #ffffff;</a:t>
+            </a:r>
+          </a:p>
+          <a:p>
+            <a:pPr>
+              <a:spcAft>
+                <a:spcPts val="0"/>
+              </a:spcAft>
+            </a:pPr>
+            <a:r>
+              <a:rPr sz="1400">
+                <a:solidFill>
+                  <a:srgbClr val="6D8C97"/>
+                </a:solidFill>
+                <a:latin typeface="Consolas"/>
+              </a:rPr>
+              <a:t>  47  </a:t>
+            </a:r>
+            <a:r>
+              <a:rPr sz="1400">
+                <a:solidFill>
+                  <a:srgbClr val="7FE0A0"/>
+                </a:solidFill>
+                <a:latin typeface="Consolas"/>
+              </a:rPr>
+              <a:t>  border-bottom-right-radius: 3px;</a:t>
+            </a:r>
+          </a:p>
+          <a:p>
+            <a:pPr>
+              <a:spcAft>
+                <a:spcPts val="0"/>
+              </a:spcAft>
+            </a:pPr>
+            <a:r>
+              <a:rPr sz="1400">
+                <a:solidFill>
+                  <a:srgbClr val="6D8C97"/>
+                </a:solidFill>
+                <a:latin typeface="Consolas"/>
+              </a:rPr>
+              <a:t>  48  </a:t>
+            </a:r>
+            <a:r>
+              <a:rPr sz="1400">
+                <a:solidFill>
+                  <a:srgbClr val="7FE0A0"/>
+                </a:solidFill>
+                <a:latin typeface="Consolas"/>
+              </a:rPr>
+              <a:t>}</a:t>
+            </a:r>
+          </a:p>
+          <a:p>
+            <a:pPr>
+              <a:spcAft>
+                <a:spcPts val="0"/>
+              </a:spcAft>
+            </a:pPr>
+            <a:r>
+              <a:rPr sz="1400">
+                <a:solidFill>
+                  <a:srgbClr val="6D8C97"/>
+                </a:solidFill>
+                <a:latin typeface="Consolas"/>
+              </a:rPr>
+              <a:t>  49  </a:t>
+            </a:r>
+            <a:r>
+              <a:rPr sz="1400">
+                <a:solidFill>
+                  <a:srgbClr val="7FE0A0"/>
+                </a:solidFill>
+                <a:latin typeface="Consolas"/>
+              </a:rPr>
+              <a:t>.bubble.bot {</a:t>
+            </a:r>
+          </a:p>
+        </p:txBody>
+      </p:sp>
+    </p:spTree>
+  </p:cSld>
+  <p:clrMapOvr>
+    <a:masterClrMapping/>
+  </p:clrMapOvr>
+</p:sld>
+</file>
+
+<file path=ppt/slides/slide17.xml><?xml version="1.0" encoding="utf-8"?>
+<p:sld xmlns:a="http://schemas.openxmlformats.org/drawingml/2006/main" xmlns:p="http://schemas.openxmlformats.org/presentationml/2006/main" xmlns:r="http://schemas.openxmlformats.org/officeDocument/2006/relationships">
+  <p:cSld>
+    <p:bg>
+      <p:bgPr>
+        <a:solidFill>
+          <a:srgbClr val="102127"/>
+        </a:solidFill>
+        <a:effectLst/>
+      </p:bgPr>
+    </p:bg>
+    <p:spTree>
+      <p:nvGrpSpPr>
+        <p:cNvPr id="1" name=""/>
+        <p:cNvGrpSpPr/>
+        <p:nvPr/>
+      </p:nvGrpSpPr>
+      <p:grpSpPr/>
+      <p:sp>
+        <p:nvSpPr>
+          <p:cNvPr id="2" name="TextBox 1"/>
+          <p:cNvSpPr txBox="1"/>
+          <p:nvPr/>
+        </p:nvSpPr>
+        <p:spPr>
+          <a:xfrm>
+            <a:off x="502920" y="274320"/>
+            <a:ext cx="11155680" cy="731520"/>
+          </a:xfrm>
+          <a:prstGeom prst="rect">
+            <a:avLst/>
+          </a:prstGeom>
+          <a:noFill/>
+        </p:spPr>
+        <p:txBody>
+          <a:bodyPr wrap="none">
+            <a:spAutoFit/>
+          </a:bodyPr>
+          <a:lstStyle/>
+          <a:p>
+            <a:r>
+              <a:rPr sz="2600" b="1">
+                <a:solidFill>
+                  <a:srgbClr val="01AEFD"/>
+                </a:solidFill>
+              </a:rPr>
+              <a:t>Type this into style.css  (3 of 5)</a:t>
+            </a:r>
+          </a:p>
+        </p:txBody>
+      </p:sp>
+      <p:sp>
+        <p:nvSpPr>
+          <p:cNvPr id="3" name="TextBox 2"/>
+          <p:cNvSpPr txBox="1"/>
+          <p:nvPr/>
+        </p:nvSpPr>
+        <p:spPr>
+          <a:xfrm>
+            <a:off x="502920" y="1051560"/>
+            <a:ext cx="11155680" cy="5394960"/>
+          </a:xfrm>
+          <a:prstGeom prst="rect">
+            <a:avLst/>
+          </a:prstGeom>
+          <a:noFill/>
+        </p:spPr>
+        <p:txBody>
+          <a:bodyPr wrap="none">
+            <a:spAutoFit/>
+          </a:bodyPr>
+          <a:lstStyle/>
+          <a:p>
+            <a:pPr>
+              <a:spcAft>
+                <a:spcPts val="0"/>
+              </a:spcAft>
+            </a:pPr>
+            <a:r>
+              <a:rPr sz="1700">
+                <a:solidFill>
+                  <a:srgbClr val="6D8C97"/>
+                </a:solidFill>
+                <a:latin typeface="Consolas"/>
+              </a:rPr>
+              <a:t>  50  </a:t>
+            </a:r>
+            <a:r>
+              <a:rPr sz="1700">
+                <a:solidFill>
+                  <a:srgbClr val="7FE0A0"/>
+                </a:solidFill>
+                <a:latin typeface="Consolas"/>
+              </a:rPr>
+              <a:t>  background: #f1f5f9;</a:t>
+            </a:r>
+          </a:p>
+          <a:p>
+            <a:pPr>
+              <a:spcAft>
+                <a:spcPts val="0"/>
+              </a:spcAft>
+            </a:pPr>
+            <a:r>
+              <a:rPr sz="1700">
+                <a:solidFill>
+                  <a:srgbClr val="6D8C97"/>
+                </a:solidFill>
+                <a:latin typeface="Consolas"/>
+              </a:rPr>
+              <a:t>  51  </a:t>
+            </a:r>
+            <a:r>
+              <a:rPr sz="1700">
+                <a:solidFill>
+                  <a:srgbClr val="7FE0A0"/>
+                </a:solidFill>
+                <a:latin typeface="Consolas"/>
+              </a:rPr>
+              <a:t>  border-bottom-left-radius: 3px;</a:t>
+            </a:r>
+          </a:p>
+          <a:p>
+            <a:pPr>
+              <a:spcAft>
+                <a:spcPts val="0"/>
+              </a:spcAft>
+            </a:pPr>
+            <a:r>
+              <a:rPr sz="1700">
+                <a:solidFill>
+                  <a:srgbClr val="6D8C97"/>
+                </a:solidFill>
+                <a:latin typeface="Consolas"/>
+              </a:rPr>
+              <a:t>  52  </a:t>
+            </a:r>
+            <a:r>
+              <a:rPr sz="1700">
+                <a:solidFill>
+                  <a:srgbClr val="7FE0A0"/>
+                </a:solidFill>
+                <a:latin typeface="Consolas"/>
+              </a:rPr>
+              <a:t>}</a:t>
+            </a:r>
+          </a:p>
+          <a:p>
+            <a:pPr>
+              <a:spcAft>
+                <a:spcPts val="0"/>
+              </a:spcAft>
+            </a:pPr>
+            <a:r>
+              <a:rPr sz="1700">
+                <a:solidFill>
+                  <a:srgbClr val="6D8C97"/>
+                </a:solidFill>
+                <a:latin typeface="Consolas"/>
+              </a:rPr>
+              <a:t>  53  </a:t>
+            </a:r>
+            <a:r>
+              <a:rPr sz="1700">
+                <a:solidFill>
+                  <a:srgbClr val="7FE0A0"/>
+                </a:solidFill>
+                <a:latin typeface="Consolas"/>
+              </a:rPr>
+              <a:t>.bubble.problem {</a:t>
+            </a:r>
+          </a:p>
+          <a:p>
+            <a:pPr>
+              <a:spcAft>
+                <a:spcPts val="0"/>
+              </a:spcAft>
+            </a:pPr>
+            <a:r>
+              <a:rPr sz="1700">
+                <a:solidFill>
+                  <a:srgbClr val="6D8C97"/>
+                </a:solidFill>
+                <a:latin typeface="Consolas"/>
+              </a:rPr>
+              <a:t>  54  </a:t>
+            </a:r>
+            <a:r>
+              <a:rPr sz="1700">
+                <a:solidFill>
+                  <a:srgbClr val="7FE0A0"/>
+                </a:solidFill>
+                <a:latin typeface="Consolas"/>
+              </a:rPr>
+              <a:t>  background: #fff4e0;</a:t>
+            </a:r>
+          </a:p>
+          <a:p>
+            <a:pPr>
+              <a:spcAft>
+                <a:spcPts val="0"/>
+              </a:spcAft>
+            </a:pPr>
+            <a:r>
+              <a:rPr sz="1700">
+                <a:solidFill>
+                  <a:srgbClr val="6D8C97"/>
+                </a:solidFill>
+                <a:latin typeface="Consolas"/>
+              </a:rPr>
+              <a:t>  55  </a:t>
+            </a:r>
+            <a:r>
+              <a:rPr sz="1700">
+                <a:solidFill>
+                  <a:srgbClr val="7FE0A0"/>
+                </a:solidFill>
+                <a:latin typeface="Consolas"/>
+              </a:rPr>
+              <a:t>  color: #8a5a12;</a:t>
+            </a:r>
+          </a:p>
+          <a:p>
+            <a:pPr>
+              <a:spcAft>
+                <a:spcPts val="0"/>
+              </a:spcAft>
+            </a:pPr>
+            <a:r>
+              <a:rPr sz="1700">
+                <a:solidFill>
+                  <a:srgbClr val="6D8C97"/>
+                </a:solidFill>
+                <a:latin typeface="Consolas"/>
+              </a:rPr>
+              <a:t>  56  </a:t>
+            </a:r>
+            <a:r>
+              <a:rPr sz="1700">
+                <a:solidFill>
+                  <a:srgbClr val="7FE0A0"/>
+                </a:solidFill>
+                <a:latin typeface="Consolas"/>
+              </a:rPr>
+              <a:t>  font-size: 14px;</a:t>
+            </a:r>
+          </a:p>
+          <a:p>
+            <a:pPr>
+              <a:spcAft>
+                <a:spcPts val="0"/>
+              </a:spcAft>
+            </a:pPr>
+            <a:r>
+              <a:rPr sz="1700">
+                <a:solidFill>
+                  <a:srgbClr val="6D8C97"/>
+                </a:solidFill>
+                <a:latin typeface="Consolas"/>
+              </a:rPr>
+              <a:t>  57  </a:t>
+            </a:r>
+            <a:r>
+              <a:rPr sz="1700">
+                <a:solidFill>
+                  <a:srgbClr val="7FE0A0"/>
+                </a:solidFill>
+                <a:latin typeface="Consolas"/>
+              </a:rPr>
+              <a:t>}</a:t>
+            </a:r>
+          </a:p>
+        </p:txBody>
+      </p:sp>
+    </p:spTree>
+  </p:cSld>
+  <p:clrMapOvr>
+    <a:masterClrMapping/>
+  </p:clrMapOvr>
+</p:sld>
+</file>
+
+<file path=ppt/slides/slide18.xml><?xml version="1.0" encoding="utf-8"?>
+<p:sld xmlns:a="http://schemas.openxmlformats.org/drawingml/2006/main" xmlns:p="http://schemas.openxmlformats.org/presentationml/2006/main" xmlns:r="http://schemas.openxmlformats.org/officeDocument/2006/relationships">
+  <p:cSld>
+    <p:bg>
+      <p:bgPr>
+        <a:solidFill>
+          <a:srgbClr val="102127"/>
+        </a:solidFill>
+        <a:effectLst/>
+      </p:bgPr>
+    </p:bg>
+    <p:spTree>
+      <p:nvGrpSpPr>
+        <p:cNvPr id="1" name=""/>
+        <p:cNvGrpSpPr/>
+        <p:nvPr/>
+      </p:nvGrpSpPr>
+      <p:grpSpPr/>
+      <p:sp>
+        <p:nvSpPr>
+          <p:cNvPr id="2" name="TextBox 1"/>
+          <p:cNvSpPr txBox="1"/>
+          <p:nvPr/>
+        </p:nvSpPr>
+        <p:spPr>
+          <a:xfrm>
+            <a:off x="502920" y="274320"/>
+            <a:ext cx="11155680" cy="731520"/>
+          </a:xfrm>
+          <a:prstGeom prst="rect">
+            <a:avLst/>
+          </a:prstGeom>
+          <a:noFill/>
+        </p:spPr>
+        <p:txBody>
+          <a:bodyPr wrap="none">
+            <a:spAutoFit/>
+          </a:bodyPr>
+          <a:lstStyle/>
+          <a:p>
+            <a:r>
+              <a:rPr sz="2600" b="1">
+                <a:solidFill>
+                  <a:srgbClr val="01AEFD"/>
+                </a:solidFill>
+              </a:rPr>
+              <a:t>Type this into style.css  (4 of 5)</a:t>
+            </a:r>
+          </a:p>
+        </p:txBody>
+      </p:sp>
+      <p:sp>
+        <p:nvSpPr>
+          <p:cNvPr id="3" name="TextBox 2"/>
+          <p:cNvSpPr txBox="1"/>
+          <p:nvPr/>
+        </p:nvSpPr>
+        <p:spPr>
+          <a:xfrm>
+            <a:off x="502920" y="1051560"/>
+            <a:ext cx="11155680" cy="5394960"/>
+          </a:xfrm>
+          <a:prstGeom prst="rect">
+            <a:avLst/>
+          </a:prstGeom>
+          <a:noFill/>
+        </p:spPr>
+        <p:txBody>
+          <a:bodyPr wrap="none">
+            <a:spAutoFit/>
+          </a:bodyPr>
+          <a:lstStyle/>
+          <a:p>
+            <a:pPr>
+              <a:spcAft>
+                <a:spcPts val="0"/>
+              </a:spcAft>
+            </a:pPr>
+            <a:r>
+              <a:rPr sz="1400">
+                <a:solidFill>
+                  <a:srgbClr val="6D8C97"/>
+                </a:solidFill>
+                <a:latin typeface="Consolas"/>
+              </a:rPr>
+              <a:t>   7  </a:t>
+            </a:r>
+            <a:r>
+              <a:rPr sz="1400">
+                <a:solidFill>
+                  <a:srgbClr val="DCECEF"/>
+                </a:solidFill>
+                <a:latin typeface="Consolas"/>
+              </a:rPr>
+              <a:t>.app {</a:t>
+            </a:r>
+          </a:p>
+          <a:p>
+            <a:pPr>
+              <a:spcAft>
+                <a:spcPts val="0"/>
+              </a:spcAft>
+            </a:pPr>
+            <a:r>
+              <a:rPr sz="1400">
+                <a:solidFill>
+                  <a:srgbClr val="6D8C97"/>
+                </a:solidFill>
+                <a:latin typeface="Consolas"/>
+              </a:rPr>
+              <a:t>   8  </a:t>
+            </a:r>
+            <a:r>
+              <a:rPr sz="1400">
+                <a:solidFill>
+                  <a:srgbClr val="DCECEF"/>
+                </a:solidFill>
+                <a:latin typeface="Consolas"/>
+              </a:rPr>
+              <a:t>  max-width: 620px;</a:t>
+            </a:r>
+          </a:p>
+          <a:p>
+            <a:pPr>
+              <a:spcAft>
+                <a:spcPts val="0"/>
+              </a:spcAft>
+            </a:pPr>
+            <a:r>
+              <a:rPr sz="1400">
+                <a:solidFill>
+                  <a:srgbClr val="6D8C97"/>
+                </a:solidFill>
+                <a:latin typeface="Consolas"/>
+              </a:rPr>
+              <a:t>   9  </a:t>
+            </a:r>
+            <a:r>
+              <a:rPr sz="1400">
+                <a:solidFill>
+                  <a:srgbClr val="DCECEF"/>
+                </a:solidFill>
+                <a:latin typeface="Consolas"/>
+              </a:rPr>
+              <a:t>  margin: 0 auto;</a:t>
+            </a:r>
+          </a:p>
+          <a:p>
+            <a:pPr>
+              <a:spcAft>
+                <a:spcPts val="0"/>
+              </a:spcAft>
+            </a:pPr>
+            <a:r>
+              <a:rPr sz="1400">
+                <a:solidFill>
+                  <a:srgbClr val="6D8C97"/>
+                </a:solidFill>
+                <a:latin typeface="Consolas"/>
+              </a:rPr>
+              <a:t>  10  </a:t>
+            </a:r>
+            <a:r>
+              <a:rPr sz="1400">
+                <a:solidFill>
+                  <a:srgbClr val="DCECEF"/>
+                </a:solidFill>
+                <a:latin typeface="Consolas"/>
+              </a:rPr>
+              <a:t>  padding: 20px;</a:t>
+            </a:r>
+          </a:p>
+          <a:p>
+            <a:pPr>
+              <a:spcAft>
+                <a:spcPts val="0"/>
+              </a:spcAft>
+            </a:pPr>
+            <a:r>
+              <a:rPr sz="1400">
+                <a:solidFill>
+                  <a:srgbClr val="6D8C97"/>
+                </a:solidFill>
+                <a:latin typeface="Consolas"/>
+              </a:rPr>
+              <a:t>  11  </a:t>
+            </a:r>
+            <a:r>
+              <a:rPr sz="1400">
+                <a:solidFill>
+                  <a:srgbClr val="DCECEF"/>
+                </a:solidFill>
+                <a:latin typeface="Consolas"/>
+              </a:rPr>
+              <a:t>}</a:t>
+            </a:r>
+          </a:p>
+          <a:p>
+            <a:pPr>
+              <a:spcAft>
+                <a:spcPts val="0"/>
+              </a:spcAft>
+            </a:pPr>
+            <a:r>
+              <a:rPr sz="1400">
+                <a:solidFill>
+                  <a:srgbClr val="6D8C97"/>
+                </a:solidFill>
+                <a:latin typeface="Consolas"/>
+              </a:rPr>
+              <a:t>  12  </a:t>
+            </a:r>
+            <a:r>
+              <a:rPr sz="1400">
+                <a:solidFill>
+                  <a:srgbClr val="DCECEF"/>
+                </a:solidFill>
+                <a:latin typeface="Consolas"/>
+              </a:rPr>
+              <a:t>.top h1 { margin: 0 0 4px; font-size: 26px; }</a:t>
+            </a:r>
+          </a:p>
+          <a:p>
+            <a:pPr>
+              <a:spcAft>
+                <a:spcPts val="0"/>
+              </a:spcAft>
+            </a:pPr>
+            <a:r>
+              <a:rPr sz="1400">
+                <a:solidFill>
+                  <a:srgbClr val="6D8C97"/>
+                </a:solidFill>
+                <a:latin typeface="Consolas"/>
+              </a:rPr>
+              <a:t>  13  </a:t>
+            </a:r>
+            <a:r>
+              <a:rPr sz="1400">
+                <a:solidFill>
+                  <a:srgbClr val="DCECEF"/>
+                </a:solidFill>
+                <a:latin typeface="Consolas"/>
+              </a:rPr>
+              <a:t>.tag { margin: 0 0 18px; color: #6b7787; font-size: 14px; }</a:t>
+            </a:r>
+          </a:p>
+          <a:p>
+            <a:pPr>
+              <a:spcAft>
+                <a:spcPts val="0"/>
+              </a:spcAft>
+            </a:pPr>
+            <a:r>
+              <a:rPr sz="1400">
+                <a:solidFill>
+                  <a:srgbClr val="6D8C97"/>
+                </a:solidFill>
+                <a:latin typeface="Consolas"/>
+              </a:rPr>
+              <a:t>  14  </a:t>
+            </a:r>
+            <a:r>
+              <a:rPr sz="1400">
+                <a:solidFill>
+                  <a:srgbClr val="DCECEF"/>
+                </a:solidFill>
+                <a:latin typeface="Consolas"/>
+              </a:rPr>
+              <a:t>.chat {</a:t>
+            </a:r>
+          </a:p>
+          <a:p>
+            <a:pPr>
+              <a:spcAft>
+                <a:spcPts val="0"/>
+              </a:spcAft>
+            </a:pPr>
+            <a:r>
+              <a:rPr sz="1400">
+                <a:solidFill>
+                  <a:srgbClr val="6D8C97"/>
+                </a:solidFill>
+                <a:latin typeface="Consolas"/>
+              </a:rPr>
+              <a:t>  15  </a:t>
+            </a:r>
+            <a:r>
+              <a:rPr sz="1400">
+                <a:solidFill>
+                  <a:srgbClr val="7FE0A0"/>
+                </a:solidFill>
+                <a:latin typeface="Consolas"/>
+              </a:rPr>
+              <a:t>  display: flex;</a:t>
+            </a:r>
+          </a:p>
+          <a:p>
+            <a:pPr>
+              <a:spcAft>
+                <a:spcPts val="0"/>
+              </a:spcAft>
+            </a:pPr>
+            <a:r>
+              <a:rPr sz="1400">
+                <a:solidFill>
+                  <a:srgbClr val="6D8C97"/>
+                </a:solidFill>
+                <a:latin typeface="Consolas"/>
+              </a:rPr>
+              <a:t>  16  </a:t>
+            </a:r>
+            <a:r>
+              <a:rPr sz="1400">
+                <a:solidFill>
+                  <a:srgbClr val="7FE0A0"/>
+                </a:solidFill>
+                <a:latin typeface="Consolas"/>
+              </a:rPr>
+              <a:t>  flex-direction: column;</a:t>
+            </a:r>
+          </a:p>
+          <a:p>
+            <a:pPr>
+              <a:spcAft>
+                <a:spcPts val="0"/>
+              </a:spcAft>
+            </a:pPr>
+            <a:r>
+              <a:rPr sz="1400">
+                <a:solidFill>
+                  <a:srgbClr val="6D8C97"/>
+                </a:solidFill>
+                <a:latin typeface="Consolas"/>
+              </a:rPr>
+              <a:t>  17  </a:t>
+            </a:r>
+            <a:r>
+              <a:rPr sz="1400">
+                <a:solidFill>
+                  <a:srgbClr val="7FE0A0"/>
+                </a:solidFill>
+                <a:latin typeface="Consolas"/>
+              </a:rPr>
+              <a:t>  height: 340px;</a:t>
+            </a:r>
+          </a:p>
+          <a:p>
+            <a:pPr>
+              <a:spcAft>
+                <a:spcPts val="0"/>
+              </a:spcAft>
+            </a:pPr>
+            <a:r>
+              <a:rPr sz="1400">
+                <a:solidFill>
+                  <a:srgbClr val="6D8C97"/>
+                </a:solidFill>
+                <a:latin typeface="Consolas"/>
+              </a:rPr>
+              <a:t>  18  </a:t>
+            </a:r>
+            <a:r>
+              <a:rPr sz="1400">
+                <a:solidFill>
+                  <a:srgbClr val="7FE0A0"/>
+                </a:solidFill>
+                <a:latin typeface="Consolas"/>
+              </a:rPr>
+              <a:t>  overflow-y: auto;</a:t>
+            </a:r>
+          </a:p>
+          <a:p>
+            <a:pPr>
+              <a:spcAft>
+                <a:spcPts val="0"/>
+              </a:spcAft>
+            </a:pPr>
+            <a:r>
+              <a:rPr sz="1400">
+                <a:solidFill>
+                  <a:srgbClr val="6D8C97"/>
+                </a:solidFill>
+                <a:latin typeface="Consolas"/>
+              </a:rPr>
+              <a:t>  19  </a:t>
+            </a:r>
+            <a:r>
+              <a:rPr sz="1400">
+                <a:solidFill>
+                  <a:srgbClr val="DCECEF"/>
+                </a:solidFill>
+                <a:latin typeface="Consolas"/>
+              </a:rPr>
+              <a:t>  padding: 12px;</a:t>
+            </a:r>
+          </a:p>
+          <a:p>
+            <a:pPr>
+              <a:spcAft>
+                <a:spcPts val="0"/>
+              </a:spcAft>
+            </a:pPr>
+            <a:r>
+              <a:rPr sz="1400">
+                <a:solidFill>
+                  <a:srgbClr val="6D8C97"/>
+                </a:solidFill>
+                <a:latin typeface="Consolas"/>
+              </a:rPr>
+              <a:t>  20  </a:t>
+            </a:r>
+            <a:r>
+              <a:rPr sz="1400">
+                <a:solidFill>
+                  <a:srgbClr val="DCECEF"/>
+                </a:solidFill>
+                <a:latin typeface="Consolas"/>
+              </a:rPr>
+              <a:t>  background: #ffffff;</a:t>
+            </a:r>
+          </a:p>
+          <a:p>
+            <a:pPr>
+              <a:spcAft>
+                <a:spcPts val="0"/>
+              </a:spcAft>
+            </a:pPr>
+            <a:r>
+              <a:rPr sz="1400">
+                <a:solidFill>
+                  <a:srgbClr val="6D8C97"/>
+                </a:solidFill>
+                <a:latin typeface="Consolas"/>
+              </a:rPr>
+              <a:t>  21  </a:t>
+            </a:r>
+            <a:r>
+              <a:rPr sz="1400">
+                <a:solidFill>
+                  <a:srgbClr val="DCECEF"/>
+                </a:solidFill>
+                <a:latin typeface="Consolas"/>
+              </a:rPr>
+              <a:t>  border: 1px solid #dbe3ec;</a:t>
+            </a:r>
+          </a:p>
+        </p:txBody>
+      </p:sp>
+    </p:spTree>
+  </p:cSld>
+  <p:clrMapOvr>
+    <a:masterClrMapping/>
+  </p:clrMapOvr>
+</p:sld>
+</file>
+
+<file path=ppt/slides/slide19.xml><?xml version="1.0" encoding="utf-8"?>
+<p:sld xmlns:a="http://schemas.openxmlformats.org/drawingml/2006/main" xmlns:p="http://schemas.openxmlformats.org/presentationml/2006/main" xmlns:r="http://schemas.openxmlformats.org/officeDocument/2006/relationships">
+  <p:cSld>
+    <p:bg>
+      <p:bgPr>
+        <a:solidFill>
+          <a:srgbClr val="102127"/>
+        </a:solidFill>
+        <a:effectLst/>
+      </p:bgPr>
+    </p:bg>
+    <p:spTree>
+      <p:nvGrpSpPr>
+        <p:cNvPr id="1" name=""/>
+        <p:cNvGrpSpPr/>
+        <p:nvPr/>
+      </p:nvGrpSpPr>
+      <p:grpSpPr/>
+      <p:sp>
+        <p:nvSpPr>
+          <p:cNvPr id="2" name="TextBox 1"/>
+          <p:cNvSpPr txBox="1"/>
+          <p:nvPr/>
+        </p:nvSpPr>
+        <p:spPr>
+          <a:xfrm>
+            <a:off x="502920" y="274320"/>
+            <a:ext cx="11155680" cy="731520"/>
+          </a:xfrm>
+          <a:prstGeom prst="rect">
+            <a:avLst/>
+          </a:prstGeom>
+          <a:noFill/>
+        </p:spPr>
+        <p:txBody>
+          <a:bodyPr wrap="none">
+            <a:spAutoFit/>
+          </a:bodyPr>
+          <a:lstStyle/>
+          <a:p>
+            <a:r>
+              <a:rPr sz="2600" b="1">
+                <a:solidFill>
+                  <a:srgbClr val="01AEFD"/>
+                </a:solidFill>
+              </a:rPr>
+              <a:t>Type this into style.css  (5 of 5)</a:t>
+            </a:r>
+          </a:p>
+        </p:txBody>
+      </p:sp>
+      <p:sp>
+        <p:nvSpPr>
+          <p:cNvPr id="3" name="TextBox 2"/>
+          <p:cNvSpPr txBox="1"/>
+          <p:nvPr/>
+        </p:nvSpPr>
+        <p:spPr>
+          <a:xfrm>
+            <a:off x="502920" y="1051560"/>
+            <a:ext cx="11155680" cy="5394960"/>
+          </a:xfrm>
+          <a:prstGeom prst="rect">
+            <a:avLst/>
+          </a:prstGeom>
+          <a:noFill/>
+        </p:spPr>
+        <p:txBody>
+          <a:bodyPr wrap="none">
+            <a:spAutoFit/>
+          </a:bodyPr>
+          <a:lstStyle/>
+          <a:p>
+            <a:pPr>
+              <a:spcAft>
+                <a:spcPts val="0"/>
+              </a:spcAft>
+            </a:pPr>
+            <a:r>
+              <a:rPr sz="1700">
+                <a:solidFill>
+                  <a:srgbClr val="6D8C97"/>
+                </a:solidFill>
+                <a:latin typeface="Consolas"/>
+              </a:rPr>
+              <a:t>  22  </a:t>
+            </a:r>
+            <a:r>
+              <a:rPr sz="1700">
+                <a:solidFill>
+                  <a:srgbClr val="DCECEF"/>
+                </a:solidFill>
+                <a:latin typeface="Consolas"/>
+              </a:rPr>
+              <a:t>  border-radius: 8px;</a:t>
+            </a:r>
+          </a:p>
+          <a:p>
+            <a:pPr>
+              <a:spcAft>
+                <a:spcPts val="0"/>
+              </a:spcAft>
+            </a:pPr>
+            <a:r>
+              <a:rPr sz="1700">
+                <a:solidFill>
+                  <a:srgbClr val="6D8C97"/>
+                </a:solidFill>
+                <a:latin typeface="Consolas"/>
+              </a:rPr>
+              <a:t>  23  </a:t>
+            </a:r>
+            <a:r>
+              <a:rPr sz="1700">
+                <a:solidFill>
+                  <a:srgbClr val="DCECEF"/>
+                </a:solidFill>
+                <a:latin typeface="Consolas"/>
+              </a:rPr>
+              <a:t>}</a:t>
+            </a:r>
+          </a:p>
+        </p:txBody>
+      </p:sp>
+    </p:spTree>
+  </p:cSld>
+  <p:clrMapOvr>
+    <a:masterClrMapping/>
+  </p:clrMapOvr>
+</p:sld>
+</file>
+
 <file path=ppt/slides/slide2.xml><?xml version="1.0" encoding="utf-8"?>
 <p:sld xmlns:a="http://schemas.openxmlformats.org/drawingml/2006/main" xmlns:p="http://schemas.openxmlformats.org/presentationml/2006/main" xmlns:r="http://schemas.openxmlformats.org/officeDocument/2006/relationships">
   <p:cSld>
@@ -3267,6 +6224,118 @@
                 </a:solidFill>
               </a:rPr>
               <a:t>• Why?</a:t>
+            </a:r>
+          </a:p>
+        </p:txBody>
+      </p:sp>
+    </p:spTree>
+  </p:cSld>
+  <p:clrMapOvr>
+    <a:masterClrMapping/>
+  </p:clrMapOvr>
+</p:sld>
+</file>
+
+<file path=ppt/slides/slide20.xml><?xml version="1.0" encoding="utf-8"?>
+<p:sld xmlns:a="http://schemas.openxmlformats.org/drawingml/2006/main" xmlns:p="http://schemas.openxmlformats.org/presentationml/2006/main" xmlns:r="http://schemas.openxmlformats.org/officeDocument/2006/relationships">
+  <p:cSld>
+    <p:spTree>
+      <p:nvGrpSpPr>
+        <p:cNvPr id="1" name=""/>
+        <p:cNvGrpSpPr/>
+        <p:nvPr/>
+      </p:nvGrpSpPr>
+      <p:grpSpPr/>
+      <p:sp>
+        <p:nvSpPr>
+          <p:cNvPr id="2" name="Title 1"/>
+          <p:cNvSpPr>
+            <a:spLocks noGrp="1"/>
+          </p:cNvSpPr>
+          <p:nvPr>
+            <p:ph type="title"/>
+          </p:nvPr>
+        </p:nvSpPr>
+        <p:spPr/>
+        <p:txBody>
+          <a:bodyPr/>
+          <a:lstStyle/>
+          <a:p>
+            <a:r>
+              <a:rPr sz="3800" b="1">
+                <a:solidFill>
+                  <a:srgbClr val="1F2A37"/>
+                </a:solidFill>
+              </a:rPr>
+              <a:t>One problem</a:t>
+            </a:r>
+          </a:p>
+        </p:txBody>
+      </p:sp>
+      <p:sp>
+        <p:nvSpPr>
+          <p:cNvPr id="3" name="TextBox 2"/>
+          <p:cNvSpPr txBox="1"/>
+          <p:nvPr/>
+        </p:nvSpPr>
+        <p:spPr>
+          <a:xfrm>
+            <a:off x="822960" y="1828800"/>
+            <a:ext cx="10515600" cy="4206240"/>
+          </a:xfrm>
+          <a:prstGeom prst="rect">
+            <a:avLst/>
+          </a:prstGeom>
+          <a:noFill/>
+        </p:spPr>
+        <p:txBody>
+          <a:bodyPr wrap="square">
+            <a:spAutoFit/>
+          </a:bodyPr>
+          <a:lstStyle/>
+          <a:p>
+            <a:pPr>
+              <a:spcAft>
+                <a:spcPts val="1400"/>
+              </a:spcAft>
+            </a:pPr>
+            <a:r>
+              <a:rPr sz="2800">
+                <a:solidFill>
+                  <a:srgbClr val="01AEFD"/>
+                </a:solidFill>
+              </a:rPr>
+              <a:t>This list grows forever</a:t>
+            </a:r>
+          </a:p>
+          <a:p>
+            <a:pPr>
+              <a:spcAft>
+                <a:spcPts val="1400"/>
+              </a:spcAft>
+            </a:pPr>
+            <a:r>
+              <a:rPr sz="2400">
+                <a:solidFill>
+                  <a:srgbClr val="1F2A37"/>
+                </a:solidFill>
+              </a:rPr>
+              <a:t>• What happens after 200 messages?</a:t>
+            </a:r>
+          </a:p>
+          <a:p>
+            <a:pPr>
+              <a:spcAft>
+                <a:spcPts val="1400"/>
+              </a:spcAft>
+            </a:pPr>
+            <a:r>
+              <a:rPr sz="2400">
+                <a:solidFill>
+                  <a:srgbClr val="1F2A37"/>
+                </a:solidFill>
+              </a:rPr>
+              <a:t>• Next week.</a:t>
             </a:r>
           </a:p>
         </p:txBody>
@@ -3663,6 +6732,14 @@
 <file path=ppt/slides/slide6.xml><?xml version="1.0" encoding="utf-8"?>
 <p:sld xmlns:a="http://schemas.openxmlformats.org/drawingml/2006/main" xmlns:p="http://schemas.openxmlformats.org/presentationml/2006/main" xmlns:r="http://schemas.openxmlformats.org/officeDocument/2006/relationships">
   <p:cSld>
+    <p:bg>
+      <p:bgPr>
+        <a:solidFill>
+          <a:srgbClr val="102127"/>
+        </a:solidFill>
+        <a:effectLst/>
+      </p:bgPr>
+    </p:bg>
     <p:spTree>
       <p:nvGrpSpPr>
         <p:cNvPr id="1" name=""/>
@@ -3672,40 +6749,14 @@
       <p:grpSpPr/>
       <p:sp>
         <p:nvSpPr>
-          <p:cNvPr id="2" name="Title 1"/>
-          <p:cNvSpPr>
-            <a:spLocks noGrp="1"/>
-          </p:cNvSpPr>
-          <p:nvPr>
-            <p:ph type="title"/>
-          </p:nvPr>
-        </p:nvSpPr>
-        <p:spPr/>
-        <p:txBody>
-          <a:bodyPr/>
-          <a:lstStyle/>
-          <a:p>
-            <a:r>
-              <a:rPr sz="3800" b="1">
-                <a:solidFill>
-                  <a:srgbClr val="1F2A37"/>
-                </a:solidFill>
-              </a:rPr>
-              <a:t>Push BOTH sides</a:t>
-            </a:r>
-          </a:p>
-        </p:txBody>
-      </p:sp>
-      <p:sp>
-        <p:nvSpPr>
-          <p:cNvPr id="3" name="TextBox 2"/>
+          <p:cNvPr id="2" name="TextBox 1"/>
           <p:cNvSpPr txBox="1"/>
           <p:nvPr/>
         </p:nvSpPr>
         <p:spPr>
           <a:xfrm>
-            <a:off x="822960" y="1828800"/>
-            <a:ext cx="10515600" cy="4206240"/>
+            <a:off x="502920" y="274320"/>
+            <a:ext cx="11155680" cy="731520"/>
           </a:xfrm>
           <a:prstGeom prst="rect">
             <a:avLst/>
@@ -3713,53 +6764,141 @@
           <a:noFill/>
         </p:spPr>
         <p:txBody>
-          <a:bodyPr wrap="square">
+          <a:bodyPr wrap="none">
             <a:spAutoFit/>
           </a:bodyPr>
           <a:lstStyle/>
           <a:p>
-            <a:pPr>
-              <a:spcAft>
-                <a:spcPts val="1400"/>
-              </a:spcAft>
-            </a:pPr>
-            <a:r>
-              <a:rPr sz="2400">
-                <a:solidFill>
-                  <a:srgbClr val="1F2A37"/>
-                </a:solidFill>
-              </a:rPr>
-              <a:t>• history.push user - what you said</a:t>
-            </a:r>
-          </a:p>
-          <a:p>
-            <a:pPr>
-              <a:spcAft>
-                <a:spcPts val="1400"/>
-              </a:spcAft>
-            </a:pPr>
-            <a:r>
-              <a:rPr sz="2400">
-                <a:solidFill>
-                  <a:srgbClr val="1F2A37"/>
-                </a:solidFill>
-              </a:rPr>
-              <a:t>• history.push assistant - what it said</a:t>
-            </a:r>
-          </a:p>
-          <a:p>
-            <a:pPr>
-              <a:spcAft>
-                <a:spcPts val="1400"/>
-              </a:spcAft>
-            </a:pPr>
-            <a:r>
-              <a:rPr sz="2400">
-                <a:solidFill>
-                  <a:srgbClr val="1F2A37"/>
-                </a:solidFill>
-              </a:rPr>
-              <a:t>• Miss the second and it hears half a conversation</a:t>
+            <a:r>
+              <a:rPr sz="2600" b="1">
+                <a:solidFill>
+                  <a:srgbClr val="01AEFD"/>
+                </a:solidFill>
+              </a:rPr>
+              <a:t>Type this into script.js</a:t>
+            </a:r>
+          </a:p>
+        </p:txBody>
+      </p:sp>
+      <p:sp>
+        <p:nvSpPr>
+          <p:cNvPr id="3" name="TextBox 2"/>
+          <p:cNvSpPr txBox="1"/>
+          <p:nvPr/>
+        </p:nvSpPr>
+        <p:spPr>
+          <a:xfrm>
+            <a:off x="502920" y="1051560"/>
+            <a:ext cx="11155680" cy="5394960"/>
+          </a:xfrm>
+          <a:prstGeom prst="rect">
+            <a:avLst/>
+          </a:prstGeom>
+          <a:noFill/>
+        </p:spPr>
+        <p:txBody>
+          <a:bodyPr wrap="none">
+            <a:spAutoFit/>
+          </a:bodyPr>
+          <a:lstStyle/>
+          <a:p>
+            <a:pPr>
+              <a:spcAft>
+                <a:spcPts val="0"/>
+              </a:spcAft>
+            </a:pPr>
+            <a:r>
+              <a:rPr sz="1700">
+                <a:solidFill>
+                  <a:srgbClr val="6D8C97"/>
+                </a:solidFill>
+                <a:latin typeface="Consolas"/>
+              </a:rPr>
+              <a:t>  15  </a:t>
+            </a:r>
+            <a:r>
+              <a:rPr sz="1700">
+                <a:solidFill>
+                  <a:srgbClr val="DCECEF"/>
+                </a:solidFill>
+                <a:latin typeface="Consolas"/>
+              </a:rPr>
+              <a:t> </a:t>
+            </a:r>
+          </a:p>
+          <a:p>
+            <a:pPr>
+              <a:spcAft>
+                <a:spcPts val="0"/>
+              </a:spcAft>
+            </a:pPr>
+            <a:r>
+              <a:rPr sz="1700">
+                <a:solidFill>
+                  <a:srgbClr val="6D8C97"/>
+                </a:solidFill>
+                <a:latin typeface="Consolas"/>
+              </a:rPr>
+              <a:t>  16  </a:t>
+            </a:r>
+            <a:r>
+              <a:rPr sz="1700">
+                <a:solidFill>
+                  <a:srgbClr val="7FE0A0"/>
+                </a:solidFill>
+                <a:latin typeface="Consolas"/>
+              </a:rPr>
+              <a:t>// Week 7: the model remembers NOTHING. Every request starts from zero.</a:t>
+            </a:r>
+          </a:p>
+          <a:p>
+            <a:pPr>
+              <a:spcAft>
+                <a:spcPts val="0"/>
+              </a:spcAft>
+            </a:pPr>
+            <a:r>
+              <a:rPr sz="1700">
+                <a:solidFill>
+                  <a:srgbClr val="6D8C97"/>
+                </a:solidFill>
+                <a:latin typeface="Consolas"/>
+              </a:rPr>
+              <a:t>  17  </a:t>
+            </a:r>
+            <a:r>
+              <a:rPr sz="1700">
+                <a:solidFill>
+                  <a:srgbClr val="7FE0A0"/>
+                </a:solidFill>
+                <a:latin typeface="Consolas"/>
+              </a:rPr>
+              <a:t>// So we keep the conversation ourselves and send all of it, every time.</a:t>
+            </a:r>
+          </a:p>
+          <a:p>
+            <a:pPr>
+              <a:spcAft>
+                <a:spcPts val="0"/>
+              </a:spcAft>
+            </a:pPr>
+            <a:r>
+              <a:rPr sz="1700">
+                <a:solidFill>
+                  <a:srgbClr val="6D8C97"/>
+                </a:solidFill>
+                <a:latin typeface="Consolas"/>
+              </a:rPr>
+              <a:t>  18  </a:t>
+            </a:r>
+            <a:r>
+              <a:rPr sz="1700">
+                <a:solidFill>
+                  <a:srgbClr val="7FE0A0"/>
+                </a:solidFill>
+                <a:latin typeface="Consolas"/>
+              </a:rPr>
+              <a:t>const history = [];</a:t>
             </a:r>
           </a:p>
         </p:txBody>
@@ -3803,7 +6942,7 @@
                   <a:srgbClr val="1F2A37"/>
                 </a:solidFill>
               </a:rPr>
-              <a:t>Tip them all in</a:t>
+              <a:t>Push BOTH sides</a:t>
             </a:r>
           </a:p>
         </p:txBody>
@@ -3836,12 +6975,12 @@
               </a:spcAft>
             </a:pPr>
             <a:r>
-              <a:rPr sz="2800">
-                <a:solidFill>
-                  <a:srgbClr val="01AEFD"/>
-                </a:solidFill>
-              </a:rPr>
-              <a:t>messages: [ system, ...history ]</a:t>
+              <a:rPr sz="2400">
+                <a:solidFill>
+                  <a:srgbClr val="1F2A37"/>
+                </a:solidFill>
+              </a:rPr>
+              <a:t>• history.push user - what you said</a:t>
             </a:r>
           </a:p>
           <a:p>
@@ -3856,7 +6995,7 @@
                   <a:srgbClr val="1F2A37"/>
                 </a:solidFill>
               </a:rPr>
-              <a:t>• ... means spread every item into the list</a:t>
+              <a:t>• history.push assistant - what it said</a:t>
             </a:r>
           </a:p>
           <a:p>
@@ -3871,7 +7010,7 @@
                   <a:srgbClr val="1F2A37"/>
                 </a:solidFill>
               </a:rPr>
-              <a:t>• Oldest first, newest last</a:t>
+              <a:t>• Miss the second and it hears half a conversation</a:t>
             </a:r>
           </a:p>
         </p:txBody>
@@ -3887,6 +7026,14 @@
 <file path=ppt/slides/slide8.xml><?xml version="1.0" encoding="utf-8"?>
 <p:sld xmlns:a="http://schemas.openxmlformats.org/drawingml/2006/main" xmlns:p="http://schemas.openxmlformats.org/presentationml/2006/main" xmlns:r="http://schemas.openxmlformats.org/officeDocument/2006/relationships">
   <p:cSld>
+    <p:bg>
+      <p:bgPr>
+        <a:solidFill>
+          <a:srgbClr val="102127"/>
+        </a:solidFill>
+        <a:effectLst/>
+      </p:bgPr>
+    </p:bg>
     <p:spTree>
       <p:nvGrpSpPr>
         <p:cNvPr id="1" name=""/>
@@ -3896,40 +7043,14 @@
       <p:grpSpPr/>
       <p:sp>
         <p:nvSpPr>
-          <p:cNvPr id="2" name="Title 1"/>
-          <p:cNvSpPr>
-            <a:spLocks noGrp="1"/>
-          </p:cNvSpPr>
-          <p:nvPr>
-            <p:ph type="title"/>
-          </p:nvPr>
-        </p:nvSpPr>
-        <p:spPr/>
-        <p:txBody>
-          <a:bodyPr/>
-          <a:lstStyle/>
-          <a:p>
-            <a:r>
-              <a:rPr sz="3800" b="1">
-                <a:solidFill>
-                  <a:srgbClr val="1F2A37"/>
-                </a:solidFill>
-              </a:rPr>
-              <a:t>One problem</a:t>
-            </a:r>
-          </a:p>
-        </p:txBody>
-      </p:sp>
-      <p:sp>
-        <p:nvSpPr>
-          <p:cNvPr id="3" name="TextBox 2"/>
+          <p:cNvPr id="2" name="TextBox 1"/>
           <p:cNvSpPr txBox="1"/>
           <p:nvPr/>
         </p:nvSpPr>
         <p:spPr>
           <a:xfrm>
-            <a:off x="822960" y="1828800"/>
-            <a:ext cx="10515600" cy="4206240"/>
+            <a:off x="502920" y="274320"/>
+            <a:ext cx="11155680" cy="731520"/>
           </a:xfrm>
           <a:prstGeom prst="rect">
             <a:avLst/>
@@ -3937,53 +7058,623 @@
           <a:noFill/>
         </p:spPr>
         <p:txBody>
-          <a:bodyPr wrap="square">
+          <a:bodyPr wrap="none">
             <a:spAutoFit/>
           </a:bodyPr>
           <a:lstStyle/>
           <a:p>
-            <a:pPr>
-              <a:spcAft>
-                <a:spcPts val="1400"/>
-              </a:spcAft>
-            </a:pPr>
-            <a:r>
-              <a:rPr sz="2800">
+            <a:r>
+              <a:rPr sz="2600" b="1">
                 <a:solidFill>
                   <a:srgbClr val="01AEFD"/>
                 </a:solidFill>
               </a:rPr>
-              <a:t>This list grows forever</a:t>
-            </a:r>
-          </a:p>
-          <a:p>
-            <a:pPr>
-              <a:spcAft>
-                <a:spcPts val="1400"/>
-              </a:spcAft>
-            </a:pPr>
-            <a:r>
-              <a:rPr sz="2400">
-                <a:solidFill>
-                  <a:srgbClr val="1F2A37"/>
-                </a:solidFill>
-              </a:rPr>
-              <a:t>• What happens after 200 messages?</a:t>
-            </a:r>
-          </a:p>
-          <a:p>
-            <a:pPr>
-              <a:spcAft>
-                <a:spcPts val="1400"/>
-              </a:spcAft>
-            </a:pPr>
-            <a:r>
-              <a:rPr sz="2400">
-                <a:solidFill>
-                  <a:srgbClr val="1F2A37"/>
-                </a:solidFill>
-              </a:rPr>
-              <a:t>• Next week.</a:t>
+              <a:t>Type this into script.js  (1 of 2)</a:t>
+            </a:r>
+          </a:p>
+        </p:txBody>
+      </p:sp>
+      <p:sp>
+        <p:nvSpPr>
+          <p:cNvPr id="3" name="TextBox 2"/>
+          <p:cNvSpPr txBox="1"/>
+          <p:nvPr/>
+        </p:nvSpPr>
+        <p:spPr>
+          <a:xfrm>
+            <a:off x="502920" y="1051560"/>
+            <a:ext cx="11155680" cy="5394960"/>
+          </a:xfrm>
+          <a:prstGeom prst="rect">
+            <a:avLst/>
+          </a:prstGeom>
+          <a:noFill/>
+        </p:spPr>
+        <p:txBody>
+          <a:bodyPr wrap="none">
+            <a:spAutoFit/>
+          </a:bodyPr>
+          <a:lstStyle/>
+          <a:p>
+            <a:pPr>
+              <a:spcAft>
+                <a:spcPts val="0"/>
+              </a:spcAft>
+            </a:pPr>
+            <a:r>
+              <a:rPr sz="1400">
+                <a:solidFill>
+                  <a:srgbClr val="6D8C97"/>
+                </a:solidFill>
+                <a:latin typeface="Consolas"/>
+              </a:rPr>
+              <a:t>  79  </a:t>
+            </a:r>
+            <a:r>
+              <a:rPr sz="1400">
+                <a:solidFill>
+                  <a:srgbClr val="DCECEF"/>
+                </a:solidFill>
+                <a:latin typeface="Consolas"/>
+              </a:rPr>
+              <a:t> </a:t>
+            </a:r>
+          </a:p>
+          <a:p>
+            <a:pPr>
+              <a:spcAft>
+                <a:spcPts val="0"/>
+              </a:spcAft>
+            </a:pPr>
+            <a:r>
+              <a:rPr sz="1400">
+                <a:solidFill>
+                  <a:srgbClr val="6D8C97"/>
+                </a:solidFill>
+                <a:latin typeface="Consolas"/>
+              </a:rPr>
+              <a:t>  80  </a:t>
+            </a:r>
+            <a:r>
+              <a:rPr sz="1400">
+                <a:solidFill>
+                  <a:srgbClr val="DCECEF"/>
+                </a:solidFill>
+                <a:latin typeface="Consolas"/>
+              </a:rPr>
+              <a:t>// The browser calls this when the form is submitted.</a:t>
+            </a:r>
+          </a:p>
+          <a:p>
+            <a:pPr>
+              <a:spcAft>
+                <a:spcPts val="0"/>
+              </a:spcAft>
+            </a:pPr>
+            <a:r>
+              <a:rPr sz="1400">
+                <a:solidFill>
+                  <a:srgbClr val="6D8C97"/>
+                </a:solidFill>
+                <a:latin typeface="Consolas"/>
+              </a:rPr>
+              <a:t>  81  </a:t>
+            </a:r>
+            <a:r>
+              <a:rPr sz="1400">
+                <a:solidFill>
+                  <a:srgbClr val="DCECEF"/>
+                </a:solidFill>
+                <a:latin typeface="Consolas"/>
+              </a:rPr>
+              <a:t>composer.addEventListener('submit', async function (event) {</a:t>
+            </a:r>
+          </a:p>
+          <a:p>
+            <a:pPr>
+              <a:spcAft>
+                <a:spcPts val="0"/>
+              </a:spcAft>
+            </a:pPr>
+            <a:r>
+              <a:rPr sz="1400">
+                <a:solidFill>
+                  <a:srgbClr val="6D8C97"/>
+                </a:solidFill>
+                <a:latin typeface="Consolas"/>
+              </a:rPr>
+              <a:t>  82  </a:t>
+            </a:r>
+            <a:r>
+              <a:rPr sz="1400">
+                <a:solidFill>
+                  <a:srgbClr val="DCECEF"/>
+                </a:solidFill>
+                <a:latin typeface="Consolas"/>
+              </a:rPr>
+              <a:t>  event.preventDefault();</a:t>
+            </a:r>
+          </a:p>
+          <a:p>
+            <a:pPr>
+              <a:spcAft>
+                <a:spcPts val="0"/>
+              </a:spcAft>
+            </a:pPr>
+            <a:r>
+              <a:rPr sz="1400">
+                <a:solidFill>
+                  <a:srgbClr val="6D8C97"/>
+                </a:solidFill>
+                <a:latin typeface="Consolas"/>
+              </a:rPr>
+              <a:t>  83  </a:t>
+            </a:r>
+            <a:r>
+              <a:rPr sz="1400">
+                <a:solidFill>
+                  <a:srgbClr val="DCECEF"/>
+                </a:solidFill>
+                <a:latin typeface="Consolas"/>
+              </a:rPr>
+              <a:t>  const text = promptBox.value.trim();</a:t>
+            </a:r>
+          </a:p>
+          <a:p>
+            <a:pPr>
+              <a:spcAft>
+                <a:spcPts val="0"/>
+              </a:spcAft>
+            </a:pPr>
+            <a:r>
+              <a:rPr sz="1400">
+                <a:solidFill>
+                  <a:srgbClr val="6D8C97"/>
+                </a:solidFill>
+                <a:latin typeface="Consolas"/>
+              </a:rPr>
+              <a:t>  84  </a:t>
+            </a:r>
+            <a:r>
+              <a:rPr sz="1400">
+                <a:solidFill>
+                  <a:srgbClr val="DCECEF"/>
+                </a:solidFill>
+                <a:latin typeface="Consolas"/>
+              </a:rPr>
+              <a:t>  if (text === '') { return; }</a:t>
+            </a:r>
+          </a:p>
+          <a:p>
+            <a:pPr>
+              <a:spcAft>
+                <a:spcPts val="0"/>
+              </a:spcAft>
+            </a:pPr>
+            <a:r>
+              <a:rPr sz="1400">
+                <a:solidFill>
+                  <a:srgbClr val="6D8C97"/>
+                </a:solidFill>
+                <a:latin typeface="Consolas"/>
+              </a:rPr>
+              <a:t>  85  </a:t>
+            </a:r>
+            <a:r>
+              <a:rPr sz="1400">
+                <a:solidFill>
+                  <a:srgbClr val="DCECEF"/>
+                </a:solidFill>
+                <a:latin typeface="Consolas"/>
+              </a:rPr>
+              <a:t>  promptBox.value = '';</a:t>
+            </a:r>
+          </a:p>
+          <a:p>
+            <a:pPr>
+              <a:spcAft>
+                <a:spcPts val="0"/>
+              </a:spcAft>
+            </a:pPr>
+            <a:r>
+              <a:rPr sz="1400">
+                <a:solidFill>
+                  <a:srgbClr val="6D8C97"/>
+                </a:solidFill>
+                <a:latin typeface="Consolas"/>
+              </a:rPr>
+              <a:t>  86  </a:t>
+            </a:r>
+            <a:r>
+              <a:rPr sz="1400">
+                <a:solidFill>
+                  <a:srgbClr val="7FE0A0"/>
+                </a:solidFill>
+                <a:latin typeface="Consolas"/>
+              </a:rPr>
+              <a:t>  addLine('you', text);</a:t>
+            </a:r>
+          </a:p>
+          <a:p>
+            <a:pPr>
+              <a:spcAft>
+                <a:spcPts val="0"/>
+              </a:spcAft>
+            </a:pPr>
+            <a:r>
+              <a:rPr sz="1400">
+                <a:solidFill>
+                  <a:srgbClr val="6D8C97"/>
+                </a:solidFill>
+                <a:latin typeface="Consolas"/>
+              </a:rPr>
+              <a:t>  87  </a:t>
+            </a:r>
+            <a:r>
+              <a:rPr sz="1400">
+                <a:solidFill>
+                  <a:srgbClr val="7FE0A0"/>
+                </a:solidFill>
+                <a:latin typeface="Consolas"/>
+              </a:rPr>
+              <a:t>  history.push({ role: 'user', content: text });</a:t>
+            </a:r>
+          </a:p>
+          <a:p>
+            <a:pPr>
+              <a:spcAft>
+                <a:spcPts val="0"/>
+              </a:spcAft>
+            </a:pPr>
+            <a:r>
+              <a:rPr sz="1400">
+                <a:solidFill>
+                  <a:srgbClr val="6D8C97"/>
+                </a:solidFill>
+                <a:latin typeface="Consolas"/>
+              </a:rPr>
+              <a:t>  88  </a:t>
+            </a:r>
+            <a:r>
+              <a:rPr sz="1400">
+                <a:solidFill>
+                  <a:srgbClr val="7FE0A0"/>
+                </a:solidFill>
+                <a:latin typeface="Consolas"/>
+              </a:rPr>
+              <a:t>  const waiting = addLine('bot', 'thinking...');</a:t>
+            </a:r>
+          </a:p>
+          <a:p>
+            <a:pPr>
+              <a:spcAft>
+                <a:spcPts val="0"/>
+              </a:spcAft>
+            </a:pPr>
+            <a:r>
+              <a:rPr sz="1400">
+                <a:solidFill>
+                  <a:srgbClr val="6D8C97"/>
+                </a:solidFill>
+                <a:latin typeface="Consolas"/>
+              </a:rPr>
+              <a:t>  89  </a:t>
+            </a:r>
+            <a:r>
+              <a:rPr sz="1400">
+                <a:solidFill>
+                  <a:srgbClr val="DCECEF"/>
+                </a:solidFill>
+                <a:latin typeface="Consolas"/>
+              </a:rPr>
+              <a:t>  try {</a:t>
+            </a:r>
+          </a:p>
+          <a:p>
+            <a:pPr>
+              <a:spcAft>
+                <a:spcPts val="0"/>
+              </a:spcAft>
+            </a:pPr>
+            <a:r>
+              <a:rPr sz="1400">
+                <a:solidFill>
+                  <a:srgbClr val="6D8C97"/>
+                </a:solidFill>
+                <a:latin typeface="Consolas"/>
+              </a:rPr>
+              <a:t>  90  </a:t>
+            </a:r>
+            <a:r>
+              <a:rPr sz="1400">
+                <a:solidFill>
+                  <a:srgbClr val="7FE0A0"/>
+                </a:solidFill>
+                <a:latin typeface="Consolas"/>
+              </a:rPr>
+              <a:t>    const reply = await askAI();</a:t>
+            </a:r>
+          </a:p>
+          <a:p>
+            <a:pPr>
+              <a:spcAft>
+                <a:spcPts val="0"/>
+              </a:spcAft>
+            </a:pPr>
+            <a:r>
+              <a:rPr sz="1400">
+                <a:solidFill>
+                  <a:srgbClr val="6D8C97"/>
+                </a:solidFill>
+                <a:latin typeface="Consolas"/>
+              </a:rPr>
+              <a:t>  91  </a:t>
+            </a:r>
+            <a:r>
+              <a:rPr sz="1400">
+                <a:solidFill>
+                  <a:srgbClr val="7FE0A0"/>
+                </a:solidFill>
+                <a:latin typeface="Consolas"/>
+              </a:rPr>
+              <a:t>    waiting.remove();</a:t>
+            </a:r>
+          </a:p>
+          <a:p>
+            <a:pPr>
+              <a:spcAft>
+                <a:spcPts val="0"/>
+              </a:spcAft>
+            </a:pPr>
+            <a:r>
+              <a:rPr sz="1400">
+                <a:solidFill>
+                  <a:srgbClr val="6D8C97"/>
+                </a:solidFill>
+                <a:latin typeface="Consolas"/>
+              </a:rPr>
+              <a:t>  92  </a:t>
+            </a:r>
+            <a:r>
+              <a:rPr sz="1400">
+                <a:solidFill>
+                  <a:srgbClr val="7FE0A0"/>
+                </a:solidFill>
+                <a:latin typeface="Consolas"/>
+              </a:rPr>
+              <a:t>    addLine('bot', reply);</a:t>
+            </a:r>
+          </a:p>
+          <a:p>
+            <a:pPr>
+              <a:spcAft>
+                <a:spcPts val="0"/>
+              </a:spcAft>
+            </a:pPr>
+            <a:r>
+              <a:rPr sz="1400">
+                <a:solidFill>
+                  <a:srgbClr val="6D8C97"/>
+                </a:solidFill>
+                <a:latin typeface="Consolas"/>
+              </a:rPr>
+              <a:t>  93  </a:t>
+            </a:r>
+            <a:r>
+              <a:rPr sz="1400">
+                <a:solidFill>
+                  <a:srgbClr val="7FE0A0"/>
+                </a:solidFill>
+                <a:latin typeface="Consolas"/>
+              </a:rPr>
+              <a:t>    history.push({ role: 'assistant', content: reply });   // it said this too</a:t>
+            </a:r>
+          </a:p>
+        </p:txBody>
+      </p:sp>
+    </p:spTree>
+  </p:cSld>
+  <p:clrMapOvr>
+    <a:masterClrMapping/>
+  </p:clrMapOvr>
+</p:sld>
+</file>
+
+<file path=ppt/slides/slide9.xml><?xml version="1.0" encoding="utf-8"?>
+<p:sld xmlns:a="http://schemas.openxmlformats.org/drawingml/2006/main" xmlns:p="http://schemas.openxmlformats.org/presentationml/2006/main" xmlns:r="http://schemas.openxmlformats.org/officeDocument/2006/relationships">
+  <p:cSld>
+    <p:bg>
+      <p:bgPr>
+        <a:solidFill>
+          <a:srgbClr val="102127"/>
+        </a:solidFill>
+        <a:effectLst/>
+      </p:bgPr>
+    </p:bg>
+    <p:spTree>
+      <p:nvGrpSpPr>
+        <p:cNvPr id="1" name=""/>
+        <p:cNvGrpSpPr/>
+        <p:nvPr/>
+      </p:nvGrpSpPr>
+      <p:grpSpPr/>
+      <p:sp>
+        <p:nvSpPr>
+          <p:cNvPr id="2" name="TextBox 1"/>
+          <p:cNvSpPr txBox="1"/>
+          <p:nvPr/>
+        </p:nvSpPr>
+        <p:spPr>
+          <a:xfrm>
+            <a:off x="502920" y="274320"/>
+            <a:ext cx="11155680" cy="731520"/>
+          </a:xfrm>
+          <a:prstGeom prst="rect">
+            <a:avLst/>
+          </a:prstGeom>
+          <a:noFill/>
+        </p:spPr>
+        <p:txBody>
+          <a:bodyPr wrap="none">
+            <a:spAutoFit/>
+          </a:bodyPr>
+          <a:lstStyle/>
+          <a:p>
+            <a:r>
+              <a:rPr sz="2600" b="1">
+                <a:solidFill>
+                  <a:srgbClr val="01AEFD"/>
+                </a:solidFill>
+              </a:rPr>
+              <a:t>Type this into script.js  (2 of 2)</a:t>
+            </a:r>
+          </a:p>
+        </p:txBody>
+      </p:sp>
+      <p:sp>
+        <p:nvSpPr>
+          <p:cNvPr id="3" name="TextBox 2"/>
+          <p:cNvSpPr txBox="1"/>
+          <p:nvPr/>
+        </p:nvSpPr>
+        <p:spPr>
+          <a:xfrm>
+            <a:off x="502920" y="1051560"/>
+            <a:ext cx="11155680" cy="5394960"/>
+          </a:xfrm>
+          <a:prstGeom prst="rect">
+            <a:avLst/>
+          </a:prstGeom>
+          <a:noFill/>
+        </p:spPr>
+        <p:txBody>
+          <a:bodyPr wrap="none">
+            <a:spAutoFit/>
+          </a:bodyPr>
+          <a:lstStyle/>
+          <a:p>
+            <a:pPr>
+              <a:spcAft>
+                <a:spcPts val="0"/>
+              </a:spcAft>
+            </a:pPr>
+            <a:r>
+              <a:rPr sz="1700">
+                <a:solidFill>
+                  <a:srgbClr val="6D8C97"/>
+                </a:solidFill>
+                <a:latin typeface="Consolas"/>
+              </a:rPr>
+              <a:t>  94  </a:t>
+            </a:r>
+            <a:r>
+              <a:rPr sz="1700">
+                <a:solidFill>
+                  <a:srgbClr val="DCECEF"/>
+                </a:solidFill>
+                <a:latin typeface="Consolas"/>
+              </a:rPr>
+              <a:t>  } catch (problem) {</a:t>
+            </a:r>
+          </a:p>
+          <a:p>
+            <a:pPr>
+              <a:spcAft>
+                <a:spcPts val="0"/>
+              </a:spcAft>
+            </a:pPr>
+            <a:r>
+              <a:rPr sz="1700">
+                <a:solidFill>
+                  <a:srgbClr val="6D8C97"/>
+                </a:solidFill>
+                <a:latin typeface="Consolas"/>
+              </a:rPr>
+              <a:t>  95  </a:t>
+            </a:r>
+            <a:r>
+              <a:rPr sz="1700">
+                <a:solidFill>
+                  <a:srgbClr val="7FE0A0"/>
+                </a:solidFill>
+                <a:latin typeface="Consolas"/>
+              </a:rPr>
+              <a:t>    waiting.remove();</a:t>
+            </a:r>
+          </a:p>
+          <a:p>
+            <a:pPr>
+              <a:spcAft>
+                <a:spcPts val="0"/>
+              </a:spcAft>
+            </a:pPr>
+            <a:r>
+              <a:rPr sz="1700">
+                <a:solidFill>
+                  <a:srgbClr val="6D8C97"/>
+                </a:solidFill>
+                <a:latin typeface="Consolas"/>
+              </a:rPr>
+              <a:t>  96  </a:t>
+            </a:r>
+            <a:r>
+              <a:rPr sz="1700">
+                <a:solidFill>
+                  <a:srgbClr val="7FE0A0"/>
+                </a:solidFill>
+                <a:latin typeface="Consolas"/>
+              </a:rPr>
+              <a:t>    addLine('problem', problem.message);</a:t>
+            </a:r>
+          </a:p>
+          <a:p>
+            <a:pPr>
+              <a:spcAft>
+                <a:spcPts val="0"/>
+              </a:spcAft>
+            </a:pPr>
+            <a:r>
+              <a:rPr sz="1700">
+                <a:solidFill>
+                  <a:srgbClr val="6D8C97"/>
+                </a:solidFill>
+                <a:latin typeface="Consolas"/>
+              </a:rPr>
+              <a:t>  97  </a:t>
+            </a:r>
+            <a:r>
+              <a:rPr sz="1700">
+                <a:solidFill>
+                  <a:srgbClr val="DCECEF"/>
+                </a:solidFill>
+                <a:latin typeface="Consolas"/>
+              </a:rPr>
+              <a:t>  }</a:t>
+            </a:r>
+          </a:p>
+          <a:p>
+            <a:pPr>
+              <a:spcAft>
+                <a:spcPts val="0"/>
+              </a:spcAft>
+            </a:pPr>
+            <a:r>
+              <a:rPr sz="1700">
+                <a:solidFill>
+                  <a:srgbClr val="6D8C97"/>
+                </a:solidFill>
+                <a:latin typeface="Consolas"/>
+              </a:rPr>
+              <a:t>  98  </a:t>
+            </a:r>
+            <a:r>
+              <a:rPr sz="1700">
+                <a:solidFill>
+                  <a:srgbClr val="DCECEF"/>
+                </a:solidFill>
+                <a:latin typeface="Consolas"/>
+              </a:rPr>
+              <a:t>});</a:t>
             </a:r>
           </a:p>
         </p:txBody>

--- a/ai101/slides/week-07.pptx
+++ b/ai101/slides/week-07.pptx
@@ -3376,7 +3376,7 @@
                 </a:solidFill>
                 <a:latin typeface="Consolas"/>
               </a:rPr>
-              <a:t>  48  </a:t>
+              <a:t>  51  </a:t>
             </a:r>
             <a:r>
               <a:rPr sz="1400">
@@ -3401,7 +3401,7 @@
                 </a:solidFill>
                 <a:latin typeface="Consolas"/>
               </a:rPr>
-              <a:t>  49  </a:t>
+              <a:t>  52  </a:t>
             </a:r>
             <a:r>
               <a:rPr sz="1400">
@@ -3426,7 +3426,7 @@
                 </a:solidFill>
                 <a:latin typeface="Consolas"/>
               </a:rPr>
-              <a:t>  50  </a:t>
+              <a:t>  53  </a:t>
             </a:r>
             <a:r>
               <a:rPr sz="1400">
@@ -3451,7 +3451,7 @@
                 </a:solidFill>
                 <a:latin typeface="Consolas"/>
               </a:rPr>
-              <a:t>  51  </a:t>
+              <a:t>  54  </a:t>
             </a:r>
             <a:r>
               <a:rPr sz="1400">
@@ -3476,7 +3476,7 @@
                 </a:solidFill>
                 <a:latin typeface="Consolas"/>
               </a:rPr>
-              <a:t>  52  </a:t>
+              <a:t>  55  </a:t>
             </a:r>
             <a:r>
               <a:rPr sz="1400">
@@ -3501,7 +3501,7 @@
                 </a:solidFill>
                 <a:latin typeface="Consolas"/>
               </a:rPr>
-              <a:t>  53  </a:t>
+              <a:t>  56  </a:t>
             </a:r>
             <a:r>
               <a:rPr sz="1400">
@@ -3526,7 +3526,7 @@
                 </a:solidFill>
                 <a:latin typeface="Consolas"/>
               </a:rPr>
-              <a:t>  54  </a:t>
+              <a:t>  57  </a:t>
             </a:r>
             <a:r>
               <a:rPr sz="1400">
@@ -3551,7 +3551,7 @@
                 </a:solidFill>
                 <a:latin typeface="Consolas"/>
               </a:rPr>
-              <a:t>  55  </a:t>
+              <a:t>  58  </a:t>
             </a:r>
             <a:r>
               <a:rPr sz="1400">
@@ -3576,7 +3576,7 @@
                 </a:solidFill>
                 <a:latin typeface="Consolas"/>
               </a:rPr>
-              <a:t>  56  </a:t>
+              <a:t>  59  </a:t>
             </a:r>
             <a:r>
               <a:rPr sz="1400">
@@ -3601,7 +3601,7 @@
                 </a:solidFill>
                 <a:latin typeface="Consolas"/>
               </a:rPr>
-              <a:t>  57  </a:t>
+              <a:t>  60  </a:t>
             </a:r>
             <a:r>
               <a:rPr sz="1400">
@@ -3626,7 +3626,7 @@
                 </a:solidFill>
                 <a:latin typeface="Consolas"/>
               </a:rPr>
-              <a:t>  58  </a:t>
+              <a:t>  61  </a:t>
             </a:r>
             <a:r>
               <a:rPr sz="1400">
@@ -3651,7 +3651,7 @@
                 </a:solidFill>
                 <a:latin typeface="Consolas"/>
               </a:rPr>
-              <a:t>  59  </a:t>
+              <a:t>  62  </a:t>
             </a:r>
             <a:r>
               <a:rPr sz="1400">
@@ -3676,7 +3676,7 @@
                 </a:solidFill>
                 <a:latin typeface="Consolas"/>
               </a:rPr>
-              <a:t>  60  </a:t>
+              <a:t>  63  </a:t>
             </a:r>
             <a:r>
               <a:rPr sz="1400">
@@ -3701,7 +3701,7 @@
                 </a:solidFill>
                 <a:latin typeface="Consolas"/>
               </a:rPr>
-              <a:t>  61  </a:t>
+              <a:t>  64  </a:t>
             </a:r>
             <a:r>
               <a:rPr sz="1400">
@@ -3726,7 +3726,7 @@
                 </a:solidFill>
                 <a:latin typeface="Consolas"/>
               </a:rPr>
-              <a:t>  62  </a:t>
+              <a:t>  65  </a:t>
             </a:r>
             <a:r>
               <a:rPr sz="1400">
@@ -3833,7 +3833,7 @@
                 </a:solidFill>
                 <a:latin typeface="Consolas"/>
               </a:rPr>
-              <a:t>  63  </a:t>
+              <a:t>  66  </a:t>
             </a:r>
             <a:r>
               <a:rPr sz="1400">
@@ -3858,7 +3858,7 @@
                 </a:solidFill>
                 <a:latin typeface="Consolas"/>
               </a:rPr>
-              <a:t>  64  </a:t>
+              <a:t>  67  </a:t>
             </a:r>
             <a:r>
               <a:rPr sz="1400">
@@ -3883,7 +3883,7 @@
                 </a:solidFill>
                 <a:latin typeface="Consolas"/>
               </a:rPr>
-              <a:t>  65  </a:t>
+              <a:t>  68  </a:t>
             </a:r>
             <a:r>
               <a:rPr sz="1400">
@@ -3908,7 +3908,7 @@
                 </a:solidFill>
                 <a:latin typeface="Consolas"/>
               </a:rPr>
-              <a:t>  66  </a:t>
+              <a:t>  69  </a:t>
             </a:r>
             <a:r>
               <a:rPr sz="1400">
@@ -3933,7 +3933,7 @@
                 </a:solidFill>
                 <a:latin typeface="Consolas"/>
               </a:rPr>
-              <a:t>  67  </a:t>
+              <a:t>  70  </a:t>
             </a:r>
             <a:r>
               <a:rPr sz="1400">
@@ -3958,7 +3958,7 @@
                 </a:solidFill>
                 <a:latin typeface="Consolas"/>
               </a:rPr>
-              <a:t>  68  </a:t>
+              <a:t>  71  </a:t>
             </a:r>
             <a:r>
               <a:rPr sz="1400">
@@ -3983,7 +3983,7 @@
                 </a:solidFill>
                 <a:latin typeface="Consolas"/>
               </a:rPr>
-              <a:t>  69  </a:t>
+              <a:t>  72  </a:t>
             </a:r>
             <a:r>
               <a:rPr sz="1400">
@@ -4008,7 +4008,7 @@
                 </a:solidFill>
                 <a:latin typeface="Consolas"/>
               </a:rPr>
-              <a:t>  70  </a:t>
+              <a:t>  73  </a:t>
             </a:r>
             <a:r>
               <a:rPr sz="1400">
@@ -4033,7 +4033,7 @@
                 </a:solidFill>
                 <a:latin typeface="Consolas"/>
               </a:rPr>
-              <a:t>  71  </a:t>
+              <a:t>  74  </a:t>
             </a:r>
             <a:r>
               <a:rPr sz="1400">
@@ -4058,7 +4058,7 @@
                 </a:solidFill>
                 <a:latin typeface="Consolas"/>
               </a:rPr>
-              <a:t>  72  </a:t>
+              <a:t>  75  </a:t>
             </a:r>
             <a:r>
               <a:rPr sz="1400">
@@ -4083,7 +4083,7 @@
                 </a:solidFill>
                 <a:latin typeface="Consolas"/>
               </a:rPr>
-              <a:t>  73  </a:t>
+              <a:t>  76  </a:t>
             </a:r>
             <a:r>
               <a:rPr sz="1400">
@@ -4108,7 +4108,7 @@
                 </a:solidFill>
                 <a:latin typeface="Consolas"/>
               </a:rPr>
-              <a:t>  74  </a:t>
+              <a:t>  77  </a:t>
             </a:r>
             <a:r>
               <a:rPr sz="1400">
@@ -4133,7 +4133,7 @@
                 </a:solidFill>
                 <a:latin typeface="Consolas"/>
               </a:rPr>
-              <a:t>  75  </a:t>
+              <a:t>  78  </a:t>
             </a:r>
             <a:r>
               <a:rPr sz="1400">
@@ -4158,7 +4158,7 @@
                 </a:solidFill>
                 <a:latin typeface="Consolas"/>
               </a:rPr>
-              <a:t>  76  </a:t>
+              <a:t>  79  </a:t>
             </a:r>
             <a:r>
               <a:rPr sz="1400">
@@ -4183,7 +4183,7 @@
                 </a:solidFill>
                 <a:latin typeface="Consolas"/>
               </a:rPr>
-              <a:t>  77  </a:t>
+              <a:t>  80  </a:t>
             </a:r>
             <a:r>
               <a:rPr sz="1400">
@@ -4290,7 +4290,7 @@
                 </a:solidFill>
                 <a:latin typeface="Consolas"/>
               </a:rPr>
-              <a:t>  78  </a:t>
+              <a:t>  81  </a:t>
             </a:r>
             <a:r>
               <a:rPr sz="1700">
@@ -4524,7 +4524,7 @@
                 </a:solidFill>
                 <a:latin typeface="Consolas"/>
               </a:rPr>
-              <a:t>  19  </a:t>
+              <a:t>  22  </a:t>
             </a:r>
             <a:r>
               <a:rPr sz="1700">
@@ -4549,7 +4549,7 @@
                 </a:solidFill>
                 <a:latin typeface="Consolas"/>
               </a:rPr>
-              <a:t>  20  </a:t>
+              <a:t>  23  </a:t>
             </a:r>
             <a:r>
               <a:rPr sz="1700">
@@ -4574,7 +4574,7 @@
                 </a:solidFill>
                 <a:latin typeface="Consolas"/>
               </a:rPr>
-              <a:t>  21  </a:t>
+              <a:t>  24  </a:t>
             </a:r>
             <a:r>
               <a:rPr sz="1700">
@@ -4599,7 +4599,7 @@
                 </a:solidFill>
                 <a:latin typeface="Consolas"/>
               </a:rPr>
-              <a:t>  22  </a:t>
+              <a:t>  25  </a:t>
             </a:r>
             <a:r>
               <a:rPr sz="1700">
@@ -4624,7 +4624,7 @@
                 </a:solidFill>
                 <a:latin typeface="Consolas"/>
               </a:rPr>
-              <a:t>  23  </a:t>
+              <a:t>  26  </a:t>
             </a:r>
             <a:r>
               <a:rPr sz="1700">
@@ -4649,7 +4649,7 @@
                 </a:solidFill>
                 <a:latin typeface="Consolas"/>
               </a:rPr>
-              <a:t>  24  </a:t>
+              <a:t>  27  </a:t>
             </a:r>
             <a:r>
               <a:rPr sz="1700">
@@ -4674,7 +4674,7 @@
                 </a:solidFill>
                 <a:latin typeface="Consolas"/>
               </a:rPr>
-              <a:t>  25  </a:t>
+              <a:t>  28  </a:t>
             </a:r>
             <a:r>
               <a:rPr sz="1700">
@@ -4699,7 +4699,7 @@
                 </a:solidFill>
                 <a:latin typeface="Consolas"/>
               </a:rPr>
-              <a:t>  26  </a:t>
+              <a:t>  29  </a:t>
             </a:r>
             <a:r>
               <a:rPr sz="1700">
@@ -4724,7 +4724,7 @@
                 </a:solidFill>
                 <a:latin typeface="Consolas"/>
               </a:rPr>
-              <a:t>  27  </a:t>
+              <a:t>  30  </a:t>
             </a:r>
             <a:r>
               <a:rPr sz="1700">
@@ -4749,7 +4749,7 @@
                 </a:solidFill>
                 <a:latin typeface="Consolas"/>
               </a:rPr>
-              <a:t>  28  </a:t>
+              <a:t>  31  </a:t>
             </a:r>
             <a:r>
               <a:rPr sz="1700">
@@ -4774,7 +4774,7 @@
                 </a:solidFill>
                 <a:latin typeface="Consolas"/>
               </a:rPr>
-              <a:t>  29  </a:t>
+              <a:t>  32  </a:t>
             </a:r>
             <a:r>
               <a:rPr sz="1700">
@@ -6814,7 +6814,7 @@
                 </a:solidFill>
                 <a:latin typeface="Consolas"/>
               </a:rPr>
-              <a:t>  15  </a:t>
+              <a:t>  18  </a:t>
             </a:r>
             <a:r>
               <a:rPr sz="1700">
@@ -6839,7 +6839,7 @@
                 </a:solidFill>
                 <a:latin typeface="Consolas"/>
               </a:rPr>
-              <a:t>  16  </a:t>
+              <a:t>  19  </a:t>
             </a:r>
             <a:r>
               <a:rPr sz="1700">
@@ -6864,7 +6864,7 @@
                 </a:solidFill>
                 <a:latin typeface="Consolas"/>
               </a:rPr>
-              <a:t>  17  </a:t>
+              <a:t>  20  </a:t>
             </a:r>
             <a:r>
               <a:rPr sz="1700">
@@ -6889,7 +6889,7 @@
                 </a:solidFill>
                 <a:latin typeface="Consolas"/>
               </a:rPr>
-              <a:t>  18  </a:t>
+              <a:t>  21  </a:t>
             </a:r>
             <a:r>
               <a:rPr sz="1700">
@@ -7108,7 +7108,7 @@
                 </a:solidFill>
                 <a:latin typeface="Consolas"/>
               </a:rPr>
-              <a:t>  79  </a:t>
+              <a:t>  82  </a:t>
             </a:r>
             <a:r>
               <a:rPr sz="1400">
@@ -7133,7 +7133,7 @@
                 </a:solidFill>
                 <a:latin typeface="Consolas"/>
               </a:rPr>
-              <a:t>  80  </a:t>
+              <a:t>  83  </a:t>
             </a:r>
             <a:r>
               <a:rPr sz="1400">
@@ -7158,7 +7158,7 @@
                 </a:solidFill>
                 <a:latin typeface="Consolas"/>
               </a:rPr>
-              <a:t>  81  </a:t>
+              <a:t>  84  </a:t>
             </a:r>
             <a:r>
               <a:rPr sz="1400">
@@ -7183,7 +7183,7 @@
                 </a:solidFill>
                 <a:latin typeface="Consolas"/>
               </a:rPr>
-              <a:t>  82  </a:t>
+              <a:t>  85  </a:t>
             </a:r>
             <a:r>
               <a:rPr sz="1400">
@@ -7208,7 +7208,7 @@
                 </a:solidFill>
                 <a:latin typeface="Consolas"/>
               </a:rPr>
-              <a:t>  83  </a:t>
+              <a:t>  86  </a:t>
             </a:r>
             <a:r>
               <a:rPr sz="1400">
@@ -7233,7 +7233,7 @@
                 </a:solidFill>
                 <a:latin typeface="Consolas"/>
               </a:rPr>
-              <a:t>  84  </a:t>
+              <a:t>  87  </a:t>
             </a:r>
             <a:r>
               <a:rPr sz="1400">
@@ -7258,7 +7258,7 @@
                 </a:solidFill>
                 <a:latin typeface="Consolas"/>
               </a:rPr>
-              <a:t>  85  </a:t>
+              <a:t>  88  </a:t>
             </a:r>
             <a:r>
               <a:rPr sz="1400">
@@ -7283,7 +7283,7 @@
                 </a:solidFill>
                 <a:latin typeface="Consolas"/>
               </a:rPr>
-              <a:t>  86  </a:t>
+              <a:t>  89  </a:t>
             </a:r>
             <a:r>
               <a:rPr sz="1400">
@@ -7308,7 +7308,7 @@
                 </a:solidFill>
                 <a:latin typeface="Consolas"/>
               </a:rPr>
-              <a:t>  87  </a:t>
+              <a:t>  90  </a:t>
             </a:r>
             <a:r>
               <a:rPr sz="1400">
@@ -7333,7 +7333,7 @@
                 </a:solidFill>
                 <a:latin typeface="Consolas"/>
               </a:rPr>
-              <a:t>  88  </a:t>
+              <a:t>  91  </a:t>
             </a:r>
             <a:r>
               <a:rPr sz="1400">
@@ -7358,7 +7358,7 @@
                 </a:solidFill>
                 <a:latin typeface="Consolas"/>
               </a:rPr>
-              <a:t>  89  </a:t>
+              <a:t>  92  </a:t>
             </a:r>
             <a:r>
               <a:rPr sz="1400">
@@ -7383,7 +7383,7 @@
                 </a:solidFill>
                 <a:latin typeface="Consolas"/>
               </a:rPr>
-              <a:t>  90  </a:t>
+              <a:t>  93  </a:t>
             </a:r>
             <a:r>
               <a:rPr sz="1400">
@@ -7408,7 +7408,7 @@
                 </a:solidFill>
                 <a:latin typeface="Consolas"/>
               </a:rPr>
-              <a:t>  91  </a:t>
+              <a:t>  94  </a:t>
             </a:r>
             <a:r>
               <a:rPr sz="1400">
@@ -7433,7 +7433,7 @@
                 </a:solidFill>
                 <a:latin typeface="Consolas"/>
               </a:rPr>
-              <a:t>  92  </a:t>
+              <a:t>  95  </a:t>
             </a:r>
             <a:r>
               <a:rPr sz="1400">
@@ -7458,7 +7458,7 @@
                 </a:solidFill>
                 <a:latin typeface="Consolas"/>
               </a:rPr>
-              <a:t>  93  </a:t>
+              <a:t>  96  </a:t>
             </a:r>
             <a:r>
               <a:rPr sz="1400">
@@ -7565,7 +7565,7 @@
                 </a:solidFill>
                 <a:latin typeface="Consolas"/>
               </a:rPr>
-              <a:t>  94  </a:t>
+              <a:t>  97  </a:t>
             </a:r>
             <a:r>
               <a:rPr sz="1700">
@@ -7590,7 +7590,7 @@
                 </a:solidFill>
                 <a:latin typeface="Consolas"/>
               </a:rPr>
-              <a:t>  95  </a:t>
+              <a:t>  98  </a:t>
             </a:r>
             <a:r>
               <a:rPr sz="1700">
@@ -7615,7 +7615,7 @@
                 </a:solidFill>
                 <a:latin typeface="Consolas"/>
               </a:rPr>
-              <a:t>  96  </a:t>
+              <a:t>  99  </a:t>
             </a:r>
             <a:r>
               <a:rPr sz="1700">
@@ -7640,7 +7640,7 @@
                 </a:solidFill>
                 <a:latin typeface="Consolas"/>
               </a:rPr>
-              <a:t>  97  </a:t>
+              <a:t> 100  </a:t>
             </a:r>
             <a:r>
               <a:rPr sz="1700">
@@ -7665,7 +7665,7 @@
                 </a:solidFill>
                 <a:latin typeface="Consolas"/>
               </a:rPr>
-              <a:t>  98  </a:t>
+              <a:t> 101  </a:t>
             </a:r>
             <a:r>
               <a:rPr sz="1700">

--- a/ai101/slides/week-07.pptx
+++ b/ai101/slides/week-07.pptx
@@ -3376,7 +3376,7 @@
                 </a:solidFill>
                 <a:latin typeface="Consolas"/>
               </a:rPr>
-              <a:t>  51  </a:t>
+              <a:t>  59  </a:t>
             </a:r>
             <a:r>
               <a:rPr sz="1400">
@@ -3401,7 +3401,7 @@
                 </a:solidFill>
                 <a:latin typeface="Consolas"/>
               </a:rPr>
-              <a:t>  52  </a:t>
+              <a:t>  60  </a:t>
             </a:r>
             <a:r>
               <a:rPr sz="1400">
@@ -3426,7 +3426,7 @@
                 </a:solidFill>
                 <a:latin typeface="Consolas"/>
               </a:rPr>
-              <a:t>  53  </a:t>
+              <a:t>  61  </a:t>
             </a:r>
             <a:r>
               <a:rPr sz="1400">
@@ -3451,7 +3451,7 @@
                 </a:solidFill>
                 <a:latin typeface="Consolas"/>
               </a:rPr>
-              <a:t>  54  </a:t>
+              <a:t>  62  </a:t>
             </a:r>
             <a:r>
               <a:rPr sz="1400">
@@ -3476,7 +3476,7 @@
                 </a:solidFill>
                 <a:latin typeface="Consolas"/>
               </a:rPr>
-              <a:t>  55  </a:t>
+              <a:t>  63  </a:t>
             </a:r>
             <a:r>
               <a:rPr sz="1400">
@@ -3501,7 +3501,7 @@
                 </a:solidFill>
                 <a:latin typeface="Consolas"/>
               </a:rPr>
-              <a:t>  56  </a:t>
+              <a:t>  64  </a:t>
             </a:r>
             <a:r>
               <a:rPr sz="1400">
@@ -3526,7 +3526,7 @@
                 </a:solidFill>
                 <a:latin typeface="Consolas"/>
               </a:rPr>
-              <a:t>  57  </a:t>
+              <a:t>  65  </a:t>
             </a:r>
             <a:r>
               <a:rPr sz="1400">
@@ -3551,7 +3551,7 @@
                 </a:solidFill>
                 <a:latin typeface="Consolas"/>
               </a:rPr>
-              <a:t>  58  </a:t>
+              <a:t>  66  </a:t>
             </a:r>
             <a:r>
               <a:rPr sz="1400">
@@ -3576,7 +3576,7 @@
                 </a:solidFill>
                 <a:latin typeface="Consolas"/>
               </a:rPr>
-              <a:t>  59  </a:t>
+              <a:t>  67  </a:t>
             </a:r>
             <a:r>
               <a:rPr sz="1400">
@@ -3601,7 +3601,7 @@
                 </a:solidFill>
                 <a:latin typeface="Consolas"/>
               </a:rPr>
-              <a:t>  60  </a:t>
+              <a:t>  68  </a:t>
             </a:r>
             <a:r>
               <a:rPr sz="1400">
@@ -3626,7 +3626,7 @@
                 </a:solidFill>
                 <a:latin typeface="Consolas"/>
               </a:rPr>
-              <a:t>  61  </a:t>
+              <a:t>  69  </a:t>
             </a:r>
             <a:r>
               <a:rPr sz="1400">
@@ -3651,7 +3651,7 @@
                 </a:solidFill>
                 <a:latin typeface="Consolas"/>
               </a:rPr>
-              <a:t>  62  </a:t>
+              <a:t>  70  </a:t>
             </a:r>
             <a:r>
               <a:rPr sz="1400">
@@ -3676,7 +3676,7 @@
                 </a:solidFill>
                 <a:latin typeface="Consolas"/>
               </a:rPr>
-              <a:t>  63  </a:t>
+              <a:t>  71  </a:t>
             </a:r>
             <a:r>
               <a:rPr sz="1400">
@@ -3701,7 +3701,7 @@
                 </a:solidFill>
                 <a:latin typeface="Consolas"/>
               </a:rPr>
-              <a:t>  64  </a:t>
+              <a:t>  72  </a:t>
             </a:r>
             <a:r>
               <a:rPr sz="1400">
@@ -3726,7 +3726,7 @@
                 </a:solidFill>
                 <a:latin typeface="Consolas"/>
               </a:rPr>
-              <a:t>  65  </a:t>
+              <a:t>  73  </a:t>
             </a:r>
             <a:r>
               <a:rPr sz="1400">
@@ -3833,7 +3833,7 @@
                 </a:solidFill>
                 <a:latin typeface="Consolas"/>
               </a:rPr>
-              <a:t>  66  </a:t>
+              <a:t>  74  </a:t>
             </a:r>
             <a:r>
               <a:rPr sz="1400">
@@ -3858,7 +3858,7 @@
                 </a:solidFill>
                 <a:latin typeface="Consolas"/>
               </a:rPr>
-              <a:t>  67  </a:t>
+              <a:t>  75  </a:t>
             </a:r>
             <a:r>
               <a:rPr sz="1400">
@@ -3883,7 +3883,7 @@
                 </a:solidFill>
                 <a:latin typeface="Consolas"/>
               </a:rPr>
-              <a:t>  68  </a:t>
+              <a:t>  76  </a:t>
             </a:r>
             <a:r>
               <a:rPr sz="1400">
@@ -3908,7 +3908,7 @@
                 </a:solidFill>
                 <a:latin typeface="Consolas"/>
               </a:rPr>
-              <a:t>  69  </a:t>
+              <a:t>  77  </a:t>
             </a:r>
             <a:r>
               <a:rPr sz="1400">
@@ -3933,7 +3933,7 @@
                 </a:solidFill>
                 <a:latin typeface="Consolas"/>
               </a:rPr>
-              <a:t>  70  </a:t>
+              <a:t>  78  </a:t>
             </a:r>
             <a:r>
               <a:rPr sz="1400">
@@ -3958,7 +3958,7 @@
                 </a:solidFill>
                 <a:latin typeface="Consolas"/>
               </a:rPr>
-              <a:t>  71  </a:t>
+              <a:t>  79  </a:t>
             </a:r>
             <a:r>
               <a:rPr sz="1400">
@@ -3983,7 +3983,7 @@
                 </a:solidFill>
                 <a:latin typeface="Consolas"/>
               </a:rPr>
-              <a:t>  72  </a:t>
+              <a:t>  80  </a:t>
             </a:r>
             <a:r>
               <a:rPr sz="1400">
@@ -4008,7 +4008,7 @@
                 </a:solidFill>
                 <a:latin typeface="Consolas"/>
               </a:rPr>
-              <a:t>  73  </a:t>
+              <a:t>  81  </a:t>
             </a:r>
             <a:r>
               <a:rPr sz="1400">
@@ -4033,7 +4033,7 @@
                 </a:solidFill>
                 <a:latin typeface="Consolas"/>
               </a:rPr>
-              <a:t>  74  </a:t>
+              <a:t>  82  </a:t>
             </a:r>
             <a:r>
               <a:rPr sz="1400">
@@ -4058,7 +4058,7 @@
                 </a:solidFill>
                 <a:latin typeface="Consolas"/>
               </a:rPr>
-              <a:t>  75  </a:t>
+              <a:t>  83  </a:t>
             </a:r>
             <a:r>
               <a:rPr sz="1400">
@@ -4083,7 +4083,7 @@
                 </a:solidFill>
                 <a:latin typeface="Consolas"/>
               </a:rPr>
-              <a:t>  76  </a:t>
+              <a:t>  84  </a:t>
             </a:r>
             <a:r>
               <a:rPr sz="1400">
@@ -4108,7 +4108,7 @@
                 </a:solidFill>
                 <a:latin typeface="Consolas"/>
               </a:rPr>
-              <a:t>  77  </a:t>
+              <a:t>  85  </a:t>
             </a:r>
             <a:r>
               <a:rPr sz="1400">
@@ -4133,7 +4133,7 @@
                 </a:solidFill>
                 <a:latin typeface="Consolas"/>
               </a:rPr>
-              <a:t>  78  </a:t>
+              <a:t>  86  </a:t>
             </a:r>
             <a:r>
               <a:rPr sz="1400">
@@ -4158,7 +4158,7 @@
                 </a:solidFill>
                 <a:latin typeface="Consolas"/>
               </a:rPr>
-              <a:t>  79  </a:t>
+              <a:t>  87  </a:t>
             </a:r>
             <a:r>
               <a:rPr sz="1400">
@@ -4183,7 +4183,7 @@
                 </a:solidFill>
                 <a:latin typeface="Consolas"/>
               </a:rPr>
-              <a:t>  80  </a:t>
+              <a:t>  88  </a:t>
             </a:r>
             <a:r>
               <a:rPr sz="1400">
@@ -4290,7 +4290,7 @@
                 </a:solidFill>
                 <a:latin typeface="Consolas"/>
               </a:rPr>
-              <a:t>  81  </a:t>
+              <a:t>  89  </a:t>
             </a:r>
             <a:r>
               <a:rPr sz="1700">
@@ -4524,7 +4524,7 @@
                 </a:solidFill>
                 <a:latin typeface="Consolas"/>
               </a:rPr>
-              <a:t>  22  </a:t>
+              <a:t>  27  </a:t>
             </a:r>
             <a:r>
               <a:rPr sz="1700">
@@ -4549,7 +4549,7 @@
                 </a:solidFill>
                 <a:latin typeface="Consolas"/>
               </a:rPr>
-              <a:t>  23  </a:t>
+              <a:t>  28  </a:t>
             </a:r>
             <a:r>
               <a:rPr sz="1700">
@@ -4574,7 +4574,7 @@
                 </a:solidFill>
                 <a:latin typeface="Consolas"/>
               </a:rPr>
-              <a:t>  24  </a:t>
+              <a:t>  29  </a:t>
             </a:r>
             <a:r>
               <a:rPr sz="1700">
@@ -4599,7 +4599,7 @@
                 </a:solidFill>
                 <a:latin typeface="Consolas"/>
               </a:rPr>
-              <a:t>  25  </a:t>
+              <a:t>  30  </a:t>
             </a:r>
             <a:r>
               <a:rPr sz="1700">
@@ -4624,7 +4624,7 @@
                 </a:solidFill>
                 <a:latin typeface="Consolas"/>
               </a:rPr>
-              <a:t>  26  </a:t>
+              <a:t>  31  </a:t>
             </a:r>
             <a:r>
               <a:rPr sz="1700">
@@ -4649,7 +4649,7 @@
                 </a:solidFill>
                 <a:latin typeface="Consolas"/>
               </a:rPr>
-              <a:t>  27  </a:t>
+              <a:t>  32  </a:t>
             </a:r>
             <a:r>
               <a:rPr sz="1700">
@@ -4674,7 +4674,7 @@
                 </a:solidFill>
                 <a:latin typeface="Consolas"/>
               </a:rPr>
-              <a:t>  28  </a:t>
+              <a:t>  33  </a:t>
             </a:r>
             <a:r>
               <a:rPr sz="1700">
@@ -4699,7 +4699,7 @@
                 </a:solidFill>
                 <a:latin typeface="Consolas"/>
               </a:rPr>
-              <a:t>  29  </a:t>
+              <a:t>  34  </a:t>
             </a:r>
             <a:r>
               <a:rPr sz="1700">
@@ -4724,7 +4724,7 @@
                 </a:solidFill>
                 <a:latin typeface="Consolas"/>
               </a:rPr>
-              <a:t>  30  </a:t>
+              <a:t>  35  </a:t>
             </a:r>
             <a:r>
               <a:rPr sz="1700">
@@ -4749,7 +4749,7 @@
                 </a:solidFill>
                 <a:latin typeface="Consolas"/>
               </a:rPr>
-              <a:t>  31  </a:t>
+              <a:t>  36  </a:t>
             </a:r>
             <a:r>
               <a:rPr sz="1700">
@@ -4774,7 +4774,7 @@
                 </a:solidFill>
                 <a:latin typeface="Consolas"/>
               </a:rPr>
-              <a:t>  32  </a:t>
+              <a:t>  37  </a:t>
             </a:r>
             <a:r>
               <a:rPr sz="1700">
@@ -6814,7 +6814,7 @@
                 </a:solidFill>
                 <a:latin typeface="Consolas"/>
               </a:rPr>
-              <a:t>  18  </a:t>
+              <a:t>  23  </a:t>
             </a:r>
             <a:r>
               <a:rPr sz="1700">
@@ -6839,7 +6839,7 @@
                 </a:solidFill>
                 <a:latin typeface="Consolas"/>
               </a:rPr>
-              <a:t>  19  </a:t>
+              <a:t>  24  </a:t>
             </a:r>
             <a:r>
               <a:rPr sz="1700">
@@ -6864,7 +6864,7 @@
                 </a:solidFill>
                 <a:latin typeface="Consolas"/>
               </a:rPr>
-              <a:t>  20  </a:t>
+              <a:t>  25  </a:t>
             </a:r>
             <a:r>
               <a:rPr sz="1700">
@@ -6889,7 +6889,7 @@
                 </a:solidFill>
                 <a:latin typeface="Consolas"/>
               </a:rPr>
-              <a:t>  21  </a:t>
+              <a:t>  26  </a:t>
             </a:r>
             <a:r>
               <a:rPr sz="1700">
@@ -7108,7 +7108,7 @@
                 </a:solidFill>
                 <a:latin typeface="Consolas"/>
               </a:rPr>
-              <a:t>  82  </a:t>
+              <a:t>  90  </a:t>
             </a:r>
             <a:r>
               <a:rPr sz="1400">
@@ -7133,7 +7133,7 @@
                 </a:solidFill>
                 <a:latin typeface="Consolas"/>
               </a:rPr>
-              <a:t>  83  </a:t>
+              <a:t>  91  </a:t>
             </a:r>
             <a:r>
               <a:rPr sz="1400">
@@ -7158,7 +7158,7 @@
                 </a:solidFill>
                 <a:latin typeface="Consolas"/>
               </a:rPr>
-              <a:t>  84  </a:t>
+              <a:t>  92  </a:t>
             </a:r>
             <a:r>
               <a:rPr sz="1400">
@@ -7183,7 +7183,7 @@
                 </a:solidFill>
                 <a:latin typeface="Consolas"/>
               </a:rPr>
-              <a:t>  85  </a:t>
+              <a:t>  93  </a:t>
             </a:r>
             <a:r>
               <a:rPr sz="1400">
@@ -7208,7 +7208,7 @@
                 </a:solidFill>
                 <a:latin typeface="Consolas"/>
               </a:rPr>
-              <a:t>  86  </a:t>
+              <a:t>  94  </a:t>
             </a:r>
             <a:r>
               <a:rPr sz="1400">
@@ -7233,7 +7233,7 @@
                 </a:solidFill>
                 <a:latin typeface="Consolas"/>
               </a:rPr>
-              <a:t>  87  </a:t>
+              <a:t>  95  </a:t>
             </a:r>
             <a:r>
               <a:rPr sz="1400">
@@ -7258,7 +7258,7 @@
                 </a:solidFill>
                 <a:latin typeface="Consolas"/>
               </a:rPr>
-              <a:t>  88  </a:t>
+              <a:t>  96  </a:t>
             </a:r>
             <a:r>
               <a:rPr sz="1400">
@@ -7283,7 +7283,7 @@
                 </a:solidFill>
                 <a:latin typeface="Consolas"/>
               </a:rPr>
-              <a:t>  89  </a:t>
+              <a:t>  97  </a:t>
             </a:r>
             <a:r>
               <a:rPr sz="1400">
@@ -7308,7 +7308,7 @@
                 </a:solidFill>
                 <a:latin typeface="Consolas"/>
               </a:rPr>
-              <a:t>  90  </a:t>
+              <a:t>  98  </a:t>
             </a:r>
             <a:r>
               <a:rPr sz="1400">
@@ -7333,7 +7333,7 @@
                 </a:solidFill>
                 <a:latin typeface="Consolas"/>
               </a:rPr>
-              <a:t>  91  </a:t>
+              <a:t>  99  </a:t>
             </a:r>
             <a:r>
               <a:rPr sz="1400">
@@ -7358,7 +7358,7 @@
                 </a:solidFill>
                 <a:latin typeface="Consolas"/>
               </a:rPr>
-              <a:t>  92  </a:t>
+              <a:t> 100  </a:t>
             </a:r>
             <a:r>
               <a:rPr sz="1400">
@@ -7383,7 +7383,7 @@
                 </a:solidFill>
                 <a:latin typeface="Consolas"/>
               </a:rPr>
-              <a:t>  93  </a:t>
+              <a:t> 101  </a:t>
             </a:r>
             <a:r>
               <a:rPr sz="1400">
@@ -7408,7 +7408,7 @@
                 </a:solidFill>
                 <a:latin typeface="Consolas"/>
               </a:rPr>
-              <a:t>  94  </a:t>
+              <a:t> 102  </a:t>
             </a:r>
             <a:r>
               <a:rPr sz="1400">
@@ -7433,7 +7433,7 @@
                 </a:solidFill>
                 <a:latin typeface="Consolas"/>
               </a:rPr>
-              <a:t>  95  </a:t>
+              <a:t> 103  </a:t>
             </a:r>
             <a:r>
               <a:rPr sz="1400">
@@ -7458,7 +7458,7 @@
                 </a:solidFill>
                 <a:latin typeface="Consolas"/>
               </a:rPr>
-              <a:t>  96  </a:t>
+              <a:t> 104  </a:t>
             </a:r>
             <a:r>
               <a:rPr sz="1400">
@@ -7565,7 +7565,7 @@
                 </a:solidFill>
                 <a:latin typeface="Consolas"/>
               </a:rPr>
-              <a:t>  97  </a:t>
+              <a:t> 105  </a:t>
             </a:r>
             <a:r>
               <a:rPr sz="1700">
@@ -7590,7 +7590,7 @@
                 </a:solidFill>
                 <a:latin typeface="Consolas"/>
               </a:rPr>
-              <a:t>  98  </a:t>
+              <a:t> 106  </a:t>
             </a:r>
             <a:r>
               <a:rPr sz="1700">
@@ -7615,7 +7615,7 @@
                 </a:solidFill>
                 <a:latin typeface="Consolas"/>
               </a:rPr>
-              <a:t>  99  </a:t>
+              <a:t> 107  </a:t>
             </a:r>
             <a:r>
               <a:rPr sz="1700">
@@ -7640,7 +7640,7 @@
                 </a:solidFill>
                 <a:latin typeface="Consolas"/>
               </a:rPr>
-              <a:t> 100  </a:t>
+              <a:t> 108  </a:t>
             </a:r>
             <a:r>
               <a:rPr sz="1700">
@@ -7665,7 +7665,7 @@
                 </a:solidFill>
                 <a:latin typeface="Consolas"/>
               </a:rPr>
-              <a:t> 101  </a:t>
+              <a:t> 109  </a:t>
             </a:r>
             <a:r>
               <a:rPr sz="1700">

--- a/ai101/slides/week-07.pptx
+++ b/ai101/slides/week-07.pptx
@@ -7624,7 +7624,7 @@
                 </a:solidFill>
                 <a:latin typeface="Consolas"/>
               </a:rPr>
-              <a:t>    addLine('problem', problem.message);</a:t>
+              <a:t>    addLine('problem', problem.message === 'Failed to fetch'</a:t>
             </a:r>
           </a:p>
           <a:p>
@@ -7649,6 +7649,56 @@
                 </a:solidFill>
                 <a:latin typeface="Consolas"/>
               </a:rPr>
+              <a:t>      ? 'Could not reach the AI. Are you on the school network?'</a:t>
+            </a:r>
+          </a:p>
+          <a:p>
+            <a:pPr>
+              <a:spcAft>
+                <a:spcPts val="0"/>
+              </a:spcAft>
+            </a:pPr>
+            <a:r>
+              <a:rPr sz="1700">
+                <a:solidFill>
+                  <a:srgbClr val="6D8C97"/>
+                </a:solidFill>
+                <a:latin typeface="Consolas"/>
+              </a:rPr>
+              <a:t> 109  </a:t>
+            </a:r>
+            <a:r>
+              <a:rPr sz="1700">
+                <a:solidFill>
+                  <a:srgbClr val="DCECEF"/>
+                </a:solidFill>
+                <a:latin typeface="Consolas"/>
+              </a:rPr>
+              <a:t>      : problem.message);</a:t>
+            </a:r>
+          </a:p>
+          <a:p>
+            <a:pPr>
+              <a:spcAft>
+                <a:spcPts val="0"/>
+              </a:spcAft>
+            </a:pPr>
+            <a:r>
+              <a:rPr sz="1700">
+                <a:solidFill>
+                  <a:srgbClr val="6D8C97"/>
+                </a:solidFill>
+                <a:latin typeface="Consolas"/>
+              </a:rPr>
+              <a:t> 110  </a:t>
+            </a:r>
+            <a:r>
+              <a:rPr sz="1700">
+                <a:solidFill>
+                  <a:srgbClr val="DCECEF"/>
+                </a:solidFill>
+                <a:latin typeface="Consolas"/>
+              </a:rPr>
               <a:t>  }</a:t>
             </a:r>
           </a:p>
@@ -7665,7 +7715,7 @@
                 </a:solidFill>
                 <a:latin typeface="Consolas"/>
               </a:rPr>
-              <a:t> 109  </a:t>
+              <a:t> 111  </a:t>
             </a:r>
             <a:r>
               <a:rPr sz="1700">

--- a/ai101/slides/week-07.pptx
+++ b/ai101/slides/week-07.pptx
@@ -3451,6 +3451,31 @@
                 </a:solidFill>
                 <a:latin typeface="Consolas"/>
               </a:rPr>
+              <a:t>   -  </a:t>
+            </a:r>
+            <a:r>
+              <a:rPr sz="1400" strike="sngStrike">
+                <a:solidFill>
+                  <a:srgbClr val="F3928B"/>
+                </a:solidFill>
+                <a:latin typeface="Consolas"/>
+              </a:rPr>
+              <a:t>async function askAI(question) {</a:t>
+            </a:r>
+          </a:p>
+          <a:p>
+            <a:pPr>
+              <a:spcAft>
+                <a:spcPts val="0"/>
+              </a:spcAft>
+            </a:pPr>
+            <a:r>
+              <a:rPr sz="1400">
+                <a:solidFill>
+                  <a:srgbClr val="6D8C97"/>
+                </a:solidFill>
+                <a:latin typeface="Consolas"/>
+              </a:rPr>
               <a:t>  62  </a:t>
             </a:r>
             <a:r>
@@ -3833,6 +3858,31 @@
                 </a:solidFill>
                 <a:latin typeface="Consolas"/>
               </a:rPr>
+              <a:t>   -  </a:t>
+            </a:r>
+            <a:r>
+              <a:rPr sz="1400" strike="sngStrike">
+                <a:solidFill>
+                  <a:srgbClr val="F3928B"/>
+                </a:solidFill>
+                <a:latin typeface="Consolas"/>
+              </a:rPr>
+              <a:t>        { role: 'user', content: question }</a:t>
+            </a:r>
+          </a:p>
+          <a:p>
+            <a:pPr>
+              <a:spcAft>
+                <a:spcPts val="0"/>
+              </a:spcAft>
+            </a:pPr>
+            <a:r>
+              <a:rPr sz="1400">
+                <a:solidFill>
+                  <a:srgbClr val="6D8C97"/>
+                </a:solidFill>
+                <a:latin typeface="Consolas"/>
+              </a:rPr>
               <a:t>  74  </a:t>
             </a:r>
             <a:r>
@@ -4518,7 +4568,7 @@
               </a:spcAft>
             </a:pPr>
             <a:r>
-              <a:rPr sz="1700">
+              <a:rPr sz="1400">
                 <a:solidFill>
                   <a:srgbClr val="6D8C97"/>
                 </a:solidFill>
@@ -4527,7 +4577,7 @@
               <a:t>  27  </a:t>
             </a:r>
             <a:r>
-              <a:rPr sz="1700">
+              <a:rPr sz="1400">
                 <a:solidFill>
                   <a:srgbClr val="7FE0A0"/>
                 </a:solidFill>
@@ -4543,7 +4593,32 @@
               </a:spcAft>
             </a:pPr>
             <a:r>
-              <a:rPr sz="1700">
+              <a:rPr sz="1400">
+                <a:solidFill>
+                  <a:srgbClr val="6D8C97"/>
+                </a:solidFill>
+                <a:latin typeface="Consolas"/>
+              </a:rPr>
+              <a:t>   -  </a:t>
+            </a:r>
+            <a:r>
+              <a:rPr sz="1400" strike="sngStrike">
+                <a:solidFill>
+                  <a:srgbClr val="F3928B"/>
+                </a:solidFill>
+                <a:latin typeface="Consolas"/>
+              </a:rPr>
+              <a:t>// Put one line of text into the chat box.</a:t>
+            </a:r>
+          </a:p>
+          <a:p>
+            <a:pPr>
+              <a:spcAft>
+                <a:spcPts val="0"/>
+              </a:spcAft>
+            </a:pPr>
+            <a:r>
+              <a:rPr sz="1400">
                 <a:solidFill>
                   <a:srgbClr val="6D8C97"/>
                 </a:solidFill>
@@ -4552,7 +4627,7 @@
               <a:t>  28  </a:t>
             </a:r>
             <a:r>
-              <a:rPr sz="1700">
+              <a:rPr sz="1400">
                 <a:solidFill>
                   <a:srgbClr val="7FE0A0"/>
                 </a:solidFill>
@@ -4568,7 +4643,7 @@
               </a:spcAft>
             </a:pPr>
             <a:r>
-              <a:rPr sz="1700">
+              <a:rPr sz="1400">
                 <a:solidFill>
                   <a:srgbClr val="6D8C97"/>
                 </a:solidFill>
@@ -4577,7 +4652,7 @@
               <a:t>  29  </a:t>
             </a:r>
             <a:r>
-              <a:rPr sz="1700">
+              <a:rPr sz="1400">
                 <a:solidFill>
                   <a:srgbClr val="7FE0A0"/>
                 </a:solidFill>
@@ -4593,7 +4668,7 @@
               </a:spcAft>
             </a:pPr>
             <a:r>
-              <a:rPr sz="1700">
+              <a:rPr sz="1400">
                 <a:solidFill>
                   <a:srgbClr val="6D8C97"/>
                 </a:solidFill>
@@ -4602,7 +4677,7 @@
               <a:t>  30  </a:t>
             </a:r>
             <a:r>
-              <a:rPr sz="1700">
+              <a:rPr sz="1400">
                 <a:solidFill>
                   <a:srgbClr val="DCECEF"/>
                 </a:solidFill>
@@ -4618,7 +4693,82 @@
               </a:spcAft>
             </a:pPr>
             <a:r>
-              <a:rPr sz="1700">
+              <a:rPr sz="1400">
+                <a:solidFill>
+                  <a:srgbClr val="6D8C97"/>
+                </a:solidFill>
+                <a:latin typeface="Consolas"/>
+              </a:rPr>
+              <a:t>   -  </a:t>
+            </a:r>
+            <a:r>
+              <a:rPr sz="1400" strike="sngStrike">
+                <a:solidFill>
+                  <a:srgbClr val="F3928B"/>
+                </a:solidFill>
+                <a:latin typeface="Consolas"/>
+              </a:rPr>
+              <a:t>  const line = document.createElement('p');</a:t>
+            </a:r>
+          </a:p>
+          <a:p>
+            <a:pPr>
+              <a:spcAft>
+                <a:spcPts val="0"/>
+              </a:spcAft>
+            </a:pPr>
+            <a:r>
+              <a:rPr sz="1400">
+                <a:solidFill>
+                  <a:srgbClr val="6D8C97"/>
+                </a:solidFill>
+                <a:latin typeface="Consolas"/>
+              </a:rPr>
+              <a:t>   -  </a:t>
+            </a:r>
+            <a:r>
+              <a:rPr sz="1400" strike="sngStrike">
+                <a:solidFill>
+                  <a:srgbClr val="F3928B"/>
+                </a:solidFill>
+                <a:latin typeface="Consolas"/>
+              </a:rPr>
+              <a:t>  line.textContent = who + ': ' + text;</a:t>
+            </a:r>
+          </a:p>
+          <a:p>
+            <a:pPr>
+              <a:spcAft>
+                <a:spcPts val="0"/>
+              </a:spcAft>
+            </a:pPr>
+            <a:r>
+              <a:rPr sz="1400">
+                <a:solidFill>
+                  <a:srgbClr val="6D8C97"/>
+                </a:solidFill>
+                <a:latin typeface="Consolas"/>
+              </a:rPr>
+              <a:t>   -  </a:t>
+            </a:r>
+            <a:r>
+              <a:rPr sz="1400" strike="sngStrike">
+                <a:solidFill>
+                  <a:srgbClr val="F3928B"/>
+                </a:solidFill>
+                <a:latin typeface="Consolas"/>
+              </a:rPr>
+              <a:t>  chat.appendChild(line);</a:t>
+            </a:r>
+          </a:p>
+          <a:p>
+            <a:pPr>
+              <a:spcAft>
+                <a:spcPts val="0"/>
+              </a:spcAft>
+            </a:pPr>
+            <a:r>
+              <a:rPr sz="1400">
                 <a:solidFill>
                   <a:srgbClr val="6D8C97"/>
                 </a:solidFill>
@@ -4627,7 +4777,7 @@
               <a:t>  31  </a:t>
             </a:r>
             <a:r>
-              <a:rPr sz="1700">
+              <a:rPr sz="1400">
                 <a:solidFill>
                   <a:srgbClr val="7FE0A0"/>
                 </a:solidFill>
@@ -4643,7 +4793,7 @@
               </a:spcAft>
             </a:pPr>
             <a:r>
-              <a:rPr sz="1700">
+              <a:rPr sz="1400">
                 <a:solidFill>
                   <a:srgbClr val="6D8C97"/>
                 </a:solidFill>
@@ -4652,7 +4802,7 @@
               <a:t>  32  </a:t>
             </a:r>
             <a:r>
-              <a:rPr sz="1700">
+              <a:rPr sz="1400">
                 <a:solidFill>
                   <a:srgbClr val="7FE0A0"/>
                 </a:solidFill>
@@ -4668,7 +4818,7 @@
               </a:spcAft>
             </a:pPr>
             <a:r>
-              <a:rPr sz="1700">
+              <a:rPr sz="1400">
                 <a:solidFill>
                   <a:srgbClr val="6D8C97"/>
                 </a:solidFill>
@@ -4677,7 +4827,7 @@
               <a:t>  33  </a:t>
             </a:r>
             <a:r>
-              <a:rPr sz="1700">
+              <a:rPr sz="1400">
                 <a:solidFill>
                   <a:srgbClr val="7FE0A0"/>
                 </a:solidFill>
@@ -4693,7 +4843,7 @@
               </a:spcAft>
             </a:pPr>
             <a:r>
-              <a:rPr sz="1700">
+              <a:rPr sz="1400">
                 <a:solidFill>
                   <a:srgbClr val="6D8C97"/>
                 </a:solidFill>
@@ -4702,7 +4852,7 @@
               <a:t>  34  </a:t>
             </a:r>
             <a:r>
-              <a:rPr sz="1700">
+              <a:rPr sz="1400">
                 <a:solidFill>
                   <a:srgbClr val="7FE0A0"/>
                 </a:solidFill>
@@ -4718,7 +4868,7 @@
               </a:spcAft>
             </a:pPr>
             <a:r>
-              <a:rPr sz="1700">
+              <a:rPr sz="1400">
                 <a:solidFill>
                   <a:srgbClr val="6D8C97"/>
                 </a:solidFill>
@@ -4727,7 +4877,7 @@
               <a:t>  35  </a:t>
             </a:r>
             <a:r>
-              <a:rPr sz="1700">
+              <a:rPr sz="1400">
                 <a:solidFill>
                   <a:srgbClr val="7FE0A0"/>
                 </a:solidFill>
@@ -4743,7 +4893,7 @@
               </a:spcAft>
             </a:pPr>
             <a:r>
-              <a:rPr sz="1700">
+              <a:rPr sz="1400">
                 <a:solidFill>
                   <a:srgbClr val="6D8C97"/>
                 </a:solidFill>
@@ -4752,7 +4902,7 @@
               <a:t>  36  </a:t>
             </a:r>
             <a:r>
-              <a:rPr sz="1700">
+              <a:rPr sz="1400">
                 <a:solidFill>
                   <a:srgbClr val="7FE0A0"/>
                 </a:solidFill>
@@ -4768,7 +4918,7 @@
               </a:spcAft>
             </a:pPr>
             <a:r>
-              <a:rPr sz="1700">
+              <a:rPr sz="1400">
                 <a:solidFill>
                   <a:srgbClr val="6D8C97"/>
                 </a:solidFill>
@@ -4777,7 +4927,7 @@
               <a:t>  37  </a:t>
             </a:r>
             <a:r>
-              <a:rPr sz="1700">
+              <a:rPr sz="1400">
                 <a:solidFill>
                   <a:srgbClr val="DCECEF"/>
                 </a:solidFill>
@@ -4881,6 +5031,31 @@
                 </a:solidFill>
                 <a:latin typeface="Consolas"/>
               </a:rPr>
+              <a:t>   -  </a:t>
+            </a:r>
+            <a:r>
+              <a:rPr sz="1400" strike="sngStrike">
+                <a:solidFill>
+                  <a:srgbClr val="F3928B"/>
+                </a:solidFill>
+                <a:latin typeface="Consolas"/>
+              </a:rPr>
+              <a:t>.chat p { margin: 0 0 10px; line-height: 1.5; }</a:t>
+            </a:r>
+          </a:p>
+          <a:p>
+            <a:pPr>
+              <a:spcAft>
+                <a:spcPts val="0"/>
+              </a:spcAft>
+            </a:pPr>
+            <a:r>
+              <a:rPr sz="1400">
+                <a:solidFill>
+                  <a:srgbClr val="6D8C97"/>
+                </a:solidFill>
+                <a:latin typeface="Consolas"/>
+              </a:rPr>
               <a:t>  35  </a:t>
             </a:r>
             <a:r>
@@ -5820,6 +5995,31 @@
                 </a:solidFill>
                 <a:latin typeface="Consolas"/>
               </a:rPr>
+              <a:t>   -  </a:t>
+            </a:r>
+            <a:r>
+              <a:rPr sz="1400" strike="sngStrike">
+                <a:solidFill>
+                  <a:srgbClr val="F3928B"/>
+                </a:solidFill>
+                <a:latin typeface="Consolas"/>
+              </a:rPr>
+              <a:t>  min-height: 260px;</a:t>
+            </a:r>
+          </a:p>
+          <a:p>
+            <a:pPr>
+              <a:spcAft>
+                <a:spcPts val="0"/>
+              </a:spcAft>
+            </a:pPr>
+            <a:r>
+              <a:rPr sz="1400">
+                <a:solidFill>
+                  <a:srgbClr val="6D8C97"/>
+                </a:solidFill>
+                <a:latin typeface="Consolas"/>
+              </a:rPr>
               <a:t>  15  </a:t>
             </a:r>
             <a:r>
@@ -7283,6 +7483,56 @@
                 </a:solidFill>
                 <a:latin typeface="Consolas"/>
               </a:rPr>
+              <a:t>   -  </a:t>
+            </a:r>
+            <a:r>
+              <a:rPr sz="1400" strike="sngStrike">
+                <a:solidFill>
+                  <a:srgbClr val="F3928B"/>
+                </a:solidFill>
+                <a:latin typeface="Consolas"/>
+              </a:rPr>
+              <a:t>  addLine('You', text);</a:t>
+            </a:r>
+          </a:p>
+          <a:p>
+            <a:pPr>
+              <a:spcAft>
+                <a:spcPts val="0"/>
+              </a:spcAft>
+            </a:pPr>
+            <a:r>
+              <a:rPr sz="1400">
+                <a:solidFill>
+                  <a:srgbClr val="6D8C97"/>
+                </a:solidFill>
+                <a:latin typeface="Consolas"/>
+              </a:rPr>
+              <a:t>   -  </a:t>
+            </a:r>
+            <a:r>
+              <a:rPr sz="1400" strike="sngStrike">
+                <a:solidFill>
+                  <a:srgbClr val="F3928B"/>
+                </a:solidFill>
+                <a:latin typeface="Consolas"/>
+              </a:rPr>
+              <a:t>  addLine('Companion', 'thinking...');</a:t>
+            </a:r>
+          </a:p>
+          <a:p>
+            <a:pPr>
+              <a:spcAft>
+                <a:spcPts val="0"/>
+              </a:spcAft>
+            </a:pPr>
+            <a:r>
+              <a:rPr sz="1400">
+                <a:solidFill>
+                  <a:srgbClr val="6D8C97"/>
+                </a:solidFill>
+                <a:latin typeface="Consolas"/>
+              </a:rPr>
               <a:t>  97  </a:t>
             </a:r>
             <a:r>
@@ -7368,6 +7618,81 @@
                 <a:latin typeface="Consolas"/>
               </a:rPr>
               <a:t>  try {</a:t>
+            </a:r>
+          </a:p>
+          <a:p>
+            <a:pPr>
+              <a:spcAft>
+                <a:spcPts val="0"/>
+              </a:spcAft>
+            </a:pPr>
+            <a:r>
+              <a:rPr sz="1400">
+                <a:solidFill>
+                  <a:srgbClr val="6D8C97"/>
+                </a:solidFill>
+                <a:latin typeface="Consolas"/>
+              </a:rPr>
+              <a:t>   -  </a:t>
+            </a:r>
+            <a:r>
+              <a:rPr sz="1400" strike="sngStrike">
+                <a:solidFill>
+                  <a:srgbClr val="F3928B"/>
+                </a:solidFill>
+                <a:latin typeface="Consolas"/>
+              </a:rPr>
+              <a:t>    const reply = await askAI(text);</a:t>
+            </a:r>
+          </a:p>
+          <a:p>
+            <a:pPr>
+              <a:spcAft>
+                <a:spcPts val="0"/>
+              </a:spcAft>
+            </a:pPr>
+            <a:r>
+              <a:rPr sz="1400">
+                <a:solidFill>
+                  <a:srgbClr val="6D8C97"/>
+                </a:solidFill>
+                <a:latin typeface="Consolas"/>
+              </a:rPr>
+              <a:t>   -  </a:t>
+            </a:r>
+            <a:r>
+              <a:rPr sz="1400" strike="sngStrike">
+                <a:solidFill>
+                  <a:srgbClr val="F3928B"/>
+                </a:solidFill>
+                <a:latin typeface="Consolas"/>
+              </a:rPr>
+              <a:t>    chat.lastChild.remove();</a:t>
+            </a:r>
+          </a:p>
+          <a:p>
+            <a:pPr>
+              <a:spcAft>
+                <a:spcPts val="0"/>
+              </a:spcAft>
+            </a:pPr>
+            <a:r>
+              <a:rPr sz="1400">
+                <a:solidFill>
+                  <a:srgbClr val="6D8C97"/>
+                </a:solidFill>
+                <a:latin typeface="Consolas"/>
+              </a:rPr>
+              <a:t>   -  </a:t>
+            </a:r>
+            <a:r>
+              <a:rPr sz="1400" strike="sngStrike">
+                <a:solidFill>
+                  <a:srgbClr val="F3928B"/>
+                </a:solidFill>
+                <a:latin typeface="Consolas"/>
+              </a:rPr>
+              <a:t>    addLine('Companion', reply);</a:t>
             </a:r>
           </a:p>
           <a:p>
@@ -7575,6 +7900,106 @@
                 <a:latin typeface="Consolas"/>
               </a:rPr>
               <a:t>  } catch (problem) {</a:t>
+            </a:r>
+          </a:p>
+          <a:p>
+            <a:pPr>
+              <a:spcAft>
+                <a:spcPts val="0"/>
+              </a:spcAft>
+            </a:pPr>
+            <a:r>
+              <a:rPr sz="1700">
+                <a:solidFill>
+                  <a:srgbClr val="6D8C97"/>
+                </a:solidFill>
+                <a:latin typeface="Consolas"/>
+              </a:rPr>
+              <a:t>   -  </a:t>
+            </a:r>
+            <a:r>
+              <a:rPr sz="1700" strike="sngStrike">
+                <a:solidFill>
+                  <a:srgbClr val="F3928B"/>
+                </a:solidFill>
+                <a:latin typeface="Consolas"/>
+              </a:rPr>
+              <a:t>    chat.lastChild.remove();</a:t>
+            </a:r>
+          </a:p>
+          <a:p>
+            <a:pPr>
+              <a:spcAft>
+                <a:spcPts val="0"/>
+              </a:spcAft>
+            </a:pPr>
+            <a:r>
+              <a:rPr sz="1700">
+                <a:solidFill>
+                  <a:srgbClr val="6D8C97"/>
+                </a:solidFill>
+                <a:latin typeface="Consolas"/>
+              </a:rPr>
+              <a:t>   -  </a:t>
+            </a:r>
+            <a:r>
+              <a:rPr sz="1700" strike="sngStrike">
+                <a:solidFill>
+                  <a:srgbClr val="F3928B"/>
+                </a:solidFill>
+                <a:latin typeface="Consolas"/>
+              </a:rPr>
+              <a:t>    // 'Failed to fetch' means the request never arrived anywhere at all.</a:t>
+            </a:r>
+          </a:p>
+          <a:p>
+            <a:pPr>
+              <a:spcAft>
+                <a:spcPts val="0"/>
+              </a:spcAft>
+            </a:pPr>
+            <a:r>
+              <a:rPr sz="1700">
+                <a:solidFill>
+                  <a:srgbClr val="6D8C97"/>
+                </a:solidFill>
+                <a:latin typeface="Consolas"/>
+              </a:rPr>
+              <a:t>   -  </a:t>
+            </a:r>
+            <a:r>
+              <a:rPr sz="1700" strike="sngStrike">
+                <a:solidFill>
+                  <a:srgbClr val="F3928B"/>
+                </a:solidFill>
+                <a:latin typeface="Consolas"/>
+              </a:rPr>
+              <a:t>    // It is the commonest real failure and the least useful wording there is.</a:t>
+            </a:r>
+          </a:p>
+          <a:p>
+            <a:pPr>
+              <a:spcAft>
+                <a:spcPts val="0"/>
+              </a:spcAft>
+            </a:pPr>
+            <a:r>
+              <a:rPr sz="1700">
+                <a:solidFill>
+                  <a:srgbClr val="6D8C97"/>
+                </a:solidFill>
+                <a:latin typeface="Consolas"/>
+              </a:rPr>
+              <a:t>   -  </a:t>
+            </a:r>
+            <a:r>
+              <a:rPr sz="1700" strike="sngStrike">
+                <a:solidFill>
+                  <a:srgbClr val="F3928B"/>
+                </a:solidFill>
+                <a:latin typeface="Consolas"/>
+              </a:rPr>
+              <a:t>    addLine('Problem', problem.message === 'Failed to fetch'</a:t>
             </a:r>
           </a:p>
           <a:p>

--- a/ai101/slides/week-07.pptx
+++ b/ai101/slides/week-07.pptx
@@ -3658,12 +3658,27 @@
               </a:spcAft>
             </a:pPr>
             <a:r>
+              <a:rPr sz="2800">
+                <a:solidFill>
+                  <a:srgbClr val="01AEFD"/>
+                </a:solidFill>
+              </a:rPr>
+              <a:t>history.push({ role: 'user', content: text });</a:t>
+            </a:r>
+          </a:p>
+          <a:p>
+            <a:pPr>
+              <a:spcAft>
+                <a:spcPts val="1400"/>
+              </a:spcAft>
+            </a:pPr>
+            <a:r>
               <a:rPr sz="2400">
                 <a:solidFill>
                   <a:srgbClr val="1F2A37"/>
                 </a:solidFill>
               </a:rPr>
-              <a:t>• Adds one item to the END of an array (a list).</a:t>
+              <a:t>• Adds one item to the END of a list (an array, week 4).</a:t>
             </a:r>
           </a:p>
           <a:p>
@@ -3678,7 +3693,22 @@
                   <a:srgbClr val="1F2A37"/>
                 </a:solidFill>
               </a:rPr>
-              <a:t>• history.push(...) remembers one more message.</a:t>
+              <a:t>• Like dropping a card on top of a pile - the list gets one longer.</a:t>
+            </a:r>
+          </a:p>
+          <a:p>
+            <a:pPr>
+              <a:spcAft>
+                <a:spcPts val="1400"/>
+              </a:spcAft>
+            </a:pPr>
+            <a:r>
+              <a:rPr sz="2400">
+                <a:solidFill>
+                  <a:srgbClr val="1F2A37"/>
+                </a:solidFill>
+              </a:rPr>
+              <a:t>• history.push(...) is how the conversation remembers each new message.</a:t>
             </a:r>
           </a:p>
         </p:txBody>
@@ -12774,6 +12804,21 @@
               </a:spcAft>
             </a:pPr>
             <a:r>
+              <a:rPr sz="2800">
+                <a:solidFill>
+                  <a:srgbClr val="01AEFD"/>
+                </a:solidFill>
+              </a:rPr>
+              <a:t>messages: [ system, ...history ]</a:t>
+            </a:r>
+          </a:p>
+          <a:p>
+            <a:pPr>
+              <a:spcAft>
+                <a:spcPts val="1400"/>
+              </a:spcAft>
+            </a:pPr>
+            <a:r>
               <a:rPr sz="2400">
                 <a:solidFill>
                   <a:srgbClr val="1F2A37"/>
@@ -12794,7 +12839,22 @@
                   <a:srgbClr val="1F2A37"/>
                 </a:solidFill>
               </a:rPr>
-              <a:t>• ...history drops all past messages into the messages array in order.</a:t>
+              <a:t>• ...history drops ALL past messages into the messages array, in order.</a:t>
+            </a:r>
+          </a:p>
+          <a:p>
+            <a:pPr>
+              <a:spcAft>
+                <a:spcPts val="1400"/>
+              </a:spcAft>
+            </a:pPr>
+            <a:r>
+              <a:rPr sz="2400">
+                <a:solidFill>
+                  <a:srgbClr val="1F2A37"/>
+                </a:solidFill>
+              </a:rPr>
+              <a:t>• It saves a loop: one line unpacks the whole history.</a:t>
             </a:r>
           </a:p>
         </p:txBody>
@@ -15713,12 +15773,27 @@
               </a:spcAft>
             </a:pPr>
             <a:r>
+              <a:rPr sz="2800">
+                <a:solidFill>
+                  <a:srgbClr val="01AEFD"/>
+                </a:solidFill>
+              </a:rPr>
+              <a:t>bubble.className = 'bubble ' + who;</a:t>
+            </a:r>
+          </a:p>
+          <a:p>
+            <a:pPr>
+              <a:spcAft>
+                <a:spcPts val="1400"/>
+              </a:spcAft>
+            </a:pPr>
+            <a:r>
               <a:rPr sz="2400">
                 <a:solidFill>
                   <a:srgbClr val="1F2A37"/>
                 </a:solidFill>
               </a:rPr>
-              <a:t>• Sets an element's class from code.</a:t>
+              <a:t>• Sets an element's class from code - the same class= you write in HTML (week 1).</a:t>
             </a:r>
           </a:p>
           <a:p>
@@ -15733,7 +15808,22 @@
                   <a:srgbClr val="1F2A37"/>
                 </a:solidFill>
               </a:rPr>
-              <a:t>• That is how CSS knows which bubble style to use.</a:t>
+              <a:t>• That is how CSS knows which style to give it.</a:t>
+            </a:r>
+          </a:p>
+          <a:p>
+            <a:pPr>
+              <a:spcAft>
+                <a:spcPts val="1400"/>
+              </a:spcAft>
+            </a:pPr>
+            <a:r>
+              <a:rPr sz="2400">
+                <a:solidFill>
+                  <a:srgbClr val="1F2A37"/>
+                </a:solidFill>
+              </a:rPr>
+              <a:t>• 'bubble ' + who gives each message its speaker's look.</a:t>
             </a:r>
           </a:p>
         </p:txBody>
@@ -19290,12 +19380,27 @@
               </a:spcAft>
             </a:pPr>
             <a:r>
+              <a:rPr sz="2800">
+                <a:solidFill>
+                  <a:srgbClr val="01AEFD"/>
+                </a:solidFill>
+              </a:rPr>
+              <a:t>white-space: pre-wrap;</a:t>
+            </a:r>
+          </a:p>
+          <a:p>
+            <a:pPr>
+              <a:spcAft>
+                <a:spcPts val="1400"/>
+              </a:spcAft>
+            </a:pPr>
+            <a:r>
               <a:rPr sz="2400">
                 <a:solidFill>
                   <a:srgbClr val="1F2A37"/>
                 </a:solidFill>
               </a:rPr>
-              <a:t>• Keeps the line breaks you were sent, and still wraps long lines.</a:t>
+              <a:t>• Keeps the line breaks in the text AND still wraps long lines.</a:t>
             </a:r>
           </a:p>
           <a:p>
@@ -19311,6 +19416,21 @@
                 </a:solidFill>
               </a:rPr>
               <a:t>• Without it the browser squashes every run of spaces into one.</a:t>
+            </a:r>
+          </a:p>
+          <a:p>
+            <a:pPr>
+              <a:spcAft>
+                <a:spcPts val="1400"/>
+              </a:spcAft>
+            </a:pPr>
+            <a:r>
+              <a:rPr sz="2400">
+                <a:solidFill>
+                  <a:srgbClr val="1F2A37"/>
+                </a:solidFill>
+              </a:rPr>
+              <a:t>• Matters once the AI's reply (week 4) has its own paragraphs.</a:t>
             </a:r>
           </a:p>
         </p:txBody>
@@ -20365,12 +20485,57 @@
               </a:spcAft>
             </a:pPr>
             <a:r>
+              <a:rPr sz="2800">
+                <a:solidFill>
+                  <a:srgbClr val="01AEFD"/>
+                </a:solidFill>
+              </a:rPr>
+              <a:t>margin-left: auto;</a:t>
+            </a:r>
+          </a:p>
+          <a:p>
+            <a:pPr>
+              <a:spcAft>
+                <a:spcPts val="1400"/>
+              </a:spcAft>
+            </a:pPr>
+            <a:r>
               <a:rPr sz="2400">
                 <a:solidFill>
                   <a:srgbClr val="1F2A37"/>
                 </a:solidFill>
               </a:rPr>
-              <a:t>• Space on the left. Set to auto it shoves the box to the RIGHT.</a:t>
+              <a:t>• Space on the LEFT of the box.</a:t>
+            </a:r>
+          </a:p>
+          <a:p>
+            <a:pPr>
+              <a:spcAft>
+                <a:spcPts val="1400"/>
+              </a:spcAft>
+            </a:pPr>
+            <a:r>
+              <a:rPr sz="2400">
+                <a:solidFill>
+                  <a:srgbClr val="1F2A37"/>
+                </a:solidFill>
+              </a:rPr>
+              <a:t>• Set to auto it soaks up all the spare room and shoves the box RIGHT.</a:t>
+            </a:r>
+          </a:p>
+          <a:p>
+            <a:pPr>
+              <a:spcAft>
+                <a:spcPts val="1400"/>
+              </a:spcAft>
+            </a:pPr>
+            <a:r>
+              <a:rPr sz="2400">
+                <a:solidFill>
+                  <a:srgbClr val="1F2A37"/>
+                </a:solidFill>
+              </a:rPr>
+              <a:t>• That is the trick that lines YOUR chat bubbles up on the right.</a:t>
             </a:r>
           </a:p>
         </p:txBody>
@@ -21865,12 +22030,57 @@
               </a:spcAft>
             </a:pPr>
             <a:r>
+              <a:rPr sz="2800">
+                <a:solidFill>
+                  <a:srgbClr val="01AEFD"/>
+                </a:solidFill>
+              </a:rPr>
+              <a:t>border-bottom-right-radius: 3px;</a:t>
+            </a:r>
+          </a:p>
+          <a:p>
+            <a:pPr>
+              <a:spcAft>
+                <a:spcPts val="1400"/>
+              </a:spcAft>
+            </a:pPr>
+            <a:r>
               <a:rPr sz="2400">
                 <a:solidFill>
                   <a:srgbClr val="1F2A37"/>
                 </a:solidFill>
               </a:rPr>
-              <a:t>• Rounds just ONE corner - used to point a bubble at its speaker.</a:t>
+              <a:t>• Rounds just ONE corner.</a:t>
+            </a:r>
+          </a:p>
+          <a:p>
+            <a:pPr>
+              <a:spcAft>
+                <a:spcPts val="1400"/>
+              </a:spcAft>
+            </a:pPr>
+            <a:r>
+              <a:rPr sz="2400">
+                <a:solidFill>
+                  <a:srgbClr val="1F2A37"/>
+                </a:solidFill>
+              </a:rPr>
+              <a:t>• border-radius (week 2) rounded all four; this picks a single one.</a:t>
+            </a:r>
+          </a:p>
+          <a:p>
+            <a:pPr>
+              <a:spcAft>
+                <a:spcPts val="1400"/>
+              </a:spcAft>
+            </a:pPr>
+            <a:r>
+              <a:rPr sz="2400">
+                <a:solidFill>
+                  <a:srgbClr val="1F2A37"/>
+                </a:solidFill>
+              </a:rPr>
+              <a:t>• Squaring one corner points a bubble at whoever sent it.</a:t>
             </a:r>
           </a:p>
         </p:txBody>
@@ -23890,12 +24100,57 @@
               </a:spcAft>
             </a:pPr>
             <a:r>
+              <a:rPr sz="2800">
+                <a:solidFill>
+                  <a:srgbClr val="01AEFD"/>
+                </a:solidFill>
+              </a:rPr>
+              <a:t>border-bottom-left-radius: 3px;</a:t>
+            </a:r>
+          </a:p>
+          <a:p>
+            <a:pPr>
+              <a:spcAft>
+                <a:spcPts val="1400"/>
+              </a:spcAft>
+            </a:pPr>
+            <a:r>
               <a:rPr sz="2400">
                 <a:solidFill>
                   <a:srgbClr val="1F2A37"/>
                 </a:solidFill>
               </a:rPr>
-              <a:t>• Rounds one corner the other way, for the other speaker.</a:t>
+              <a:t>• Rounds the OTHER bottom corner - the mirror of the right one.</a:t>
+            </a:r>
+          </a:p>
+          <a:p>
+            <a:pPr>
+              <a:spcAft>
+                <a:spcPts val="1400"/>
+              </a:spcAft>
+            </a:pPr>
+            <a:r>
+              <a:rPr sz="2400">
+                <a:solidFill>
+                  <a:srgbClr val="1F2A37"/>
+                </a:solidFill>
+              </a:rPr>
+              <a:t>• The AI's bubbles point left; yours point right.</a:t>
+            </a:r>
+          </a:p>
+          <a:p>
+            <a:pPr>
+              <a:spcAft>
+                <a:spcPts val="1400"/>
+              </a:spcAft>
+            </a:pPr>
+            <a:r>
+              <a:rPr sz="2400">
+                <a:solidFill>
+                  <a:srgbClr val="1F2A37"/>
+                </a:solidFill>
+              </a:rPr>
+              <a:t>• Same idea as border-radius (week 2), aimed at one corner.</a:t>
             </a:r>
           </a:p>
         </p:txBody>
@@ -29792,12 +30047,57 @@
               </a:spcAft>
             </a:pPr>
             <a:r>
+              <a:rPr sz="2800">
+                <a:solidFill>
+                  <a:srgbClr val="01AEFD"/>
+                </a:solidFill>
+              </a:rPr>
+              <a:t>flex-direction: column;</a:t>
+            </a:r>
+          </a:p>
+          <a:p>
+            <a:pPr>
+              <a:spcAft>
+                <a:spcPts val="1400"/>
+              </a:spcAft>
+            </a:pPr>
+            <a:r>
               <a:rPr sz="2400">
                 <a:solidFill>
                   <a:srgbClr val="1F2A37"/>
                 </a:solidFill>
               </a:rPr>
               <a:t>• Stacks a flex box's children top-to-bottom instead of side-by-side.</a:t>
+            </a:r>
+          </a:p>
+          <a:p>
+            <a:pPr>
+              <a:spcAft>
+                <a:spcPts val="1400"/>
+              </a:spcAft>
+            </a:pPr>
+            <a:r>
+              <a:rPr sz="2400">
+                <a:solidFill>
+                  <a:srgbClr val="1F2A37"/>
+                </a:solidFill>
+              </a:rPr>
+              <a:t>• display: flex (week 2) made a ROW; this turns that row into a column.</a:t>
+            </a:r>
+          </a:p>
+          <a:p>
+            <a:pPr>
+              <a:spcAft>
+                <a:spcPts val="1400"/>
+              </a:spcAft>
+            </a:pPr>
+            <a:r>
+              <a:rPr sz="2400">
+                <a:solidFill>
+                  <a:srgbClr val="1F2A37"/>
+                </a:solidFill>
+              </a:rPr>
+              <a:t>• The chat needs its messages stacked, newest at the bottom.</a:t>
             </a:r>
           </a:p>
         </p:txBody>
@@ -30587,12 +30887,57 @@
               </a:spcAft>
             </a:pPr>
             <a:r>
+              <a:rPr sz="2800">
+                <a:solidFill>
+                  <a:srgbClr val="01AEFD"/>
+                </a:solidFill>
+              </a:rPr>
+              <a:t>height: 340px;</a:t>
+            </a:r>
+          </a:p>
+          <a:p>
+            <a:pPr>
+              <a:spcAft>
+                <a:spcPts val="1400"/>
+              </a:spcAft>
+            </a:pPr>
+            <a:r>
               <a:rPr sz="2400">
                 <a:solidFill>
                   <a:srgbClr val="1F2A37"/>
                 </a:solidFill>
               </a:rPr>
-              <a:t>• A fixed height for the box, in px.</a:t>
+              <a:t>• A fixed height for the box, in px - the partner of width (week 6).</a:t>
+            </a:r>
+          </a:p>
+          <a:p>
+            <a:pPr>
+              <a:spcAft>
+                <a:spcPts val="1400"/>
+              </a:spcAft>
+            </a:pPr>
+            <a:r>
+              <a:rPr sz="2400">
+                <a:solidFill>
+                  <a:srgbClr val="1F2A37"/>
+                </a:solidFill>
+              </a:rPr>
+              <a:t>• A box with no set height just grows to fit whatever is inside.</a:t>
+            </a:r>
+          </a:p>
+          <a:p>
+            <a:pPr>
+              <a:spcAft>
+                <a:spcPts val="1400"/>
+              </a:spcAft>
+            </a:pPr>
+            <a:r>
+              <a:rPr sz="2400">
+                <a:solidFill>
+                  <a:srgbClr val="1F2A37"/>
+                </a:solidFill>
+              </a:rPr>
+              <a:t>• Fixing the chat's height is what lets it scroll instead of stretching.</a:t>
             </a:r>
           </a:p>
         </p:txBody>
@@ -31092,12 +31437,57 @@
               </a:spcAft>
             </a:pPr>
             <a:r>
+              <a:rPr sz="2800">
+                <a:solidFill>
+                  <a:srgbClr val="01AEFD"/>
+                </a:solidFill>
+              </a:rPr>
+              <a:t>overflow-y: auto;</a:t>
+            </a:r>
+          </a:p>
+          <a:p>
+            <a:pPr>
+              <a:spcAft>
+                <a:spcPts val="1400"/>
+              </a:spcAft>
+            </a:pPr>
+            <a:r>
               <a:rPr sz="2400">
                 <a:solidFill>
                   <a:srgbClr val="1F2A37"/>
                 </a:solidFill>
               </a:rPr>
-              <a:t>• If the content is taller than the box, add a scrollbar instead of spilling out.</a:t>
+              <a:t>• When the content is taller than the box, add a scrollbar instead of spilling.</a:t>
+            </a:r>
+          </a:p>
+          <a:p>
+            <a:pPr>
+              <a:spcAft>
+                <a:spcPts val="1400"/>
+              </a:spcAft>
+            </a:pPr>
+            <a:r>
+              <a:rPr sz="2400">
+                <a:solidFill>
+                  <a:srgbClr val="1F2A37"/>
+                </a:solidFill>
+              </a:rPr>
+              <a:t>• It only works because the box has a fixed height (above).</a:t>
+            </a:r>
+          </a:p>
+          <a:p>
+            <a:pPr>
+              <a:spcAft>
+                <a:spcPts val="1400"/>
+              </a:spcAft>
+            </a:pPr>
+            <a:r>
+              <a:rPr sz="2400">
+                <a:solidFill>
+                  <a:srgbClr val="1F2A37"/>
+                </a:solidFill>
+              </a:rPr>
+              <a:t>• This is what makes the chat scroll as messages pile up.</a:t>
             </a:r>
           </a:p>
         </p:txBody>

--- a/ai101/slides/week-07.pptx
+++ b/ai101/slides/week-07.pptx
@@ -19314,7 +19314,7 @@
                   <a:srgbClr val="1F2A37"/>
                 </a:solidFill>
               </a:rPr>
-              <a:t>white-space: pre-wrap</a:t>
+              <a:t>white-space</a:t>
             </a:r>
           </a:p>
         </p:txBody>
@@ -20419,7 +20419,7 @@
                   <a:srgbClr val="1F2A37"/>
                 </a:solidFill>
               </a:rPr>
-              <a:t>margin-left: auto</a:t>
+              <a:t>margin-left</a:t>
             </a:r>
           </a:p>
         </p:txBody>
@@ -29981,7 +29981,7 @@
                   <a:srgbClr val="1F2A37"/>
                 </a:solidFill>
               </a:rPr>
-              <a:t>flex-direction: column</a:t>
+              <a:t>flex-direction</a:t>
             </a:r>
           </a:p>
         </p:txBody>
@@ -31371,7 +31371,7 @@
                   <a:srgbClr val="1F2A37"/>
                 </a:solidFill>
               </a:rPr>
-              <a:t>overflow-y: auto</a:t>
+              <a:t>overflow-y</a:t>
             </a:r>
           </a:p>
         </p:txBody>

--- a/ai101/slides/week-07.pptx
+++ b/ai101/slides/week-07.pptx
@@ -3803,7 +3803,7 @@
         <p:spPr>
           <a:xfrm>
             <a:off x="3606393" y="2554833"/>
-            <a:ext cx="4945075" cy="1806854"/>
+            <a:ext cx="4945075" cy="1730776"/>
           </a:xfrm>
           <a:prstGeom prst="roundRect">
             <a:avLst/>
@@ -3978,8 +3978,8 @@
         </p:nvSpPr>
         <p:spPr>
           <a:xfrm>
-            <a:off x="3701491" y="4856195"/>
-            <a:ext cx="3899001" cy="323331"/>
+            <a:off x="3701491" y="4409236"/>
+            <a:ext cx="1426463" cy="228234"/>
           </a:xfrm>
           <a:prstGeom prst="roundRect">
             <a:avLst/>
@@ -4022,14 +4022,14 @@
         </p:nvSpPr>
         <p:spPr>
           <a:xfrm>
-            <a:off x="7695590" y="4856195"/>
-            <a:ext cx="779800" cy="323331"/>
+            <a:off x="5223052" y="4409236"/>
+            <a:ext cx="1426463" cy="228234"/>
           </a:xfrm>
           <a:prstGeom prst="roundRect">
             <a:avLst/>
           </a:prstGeom>
           <a:solidFill>
-            <a:srgbClr val="01AEFD"/>
+            <a:srgbClr val="16303A"/>
           </a:solidFill>
           <a:ln>
             <a:noFill/>
@@ -4066,14 +4066,14 @@
         </p:nvSpPr>
         <p:spPr>
           <a:xfrm>
-            <a:off x="3720510" y="5407761"/>
-            <a:ext cx="1616659" cy="95097"/>
+            <a:off x="3701491" y="4856195"/>
+            <a:ext cx="3899001" cy="323331"/>
           </a:xfrm>
           <a:prstGeom prst="roundRect">
             <a:avLst/>
           </a:prstGeom>
           <a:solidFill>
-            <a:srgbClr val="2A4550"/>
+            <a:srgbClr val="16303A"/>
           </a:solidFill>
           <a:ln>
             <a:noFill/>
@@ -4110,17 +4110,17 @@
         </p:nvSpPr>
         <p:spPr>
           <a:xfrm>
-            <a:off x="3568354" y="2516794"/>
-            <a:ext cx="5021153" cy="1882932"/>
+            <a:off x="7695590" y="4856195"/>
+            <a:ext cx="779800" cy="323331"/>
           </a:xfrm>
           <a:prstGeom prst="roundRect">
             <a:avLst/>
           </a:prstGeom>
-          <a:noFill/>
-          <a:ln w="44450">
-            <a:solidFill>
-              <a:srgbClr val="FFD633"/>
-            </a:solidFill>
+          <a:solidFill>
+            <a:srgbClr val="01AEFD"/>
+          </a:solidFill>
+          <a:ln>
+            <a:noFill/>
           </a:ln>
           <a:effectLst/>
         </p:spPr>
@@ -4148,7 +4148,95 @@
       </p:sp>
       <p:sp>
         <p:nvSpPr>
-          <p:cNvPr id="15" name="TextBox 14"/>
+          <p:cNvPr id="15" name="Rounded Rectangle 14"/>
+          <p:cNvSpPr/>
+          <p:nvPr/>
+        </p:nvSpPr>
+        <p:spPr>
+          <a:xfrm>
+            <a:off x="3720510" y="5407761"/>
+            <a:ext cx="1616659" cy="95097"/>
+          </a:xfrm>
+          <a:prstGeom prst="roundRect">
+            <a:avLst/>
+          </a:prstGeom>
+          <a:solidFill>
+            <a:srgbClr val="2A4550"/>
+          </a:solidFill>
+          <a:ln>
+            <a:noFill/>
+          </a:ln>
+          <a:effectLst/>
+        </p:spPr>
+        <p:style>
+          <a:lnRef idx="1">
+            <a:schemeClr val="accent1"/>
+          </a:lnRef>
+          <a:fillRef idx="3">
+            <a:schemeClr val="accent1"/>
+          </a:fillRef>
+          <a:effectRef idx="2">
+            <a:schemeClr val="accent1"/>
+          </a:effectRef>
+          <a:fontRef idx="minor">
+            <a:schemeClr val="lt1"/>
+          </a:fontRef>
+        </p:style>
+        <p:txBody>
+          <a:bodyPr rtlCol="0" anchor="ctr"/>
+          <a:lstStyle/>
+          <a:p>
+            <a:pPr algn="ctr"/>
+          </a:p>
+        </p:txBody>
+      </p:sp>
+      <p:sp>
+        <p:nvSpPr>
+          <p:cNvPr id="16" name="Rounded Rectangle 15"/>
+          <p:cNvSpPr/>
+          <p:nvPr/>
+        </p:nvSpPr>
+        <p:spPr>
+          <a:xfrm>
+            <a:off x="3568354" y="2516794"/>
+            <a:ext cx="5021153" cy="1806854"/>
+          </a:xfrm>
+          <a:prstGeom prst="roundRect">
+            <a:avLst/>
+          </a:prstGeom>
+          <a:noFill/>
+          <a:ln w="44450">
+            <a:solidFill>
+              <a:srgbClr val="FFD633"/>
+            </a:solidFill>
+          </a:ln>
+          <a:effectLst/>
+        </p:spPr>
+        <p:style>
+          <a:lnRef idx="1">
+            <a:schemeClr val="accent1"/>
+          </a:lnRef>
+          <a:fillRef idx="3">
+            <a:schemeClr val="accent1"/>
+          </a:fillRef>
+          <a:effectRef idx="2">
+            <a:schemeClr val="accent1"/>
+          </a:effectRef>
+          <a:fontRef idx="minor">
+            <a:schemeClr val="lt1"/>
+          </a:fontRef>
+        </p:style>
+        <p:txBody>
+          <a:bodyPr rtlCol="0" anchor="ctr"/>
+          <a:lstStyle/>
+          <a:p>
+            <a:pPr algn="ctr"/>
+          </a:p>
+        </p:txBody>
+      </p:sp>
+      <p:sp>
+        <p:nvSpPr>
+          <p:cNvPr id="17" name="TextBox 16"/>
           <p:cNvSpPr txBox="1"/>
           <p:nvPr/>
         </p:nvSpPr>
@@ -5784,7 +5872,7 @@
         <p:spPr>
           <a:xfrm>
             <a:off x="3606393" y="2554833"/>
-            <a:ext cx="4945075" cy="1806854"/>
+            <a:ext cx="4945075" cy="1730776"/>
           </a:xfrm>
           <a:prstGeom prst="roundRect">
             <a:avLst/>
@@ -5959,8 +6047,8 @@
         </p:nvSpPr>
         <p:spPr>
           <a:xfrm>
-            <a:off x="3701491" y="4856195"/>
-            <a:ext cx="3899001" cy="323331"/>
+            <a:off x="3701491" y="4409236"/>
+            <a:ext cx="1426463" cy="228234"/>
           </a:xfrm>
           <a:prstGeom prst="roundRect">
             <a:avLst/>
@@ -6003,14 +6091,14 @@
         </p:nvSpPr>
         <p:spPr>
           <a:xfrm>
-            <a:off x="7695590" y="4856195"/>
-            <a:ext cx="779800" cy="323331"/>
+            <a:off x="5223052" y="4409236"/>
+            <a:ext cx="1426463" cy="228234"/>
           </a:xfrm>
           <a:prstGeom prst="roundRect">
             <a:avLst/>
           </a:prstGeom>
           <a:solidFill>
-            <a:srgbClr val="01AEFD"/>
+            <a:srgbClr val="16303A"/>
           </a:solidFill>
           <a:ln>
             <a:noFill/>
@@ -6047,14 +6135,14 @@
         </p:nvSpPr>
         <p:spPr>
           <a:xfrm>
-            <a:off x="3720510" y="5407761"/>
-            <a:ext cx="1616659" cy="95097"/>
+            <a:off x="3701491" y="4856195"/>
+            <a:ext cx="3899001" cy="323331"/>
           </a:xfrm>
           <a:prstGeom prst="roundRect">
             <a:avLst/>
           </a:prstGeom>
           <a:solidFill>
-            <a:srgbClr val="2A4550"/>
+            <a:srgbClr val="16303A"/>
           </a:solidFill>
           <a:ln>
             <a:noFill/>
@@ -6091,17 +6179,17 @@
         </p:nvSpPr>
         <p:spPr>
           <a:xfrm>
-            <a:off x="3568354" y="2516794"/>
-            <a:ext cx="5021153" cy="1882932"/>
+            <a:off x="7695590" y="4856195"/>
+            <a:ext cx="779800" cy="323331"/>
           </a:xfrm>
           <a:prstGeom prst="roundRect">
             <a:avLst/>
           </a:prstGeom>
-          <a:noFill/>
-          <a:ln w="44450">
-            <a:solidFill>
-              <a:srgbClr val="FFD633"/>
-            </a:solidFill>
+          <a:solidFill>
+            <a:srgbClr val="01AEFD"/>
+          </a:solidFill>
+          <a:ln>
+            <a:noFill/>
           </a:ln>
           <a:effectLst/>
         </p:spPr>
@@ -6129,7 +6217,95 @@
       </p:sp>
       <p:sp>
         <p:nvSpPr>
-          <p:cNvPr id="15" name="TextBox 14"/>
+          <p:cNvPr id="15" name="Rounded Rectangle 14"/>
+          <p:cNvSpPr/>
+          <p:nvPr/>
+        </p:nvSpPr>
+        <p:spPr>
+          <a:xfrm>
+            <a:off x="3720510" y="5407761"/>
+            <a:ext cx="1616659" cy="95097"/>
+          </a:xfrm>
+          <a:prstGeom prst="roundRect">
+            <a:avLst/>
+          </a:prstGeom>
+          <a:solidFill>
+            <a:srgbClr val="2A4550"/>
+          </a:solidFill>
+          <a:ln>
+            <a:noFill/>
+          </a:ln>
+          <a:effectLst/>
+        </p:spPr>
+        <p:style>
+          <a:lnRef idx="1">
+            <a:schemeClr val="accent1"/>
+          </a:lnRef>
+          <a:fillRef idx="3">
+            <a:schemeClr val="accent1"/>
+          </a:fillRef>
+          <a:effectRef idx="2">
+            <a:schemeClr val="accent1"/>
+          </a:effectRef>
+          <a:fontRef idx="minor">
+            <a:schemeClr val="lt1"/>
+          </a:fontRef>
+        </p:style>
+        <p:txBody>
+          <a:bodyPr rtlCol="0" anchor="ctr"/>
+          <a:lstStyle/>
+          <a:p>
+            <a:pPr algn="ctr"/>
+          </a:p>
+        </p:txBody>
+      </p:sp>
+      <p:sp>
+        <p:nvSpPr>
+          <p:cNvPr id="16" name="Rounded Rectangle 15"/>
+          <p:cNvSpPr/>
+          <p:nvPr/>
+        </p:nvSpPr>
+        <p:spPr>
+          <a:xfrm>
+            <a:off x="3568354" y="2516794"/>
+            <a:ext cx="5021153" cy="1806854"/>
+          </a:xfrm>
+          <a:prstGeom prst="roundRect">
+            <a:avLst/>
+          </a:prstGeom>
+          <a:noFill/>
+          <a:ln w="44450">
+            <a:solidFill>
+              <a:srgbClr val="FFD633"/>
+            </a:solidFill>
+          </a:ln>
+          <a:effectLst/>
+        </p:spPr>
+        <p:style>
+          <a:lnRef idx="1">
+            <a:schemeClr val="accent1"/>
+          </a:lnRef>
+          <a:fillRef idx="3">
+            <a:schemeClr val="accent1"/>
+          </a:fillRef>
+          <a:effectRef idx="2">
+            <a:schemeClr val="accent1"/>
+          </a:effectRef>
+          <a:fontRef idx="minor">
+            <a:schemeClr val="lt1"/>
+          </a:fontRef>
+        </p:style>
+        <p:txBody>
+          <a:bodyPr rtlCol="0" anchor="ctr"/>
+          <a:lstStyle/>
+          <a:p>
+            <a:pPr algn="ctr"/>
+          </a:p>
+        </p:txBody>
+      </p:sp>
+      <p:sp>
+        <p:nvSpPr>
+          <p:cNvPr id="17" name="TextBox 16"/>
           <p:cNvSpPr txBox="1"/>
           <p:nvPr/>
         </p:nvSpPr>
@@ -20035,7 +20211,7 @@
         <p:spPr>
           <a:xfrm>
             <a:off x="3606393" y="2554833"/>
-            <a:ext cx="4945075" cy="1806854"/>
+            <a:ext cx="4945075" cy="1730776"/>
           </a:xfrm>
           <a:prstGeom prst="roundRect">
             <a:avLst/>
@@ -20210,8 +20386,8 @@
         </p:nvSpPr>
         <p:spPr>
           <a:xfrm>
-            <a:off x="3701491" y="4856195"/>
-            <a:ext cx="3899001" cy="323331"/>
+            <a:off x="3701491" y="4409236"/>
+            <a:ext cx="1426463" cy="228234"/>
           </a:xfrm>
           <a:prstGeom prst="roundRect">
             <a:avLst/>
@@ -20254,14 +20430,14 @@
         </p:nvSpPr>
         <p:spPr>
           <a:xfrm>
-            <a:off x="7695590" y="4856195"/>
-            <a:ext cx="779800" cy="323331"/>
+            <a:off x="5223052" y="4409236"/>
+            <a:ext cx="1426463" cy="228234"/>
           </a:xfrm>
           <a:prstGeom prst="roundRect">
             <a:avLst/>
           </a:prstGeom>
           <a:solidFill>
-            <a:srgbClr val="01AEFD"/>
+            <a:srgbClr val="16303A"/>
           </a:solidFill>
           <a:ln>
             <a:noFill/>
@@ -20298,14 +20474,14 @@
         </p:nvSpPr>
         <p:spPr>
           <a:xfrm>
-            <a:off x="3720510" y="5407761"/>
-            <a:ext cx="1616659" cy="95097"/>
+            <a:off x="3701491" y="4856195"/>
+            <a:ext cx="3899001" cy="323331"/>
           </a:xfrm>
           <a:prstGeom prst="roundRect">
             <a:avLst/>
           </a:prstGeom>
           <a:solidFill>
-            <a:srgbClr val="2A4550"/>
+            <a:srgbClr val="16303A"/>
           </a:solidFill>
           <a:ln>
             <a:noFill/>
@@ -20342,17 +20518,17 @@
         </p:nvSpPr>
         <p:spPr>
           <a:xfrm>
-            <a:off x="5546384" y="3144438"/>
-            <a:ext cx="2929006" cy="475488"/>
+            <a:off x="7695590" y="4856195"/>
+            <a:ext cx="779800" cy="323331"/>
           </a:xfrm>
           <a:prstGeom prst="roundRect">
             <a:avLst/>
           </a:prstGeom>
-          <a:noFill/>
-          <a:ln w="44450">
-            <a:solidFill>
-              <a:srgbClr val="FFD633"/>
-            </a:solidFill>
+          <a:solidFill>
+            <a:srgbClr val="01AEFD"/>
+          </a:solidFill>
+          <a:ln>
+            <a:noFill/>
           </a:ln>
           <a:effectLst/>
         </p:spPr>
@@ -20380,7 +20556,95 @@
       </p:sp>
       <p:sp>
         <p:nvSpPr>
-          <p:cNvPr id="15" name="TextBox 14"/>
+          <p:cNvPr id="15" name="Rounded Rectangle 14"/>
+          <p:cNvSpPr/>
+          <p:nvPr/>
+        </p:nvSpPr>
+        <p:spPr>
+          <a:xfrm>
+            <a:off x="3720510" y="5407761"/>
+            <a:ext cx="1616659" cy="95097"/>
+          </a:xfrm>
+          <a:prstGeom prst="roundRect">
+            <a:avLst/>
+          </a:prstGeom>
+          <a:solidFill>
+            <a:srgbClr val="2A4550"/>
+          </a:solidFill>
+          <a:ln>
+            <a:noFill/>
+          </a:ln>
+          <a:effectLst/>
+        </p:spPr>
+        <p:style>
+          <a:lnRef idx="1">
+            <a:schemeClr val="accent1"/>
+          </a:lnRef>
+          <a:fillRef idx="3">
+            <a:schemeClr val="accent1"/>
+          </a:fillRef>
+          <a:effectRef idx="2">
+            <a:schemeClr val="accent1"/>
+          </a:effectRef>
+          <a:fontRef idx="minor">
+            <a:schemeClr val="lt1"/>
+          </a:fontRef>
+        </p:style>
+        <p:txBody>
+          <a:bodyPr rtlCol="0" anchor="ctr"/>
+          <a:lstStyle/>
+          <a:p>
+            <a:pPr algn="ctr"/>
+          </a:p>
+        </p:txBody>
+      </p:sp>
+      <p:sp>
+        <p:nvSpPr>
+          <p:cNvPr id="16" name="Rounded Rectangle 15"/>
+          <p:cNvSpPr/>
+          <p:nvPr/>
+        </p:nvSpPr>
+        <p:spPr>
+          <a:xfrm>
+            <a:off x="5546384" y="3144438"/>
+            <a:ext cx="2929006" cy="475488"/>
+          </a:xfrm>
+          <a:prstGeom prst="roundRect">
+            <a:avLst/>
+          </a:prstGeom>
+          <a:noFill/>
+          <a:ln w="44450">
+            <a:solidFill>
+              <a:srgbClr val="FFD633"/>
+            </a:solidFill>
+          </a:ln>
+          <a:effectLst/>
+        </p:spPr>
+        <p:style>
+          <a:lnRef idx="1">
+            <a:schemeClr val="accent1"/>
+          </a:lnRef>
+          <a:fillRef idx="3">
+            <a:schemeClr val="accent1"/>
+          </a:fillRef>
+          <a:effectRef idx="2">
+            <a:schemeClr val="accent1"/>
+          </a:effectRef>
+          <a:fontRef idx="minor">
+            <a:schemeClr val="lt1"/>
+          </a:fontRef>
+        </p:style>
+        <p:txBody>
+          <a:bodyPr rtlCol="0" anchor="ctr"/>
+          <a:lstStyle/>
+          <a:p>
+            <a:pPr algn="ctr"/>
+          </a:p>
+        </p:txBody>
+      </p:sp>
+      <p:sp>
+        <p:nvSpPr>
+          <p:cNvPr id="17" name="TextBox 16"/>
           <p:cNvSpPr txBox="1"/>
           <p:nvPr/>
         </p:nvSpPr>
@@ -24339,7 +24603,7 @@
         <p:spPr>
           <a:xfrm>
             <a:off x="3606393" y="2554833"/>
-            <a:ext cx="4945075" cy="1806854"/>
+            <a:ext cx="4945075" cy="1730776"/>
           </a:xfrm>
           <a:prstGeom prst="roundRect">
             <a:avLst/>
@@ -24514,8 +24778,8 @@
         </p:nvSpPr>
         <p:spPr>
           <a:xfrm>
-            <a:off x="3701491" y="4856195"/>
-            <a:ext cx="3899001" cy="323331"/>
+            <a:off x="3701491" y="4409236"/>
+            <a:ext cx="1426463" cy="228234"/>
           </a:xfrm>
           <a:prstGeom prst="roundRect">
             <a:avLst/>
@@ -24558,14 +24822,14 @@
         </p:nvSpPr>
         <p:spPr>
           <a:xfrm>
-            <a:off x="7695590" y="4856195"/>
-            <a:ext cx="779800" cy="323331"/>
+            <a:off x="5223052" y="4409236"/>
+            <a:ext cx="1426463" cy="228234"/>
           </a:xfrm>
           <a:prstGeom prst="roundRect">
             <a:avLst/>
           </a:prstGeom>
           <a:solidFill>
-            <a:srgbClr val="01AEFD"/>
+            <a:srgbClr val="16303A"/>
           </a:solidFill>
           <a:ln>
             <a:noFill/>
@@ -24602,14 +24866,14 @@
         </p:nvSpPr>
         <p:spPr>
           <a:xfrm>
-            <a:off x="3720510" y="5407761"/>
-            <a:ext cx="1616659" cy="95097"/>
+            <a:off x="3701491" y="4856195"/>
+            <a:ext cx="3899001" cy="323331"/>
           </a:xfrm>
           <a:prstGeom prst="roundRect">
             <a:avLst/>
           </a:prstGeom>
           <a:solidFill>
-            <a:srgbClr val="2A4550"/>
+            <a:srgbClr val="16303A"/>
           </a:solidFill>
           <a:ln>
             <a:noFill/>
@@ -24646,17 +24910,17 @@
         </p:nvSpPr>
         <p:spPr>
           <a:xfrm>
-            <a:off x="3682471" y="2630911"/>
-            <a:ext cx="2929006" cy="475488"/>
+            <a:off x="7695590" y="4856195"/>
+            <a:ext cx="779800" cy="323331"/>
           </a:xfrm>
           <a:prstGeom prst="roundRect">
             <a:avLst/>
           </a:prstGeom>
-          <a:noFill/>
-          <a:ln w="44450">
-            <a:solidFill>
-              <a:srgbClr val="FFD633"/>
-            </a:solidFill>
+          <a:solidFill>
+            <a:srgbClr val="01AEFD"/>
+          </a:solidFill>
+          <a:ln>
+            <a:noFill/>
           </a:ln>
           <a:effectLst/>
         </p:spPr>
@@ -24684,7 +24948,95 @@
       </p:sp>
       <p:sp>
         <p:nvSpPr>
-          <p:cNvPr id="15" name="TextBox 14"/>
+          <p:cNvPr id="15" name="Rounded Rectangle 14"/>
+          <p:cNvSpPr/>
+          <p:nvPr/>
+        </p:nvSpPr>
+        <p:spPr>
+          <a:xfrm>
+            <a:off x="3720510" y="5407761"/>
+            <a:ext cx="1616659" cy="95097"/>
+          </a:xfrm>
+          <a:prstGeom prst="roundRect">
+            <a:avLst/>
+          </a:prstGeom>
+          <a:solidFill>
+            <a:srgbClr val="2A4550"/>
+          </a:solidFill>
+          <a:ln>
+            <a:noFill/>
+          </a:ln>
+          <a:effectLst/>
+        </p:spPr>
+        <p:style>
+          <a:lnRef idx="1">
+            <a:schemeClr val="accent1"/>
+          </a:lnRef>
+          <a:fillRef idx="3">
+            <a:schemeClr val="accent1"/>
+          </a:fillRef>
+          <a:effectRef idx="2">
+            <a:schemeClr val="accent1"/>
+          </a:effectRef>
+          <a:fontRef idx="minor">
+            <a:schemeClr val="lt1"/>
+          </a:fontRef>
+        </p:style>
+        <p:txBody>
+          <a:bodyPr rtlCol="0" anchor="ctr"/>
+          <a:lstStyle/>
+          <a:p>
+            <a:pPr algn="ctr"/>
+          </a:p>
+        </p:txBody>
+      </p:sp>
+      <p:sp>
+        <p:nvSpPr>
+          <p:cNvPr id="16" name="Rounded Rectangle 15"/>
+          <p:cNvSpPr/>
+          <p:nvPr/>
+        </p:nvSpPr>
+        <p:spPr>
+          <a:xfrm>
+            <a:off x="3682471" y="2630911"/>
+            <a:ext cx="2929006" cy="475488"/>
+          </a:xfrm>
+          <a:prstGeom prst="roundRect">
+            <a:avLst/>
+          </a:prstGeom>
+          <a:noFill/>
+          <a:ln w="44450">
+            <a:solidFill>
+              <a:srgbClr val="FFD633"/>
+            </a:solidFill>
+          </a:ln>
+          <a:effectLst/>
+        </p:spPr>
+        <p:style>
+          <a:lnRef idx="1">
+            <a:schemeClr val="accent1"/>
+          </a:lnRef>
+          <a:fillRef idx="3">
+            <a:schemeClr val="accent1"/>
+          </a:fillRef>
+          <a:effectRef idx="2">
+            <a:schemeClr val="accent1"/>
+          </a:effectRef>
+          <a:fontRef idx="minor">
+            <a:schemeClr val="lt1"/>
+          </a:fontRef>
+        </p:style>
+        <p:txBody>
+          <a:bodyPr rtlCol="0" anchor="ctr"/>
+          <a:lstStyle/>
+          <a:p>
+            <a:pPr algn="ctr"/>
+          </a:p>
+        </p:txBody>
+      </p:sp>
+      <p:sp>
+        <p:nvSpPr>
+          <p:cNvPr id="17" name="TextBox 16"/>
           <p:cNvSpPr txBox="1"/>
           <p:nvPr/>
         </p:nvSpPr>
@@ -26165,7 +26517,7 @@
         <p:spPr>
           <a:xfrm>
             <a:off x="3606393" y="2554833"/>
-            <a:ext cx="4945075" cy="1806854"/>
+            <a:ext cx="4945075" cy="1730776"/>
           </a:xfrm>
           <a:prstGeom prst="roundRect">
             <a:avLst/>
@@ -26340,8 +26692,8 @@
         </p:nvSpPr>
         <p:spPr>
           <a:xfrm>
-            <a:off x="3701491" y="4856195"/>
-            <a:ext cx="3899001" cy="323331"/>
+            <a:off x="3701491" y="4409236"/>
+            <a:ext cx="1426463" cy="228234"/>
           </a:xfrm>
           <a:prstGeom prst="roundRect">
             <a:avLst/>
@@ -26384,14 +26736,14 @@
         </p:nvSpPr>
         <p:spPr>
           <a:xfrm>
-            <a:off x="7695590" y="4856195"/>
-            <a:ext cx="779800" cy="323331"/>
+            <a:off x="5223052" y="4409236"/>
+            <a:ext cx="1426463" cy="228234"/>
           </a:xfrm>
           <a:prstGeom prst="roundRect">
             <a:avLst/>
           </a:prstGeom>
           <a:solidFill>
-            <a:srgbClr val="01AEFD"/>
+            <a:srgbClr val="16303A"/>
           </a:solidFill>
           <a:ln>
             <a:noFill/>
@@ -26428,14 +26780,14 @@
         </p:nvSpPr>
         <p:spPr>
           <a:xfrm>
-            <a:off x="3720510" y="5407761"/>
-            <a:ext cx="1616659" cy="95097"/>
+            <a:off x="3701491" y="4856195"/>
+            <a:ext cx="3899001" cy="323331"/>
           </a:xfrm>
           <a:prstGeom prst="roundRect">
             <a:avLst/>
           </a:prstGeom>
           <a:solidFill>
-            <a:srgbClr val="2A4550"/>
+            <a:srgbClr val="16303A"/>
           </a:solidFill>
           <a:ln>
             <a:noFill/>
@@ -26472,17 +26824,17 @@
         </p:nvSpPr>
         <p:spPr>
           <a:xfrm>
-            <a:off x="5546384" y="3144438"/>
-            <a:ext cx="2929006" cy="475488"/>
+            <a:off x="7695590" y="4856195"/>
+            <a:ext cx="779800" cy="323331"/>
           </a:xfrm>
           <a:prstGeom prst="roundRect">
             <a:avLst/>
           </a:prstGeom>
-          <a:noFill/>
-          <a:ln w="44450">
-            <a:solidFill>
-              <a:srgbClr val="FFD633"/>
-            </a:solidFill>
+          <a:solidFill>
+            <a:srgbClr val="01AEFD"/>
+          </a:solidFill>
+          <a:ln>
+            <a:noFill/>
           </a:ln>
           <a:effectLst/>
         </p:spPr>
@@ -26510,7 +26862,95 @@
       </p:sp>
       <p:sp>
         <p:nvSpPr>
-          <p:cNvPr id="15" name="TextBox 14"/>
+          <p:cNvPr id="15" name="Rounded Rectangle 14"/>
+          <p:cNvSpPr/>
+          <p:nvPr/>
+        </p:nvSpPr>
+        <p:spPr>
+          <a:xfrm>
+            <a:off x="3720510" y="5407761"/>
+            <a:ext cx="1616659" cy="95097"/>
+          </a:xfrm>
+          <a:prstGeom prst="roundRect">
+            <a:avLst/>
+          </a:prstGeom>
+          <a:solidFill>
+            <a:srgbClr val="2A4550"/>
+          </a:solidFill>
+          <a:ln>
+            <a:noFill/>
+          </a:ln>
+          <a:effectLst/>
+        </p:spPr>
+        <p:style>
+          <a:lnRef idx="1">
+            <a:schemeClr val="accent1"/>
+          </a:lnRef>
+          <a:fillRef idx="3">
+            <a:schemeClr val="accent1"/>
+          </a:fillRef>
+          <a:effectRef idx="2">
+            <a:schemeClr val="accent1"/>
+          </a:effectRef>
+          <a:fontRef idx="minor">
+            <a:schemeClr val="lt1"/>
+          </a:fontRef>
+        </p:style>
+        <p:txBody>
+          <a:bodyPr rtlCol="0" anchor="ctr"/>
+          <a:lstStyle/>
+          <a:p>
+            <a:pPr algn="ctr"/>
+          </a:p>
+        </p:txBody>
+      </p:sp>
+      <p:sp>
+        <p:nvSpPr>
+          <p:cNvPr id="16" name="Rounded Rectangle 15"/>
+          <p:cNvSpPr/>
+          <p:nvPr/>
+        </p:nvSpPr>
+        <p:spPr>
+          <a:xfrm>
+            <a:off x="5546384" y="3144438"/>
+            <a:ext cx="2929006" cy="475488"/>
+          </a:xfrm>
+          <a:prstGeom prst="roundRect">
+            <a:avLst/>
+          </a:prstGeom>
+          <a:noFill/>
+          <a:ln w="44450">
+            <a:solidFill>
+              <a:srgbClr val="FFD633"/>
+            </a:solidFill>
+          </a:ln>
+          <a:effectLst/>
+        </p:spPr>
+        <p:style>
+          <a:lnRef idx="1">
+            <a:schemeClr val="accent1"/>
+          </a:lnRef>
+          <a:fillRef idx="3">
+            <a:schemeClr val="accent1"/>
+          </a:fillRef>
+          <a:effectRef idx="2">
+            <a:schemeClr val="accent1"/>
+          </a:effectRef>
+          <a:fontRef idx="minor">
+            <a:schemeClr val="lt1"/>
+          </a:fontRef>
+        </p:style>
+        <p:txBody>
+          <a:bodyPr rtlCol="0" anchor="ctr"/>
+          <a:lstStyle/>
+          <a:p>
+            <a:pPr algn="ctr"/>
+          </a:p>
+        </p:txBody>
+      </p:sp>
+      <p:sp>
+        <p:nvSpPr>
+          <p:cNvPr id="17" name="TextBox 16"/>
           <p:cNvSpPr txBox="1"/>
           <p:nvPr/>
         </p:nvSpPr>
@@ -28104,7 +28544,7 @@
         <p:spPr>
           <a:xfrm>
             <a:off x="3606393" y="2554833"/>
-            <a:ext cx="4945075" cy="1806854"/>
+            <a:ext cx="4945075" cy="1730776"/>
           </a:xfrm>
           <a:prstGeom prst="roundRect">
             <a:avLst/>
@@ -28279,8 +28719,8 @@
         </p:nvSpPr>
         <p:spPr>
           <a:xfrm>
-            <a:off x="3701491" y="4856195"/>
-            <a:ext cx="3899001" cy="323331"/>
+            <a:off x="3701491" y="4409236"/>
+            <a:ext cx="1426463" cy="228234"/>
           </a:xfrm>
           <a:prstGeom prst="roundRect">
             <a:avLst/>
@@ -28323,14 +28763,14 @@
         </p:nvSpPr>
         <p:spPr>
           <a:xfrm>
-            <a:off x="7695590" y="4856195"/>
-            <a:ext cx="779800" cy="323331"/>
+            <a:off x="5223052" y="4409236"/>
+            <a:ext cx="1426463" cy="228234"/>
           </a:xfrm>
           <a:prstGeom prst="roundRect">
             <a:avLst/>
           </a:prstGeom>
           <a:solidFill>
-            <a:srgbClr val="01AEFD"/>
+            <a:srgbClr val="16303A"/>
           </a:solidFill>
           <a:ln>
             <a:noFill/>
@@ -28367,14 +28807,14 @@
         </p:nvSpPr>
         <p:spPr>
           <a:xfrm>
-            <a:off x="3720510" y="5407761"/>
-            <a:ext cx="1616659" cy="95097"/>
+            <a:off x="3701491" y="4856195"/>
+            <a:ext cx="3899001" cy="323331"/>
           </a:xfrm>
           <a:prstGeom prst="roundRect">
             <a:avLst/>
           </a:prstGeom>
           <a:solidFill>
-            <a:srgbClr val="2A4550"/>
+            <a:srgbClr val="16303A"/>
           </a:solidFill>
           <a:ln>
             <a:noFill/>
@@ -28411,17 +28851,17 @@
         </p:nvSpPr>
         <p:spPr>
           <a:xfrm>
-            <a:off x="3682471" y="2630911"/>
-            <a:ext cx="2929006" cy="475488"/>
+            <a:off x="7695590" y="4856195"/>
+            <a:ext cx="779800" cy="323331"/>
           </a:xfrm>
           <a:prstGeom prst="roundRect">
             <a:avLst/>
           </a:prstGeom>
-          <a:noFill/>
-          <a:ln w="44450">
-            <a:solidFill>
-              <a:srgbClr val="FFD633"/>
-            </a:solidFill>
+          <a:solidFill>
+            <a:srgbClr val="01AEFD"/>
+          </a:solidFill>
+          <a:ln>
+            <a:noFill/>
           </a:ln>
           <a:effectLst/>
         </p:spPr>
@@ -28449,7 +28889,95 @@
       </p:sp>
       <p:sp>
         <p:nvSpPr>
-          <p:cNvPr id="15" name="TextBox 14"/>
+          <p:cNvPr id="15" name="Rounded Rectangle 14"/>
+          <p:cNvSpPr/>
+          <p:nvPr/>
+        </p:nvSpPr>
+        <p:spPr>
+          <a:xfrm>
+            <a:off x="3720510" y="5407761"/>
+            <a:ext cx="1616659" cy="95097"/>
+          </a:xfrm>
+          <a:prstGeom prst="roundRect">
+            <a:avLst/>
+          </a:prstGeom>
+          <a:solidFill>
+            <a:srgbClr val="2A4550"/>
+          </a:solidFill>
+          <a:ln>
+            <a:noFill/>
+          </a:ln>
+          <a:effectLst/>
+        </p:spPr>
+        <p:style>
+          <a:lnRef idx="1">
+            <a:schemeClr val="accent1"/>
+          </a:lnRef>
+          <a:fillRef idx="3">
+            <a:schemeClr val="accent1"/>
+          </a:fillRef>
+          <a:effectRef idx="2">
+            <a:schemeClr val="accent1"/>
+          </a:effectRef>
+          <a:fontRef idx="minor">
+            <a:schemeClr val="lt1"/>
+          </a:fontRef>
+        </p:style>
+        <p:txBody>
+          <a:bodyPr rtlCol="0" anchor="ctr"/>
+          <a:lstStyle/>
+          <a:p>
+            <a:pPr algn="ctr"/>
+          </a:p>
+        </p:txBody>
+      </p:sp>
+      <p:sp>
+        <p:nvSpPr>
+          <p:cNvPr id="16" name="Rounded Rectangle 15"/>
+          <p:cNvSpPr/>
+          <p:nvPr/>
+        </p:nvSpPr>
+        <p:spPr>
+          <a:xfrm>
+            <a:off x="3682471" y="2630911"/>
+            <a:ext cx="2929006" cy="475488"/>
+          </a:xfrm>
+          <a:prstGeom prst="roundRect">
+            <a:avLst/>
+          </a:prstGeom>
+          <a:noFill/>
+          <a:ln w="44450">
+            <a:solidFill>
+              <a:srgbClr val="FFD633"/>
+            </a:solidFill>
+          </a:ln>
+          <a:effectLst/>
+        </p:spPr>
+        <p:style>
+          <a:lnRef idx="1">
+            <a:schemeClr val="accent1"/>
+          </a:lnRef>
+          <a:fillRef idx="3">
+            <a:schemeClr val="accent1"/>
+          </a:fillRef>
+          <a:effectRef idx="2">
+            <a:schemeClr val="accent1"/>
+          </a:effectRef>
+          <a:fontRef idx="minor">
+            <a:schemeClr val="lt1"/>
+          </a:fontRef>
+        </p:style>
+        <p:txBody>
+          <a:bodyPr rtlCol="0" anchor="ctr"/>
+          <a:lstStyle/>
+          <a:p>
+            <a:pPr algn="ctr"/>
+          </a:p>
+        </p:txBody>
+      </p:sp>
+      <p:sp>
+        <p:nvSpPr>
+          <p:cNvPr id="17" name="TextBox 16"/>
           <p:cNvSpPr txBox="1"/>
           <p:nvPr/>
         </p:nvSpPr>
@@ -31098,7 +31626,7 @@
         <p:spPr>
           <a:xfrm>
             <a:off x="3606393" y="2554833"/>
-            <a:ext cx="4945075" cy="1806854"/>
+            <a:ext cx="4945075" cy="1730776"/>
           </a:xfrm>
           <a:prstGeom prst="roundRect">
             <a:avLst/>
@@ -31273,8 +31801,8 @@
         </p:nvSpPr>
         <p:spPr>
           <a:xfrm>
-            <a:off x="3701491" y="4856195"/>
-            <a:ext cx="3899001" cy="323331"/>
+            <a:off x="3701491" y="4409236"/>
+            <a:ext cx="1426463" cy="228234"/>
           </a:xfrm>
           <a:prstGeom prst="roundRect">
             <a:avLst/>
@@ -31317,14 +31845,14 @@
         </p:nvSpPr>
         <p:spPr>
           <a:xfrm>
-            <a:off x="7695590" y="4856195"/>
-            <a:ext cx="779800" cy="323331"/>
+            <a:off x="5223052" y="4409236"/>
+            <a:ext cx="1426463" cy="228234"/>
           </a:xfrm>
           <a:prstGeom prst="roundRect">
             <a:avLst/>
           </a:prstGeom>
           <a:solidFill>
-            <a:srgbClr val="01AEFD"/>
+            <a:srgbClr val="16303A"/>
           </a:solidFill>
           <a:ln>
             <a:noFill/>
@@ -31361,14 +31889,14 @@
         </p:nvSpPr>
         <p:spPr>
           <a:xfrm>
-            <a:off x="3720510" y="5407761"/>
-            <a:ext cx="1616659" cy="95097"/>
+            <a:off x="3701491" y="4856195"/>
+            <a:ext cx="3899001" cy="323331"/>
           </a:xfrm>
           <a:prstGeom prst="roundRect">
             <a:avLst/>
           </a:prstGeom>
           <a:solidFill>
-            <a:srgbClr val="2A4550"/>
+            <a:srgbClr val="16303A"/>
           </a:solidFill>
           <a:ln>
             <a:noFill/>
@@ -31405,17 +31933,17 @@
         </p:nvSpPr>
         <p:spPr>
           <a:xfrm>
-            <a:off x="5546384" y="3144438"/>
-            <a:ext cx="2929006" cy="475488"/>
+            <a:off x="7695590" y="4856195"/>
+            <a:ext cx="779800" cy="323331"/>
           </a:xfrm>
           <a:prstGeom prst="roundRect">
             <a:avLst/>
           </a:prstGeom>
-          <a:noFill/>
-          <a:ln w="44450">
-            <a:solidFill>
-              <a:srgbClr val="FFD633"/>
-            </a:solidFill>
+          <a:solidFill>
+            <a:srgbClr val="01AEFD"/>
+          </a:solidFill>
+          <a:ln>
+            <a:noFill/>
           </a:ln>
           <a:effectLst/>
         </p:spPr>
@@ -31443,7 +31971,95 @@
       </p:sp>
       <p:sp>
         <p:nvSpPr>
-          <p:cNvPr id="15" name="TextBox 14"/>
+          <p:cNvPr id="15" name="Rounded Rectangle 14"/>
+          <p:cNvSpPr/>
+          <p:nvPr/>
+        </p:nvSpPr>
+        <p:spPr>
+          <a:xfrm>
+            <a:off x="3720510" y="5407761"/>
+            <a:ext cx="1616659" cy="95097"/>
+          </a:xfrm>
+          <a:prstGeom prst="roundRect">
+            <a:avLst/>
+          </a:prstGeom>
+          <a:solidFill>
+            <a:srgbClr val="2A4550"/>
+          </a:solidFill>
+          <a:ln>
+            <a:noFill/>
+          </a:ln>
+          <a:effectLst/>
+        </p:spPr>
+        <p:style>
+          <a:lnRef idx="1">
+            <a:schemeClr val="accent1"/>
+          </a:lnRef>
+          <a:fillRef idx="3">
+            <a:schemeClr val="accent1"/>
+          </a:fillRef>
+          <a:effectRef idx="2">
+            <a:schemeClr val="accent1"/>
+          </a:effectRef>
+          <a:fontRef idx="minor">
+            <a:schemeClr val="lt1"/>
+          </a:fontRef>
+        </p:style>
+        <p:txBody>
+          <a:bodyPr rtlCol="0" anchor="ctr"/>
+          <a:lstStyle/>
+          <a:p>
+            <a:pPr algn="ctr"/>
+          </a:p>
+        </p:txBody>
+      </p:sp>
+      <p:sp>
+        <p:nvSpPr>
+          <p:cNvPr id="16" name="Rounded Rectangle 15"/>
+          <p:cNvSpPr/>
+          <p:nvPr/>
+        </p:nvSpPr>
+        <p:spPr>
+          <a:xfrm>
+            <a:off x="5546384" y="3144438"/>
+            <a:ext cx="2929006" cy="475488"/>
+          </a:xfrm>
+          <a:prstGeom prst="roundRect">
+            <a:avLst/>
+          </a:prstGeom>
+          <a:noFill/>
+          <a:ln w="44450">
+            <a:solidFill>
+              <a:srgbClr val="FFD633"/>
+            </a:solidFill>
+          </a:ln>
+          <a:effectLst/>
+        </p:spPr>
+        <p:style>
+          <a:lnRef idx="1">
+            <a:schemeClr val="accent1"/>
+          </a:lnRef>
+          <a:fillRef idx="3">
+            <a:schemeClr val="accent1"/>
+          </a:fillRef>
+          <a:effectRef idx="2">
+            <a:schemeClr val="accent1"/>
+          </a:effectRef>
+          <a:fontRef idx="minor">
+            <a:schemeClr val="lt1"/>
+          </a:fontRef>
+        </p:style>
+        <p:txBody>
+          <a:bodyPr rtlCol="0" anchor="ctr"/>
+          <a:lstStyle/>
+          <a:p>
+            <a:pPr algn="ctr"/>
+          </a:p>
+        </p:txBody>
+      </p:sp>
+      <p:sp>
+        <p:nvSpPr>
+          <p:cNvPr id="17" name="TextBox 16"/>
           <p:cNvSpPr txBox="1"/>
           <p:nvPr/>
         </p:nvSpPr>
@@ -37857,7 +38473,7 @@
         <p:spPr>
           <a:xfrm>
             <a:off x="3606393" y="2554833"/>
-            <a:ext cx="4945075" cy="1806854"/>
+            <a:ext cx="4945075" cy="1730776"/>
           </a:xfrm>
           <a:prstGeom prst="roundRect">
             <a:avLst/>
@@ -38032,8 +38648,8 @@
         </p:nvSpPr>
         <p:spPr>
           <a:xfrm>
-            <a:off x="3701491" y="4856195"/>
-            <a:ext cx="3899001" cy="323331"/>
+            <a:off x="3701491" y="4409236"/>
+            <a:ext cx="1426463" cy="228234"/>
           </a:xfrm>
           <a:prstGeom prst="roundRect">
             <a:avLst/>
@@ -38076,14 +38692,14 @@
         </p:nvSpPr>
         <p:spPr>
           <a:xfrm>
-            <a:off x="7695590" y="4856195"/>
-            <a:ext cx="779800" cy="323331"/>
+            <a:off x="5223052" y="4409236"/>
+            <a:ext cx="1426463" cy="228234"/>
           </a:xfrm>
           <a:prstGeom prst="roundRect">
             <a:avLst/>
           </a:prstGeom>
           <a:solidFill>
-            <a:srgbClr val="01AEFD"/>
+            <a:srgbClr val="16303A"/>
           </a:solidFill>
           <a:ln>
             <a:noFill/>
@@ -38120,14 +38736,14 @@
         </p:nvSpPr>
         <p:spPr>
           <a:xfrm>
-            <a:off x="3720510" y="5407761"/>
-            <a:ext cx="1616659" cy="95097"/>
+            <a:off x="3701491" y="4856195"/>
+            <a:ext cx="3899001" cy="323331"/>
           </a:xfrm>
           <a:prstGeom prst="roundRect">
             <a:avLst/>
           </a:prstGeom>
           <a:solidFill>
-            <a:srgbClr val="2A4550"/>
+            <a:srgbClr val="16303A"/>
           </a:solidFill>
           <a:ln>
             <a:noFill/>
@@ -38164,17 +38780,17 @@
         </p:nvSpPr>
         <p:spPr>
           <a:xfrm>
-            <a:off x="3568354" y="2516794"/>
-            <a:ext cx="5021153" cy="1882932"/>
+            <a:off x="7695590" y="4856195"/>
+            <a:ext cx="779800" cy="323331"/>
           </a:xfrm>
           <a:prstGeom prst="roundRect">
             <a:avLst/>
           </a:prstGeom>
-          <a:noFill/>
-          <a:ln w="44450">
-            <a:solidFill>
-              <a:srgbClr val="FFD633"/>
-            </a:solidFill>
+          <a:solidFill>
+            <a:srgbClr val="01AEFD"/>
+          </a:solidFill>
+          <a:ln>
+            <a:noFill/>
           </a:ln>
           <a:effectLst/>
         </p:spPr>
@@ -38202,7 +38818,95 @@
       </p:sp>
       <p:sp>
         <p:nvSpPr>
-          <p:cNvPr id="15" name="TextBox 14"/>
+          <p:cNvPr id="15" name="Rounded Rectangle 14"/>
+          <p:cNvSpPr/>
+          <p:nvPr/>
+        </p:nvSpPr>
+        <p:spPr>
+          <a:xfrm>
+            <a:off x="3720510" y="5407761"/>
+            <a:ext cx="1616659" cy="95097"/>
+          </a:xfrm>
+          <a:prstGeom prst="roundRect">
+            <a:avLst/>
+          </a:prstGeom>
+          <a:solidFill>
+            <a:srgbClr val="2A4550"/>
+          </a:solidFill>
+          <a:ln>
+            <a:noFill/>
+          </a:ln>
+          <a:effectLst/>
+        </p:spPr>
+        <p:style>
+          <a:lnRef idx="1">
+            <a:schemeClr val="accent1"/>
+          </a:lnRef>
+          <a:fillRef idx="3">
+            <a:schemeClr val="accent1"/>
+          </a:fillRef>
+          <a:effectRef idx="2">
+            <a:schemeClr val="accent1"/>
+          </a:effectRef>
+          <a:fontRef idx="minor">
+            <a:schemeClr val="lt1"/>
+          </a:fontRef>
+        </p:style>
+        <p:txBody>
+          <a:bodyPr rtlCol="0" anchor="ctr"/>
+          <a:lstStyle/>
+          <a:p>
+            <a:pPr algn="ctr"/>
+          </a:p>
+        </p:txBody>
+      </p:sp>
+      <p:sp>
+        <p:nvSpPr>
+          <p:cNvPr id="16" name="Rounded Rectangle 15"/>
+          <p:cNvSpPr/>
+          <p:nvPr/>
+        </p:nvSpPr>
+        <p:spPr>
+          <a:xfrm>
+            <a:off x="3568354" y="2516794"/>
+            <a:ext cx="5021153" cy="1806854"/>
+          </a:xfrm>
+          <a:prstGeom prst="roundRect">
+            <a:avLst/>
+          </a:prstGeom>
+          <a:noFill/>
+          <a:ln w="44450">
+            <a:solidFill>
+              <a:srgbClr val="FFD633"/>
+            </a:solidFill>
+          </a:ln>
+          <a:effectLst/>
+        </p:spPr>
+        <p:style>
+          <a:lnRef idx="1">
+            <a:schemeClr val="accent1"/>
+          </a:lnRef>
+          <a:fillRef idx="3">
+            <a:schemeClr val="accent1"/>
+          </a:fillRef>
+          <a:effectRef idx="2">
+            <a:schemeClr val="accent1"/>
+          </a:effectRef>
+          <a:fontRef idx="minor">
+            <a:schemeClr val="lt1"/>
+          </a:fontRef>
+        </p:style>
+        <p:txBody>
+          <a:bodyPr rtlCol="0" anchor="ctr"/>
+          <a:lstStyle/>
+          <a:p>
+            <a:pPr algn="ctr"/>
+          </a:p>
+        </p:txBody>
+      </p:sp>
+      <p:sp>
+        <p:nvSpPr>
+          <p:cNvPr id="17" name="TextBox 16"/>
           <p:cNvSpPr txBox="1"/>
           <p:nvPr/>
         </p:nvSpPr>
@@ -38991,7 +39695,7 @@
         <p:spPr>
           <a:xfrm>
             <a:off x="3606393" y="2554833"/>
-            <a:ext cx="4945075" cy="1806854"/>
+            <a:ext cx="4945075" cy="1730776"/>
           </a:xfrm>
           <a:prstGeom prst="roundRect">
             <a:avLst/>
@@ -39166,8 +39870,8 @@
         </p:nvSpPr>
         <p:spPr>
           <a:xfrm>
-            <a:off x="3701491" y="4856195"/>
-            <a:ext cx="3899001" cy="323331"/>
+            <a:off x="3701491" y="4409236"/>
+            <a:ext cx="1426463" cy="228234"/>
           </a:xfrm>
           <a:prstGeom prst="roundRect">
             <a:avLst/>
@@ -39210,14 +39914,14 @@
         </p:nvSpPr>
         <p:spPr>
           <a:xfrm>
-            <a:off x="7695590" y="4856195"/>
-            <a:ext cx="779800" cy="323331"/>
+            <a:off x="5223052" y="4409236"/>
+            <a:ext cx="1426463" cy="228234"/>
           </a:xfrm>
           <a:prstGeom prst="roundRect">
             <a:avLst/>
           </a:prstGeom>
           <a:solidFill>
-            <a:srgbClr val="01AEFD"/>
+            <a:srgbClr val="16303A"/>
           </a:solidFill>
           <a:ln>
             <a:noFill/>
@@ -39254,14 +39958,14 @@
         </p:nvSpPr>
         <p:spPr>
           <a:xfrm>
-            <a:off x="3720510" y="5407761"/>
-            <a:ext cx="1616659" cy="95097"/>
+            <a:off x="3701491" y="4856195"/>
+            <a:ext cx="3899001" cy="323331"/>
           </a:xfrm>
           <a:prstGeom prst="roundRect">
             <a:avLst/>
           </a:prstGeom>
           <a:solidFill>
-            <a:srgbClr val="2A4550"/>
+            <a:srgbClr val="16303A"/>
           </a:solidFill>
           <a:ln>
             <a:noFill/>
@@ -39298,17 +40002,17 @@
         </p:nvSpPr>
         <p:spPr>
           <a:xfrm>
-            <a:off x="3568354" y="2516794"/>
-            <a:ext cx="5021153" cy="1882932"/>
+            <a:off x="7695590" y="4856195"/>
+            <a:ext cx="779800" cy="323331"/>
           </a:xfrm>
           <a:prstGeom prst="roundRect">
             <a:avLst/>
           </a:prstGeom>
-          <a:noFill/>
-          <a:ln w="44450">
-            <a:solidFill>
-              <a:srgbClr val="FFD633"/>
-            </a:solidFill>
+          <a:solidFill>
+            <a:srgbClr val="01AEFD"/>
+          </a:solidFill>
+          <a:ln>
+            <a:noFill/>
           </a:ln>
           <a:effectLst/>
         </p:spPr>
@@ -39336,7 +40040,95 @@
       </p:sp>
       <p:sp>
         <p:nvSpPr>
-          <p:cNvPr id="15" name="TextBox 14"/>
+          <p:cNvPr id="15" name="Rounded Rectangle 14"/>
+          <p:cNvSpPr/>
+          <p:nvPr/>
+        </p:nvSpPr>
+        <p:spPr>
+          <a:xfrm>
+            <a:off x="3720510" y="5407761"/>
+            <a:ext cx="1616659" cy="95097"/>
+          </a:xfrm>
+          <a:prstGeom prst="roundRect">
+            <a:avLst/>
+          </a:prstGeom>
+          <a:solidFill>
+            <a:srgbClr val="2A4550"/>
+          </a:solidFill>
+          <a:ln>
+            <a:noFill/>
+          </a:ln>
+          <a:effectLst/>
+        </p:spPr>
+        <p:style>
+          <a:lnRef idx="1">
+            <a:schemeClr val="accent1"/>
+          </a:lnRef>
+          <a:fillRef idx="3">
+            <a:schemeClr val="accent1"/>
+          </a:fillRef>
+          <a:effectRef idx="2">
+            <a:schemeClr val="accent1"/>
+          </a:effectRef>
+          <a:fontRef idx="minor">
+            <a:schemeClr val="lt1"/>
+          </a:fontRef>
+        </p:style>
+        <p:txBody>
+          <a:bodyPr rtlCol="0" anchor="ctr"/>
+          <a:lstStyle/>
+          <a:p>
+            <a:pPr algn="ctr"/>
+          </a:p>
+        </p:txBody>
+      </p:sp>
+      <p:sp>
+        <p:nvSpPr>
+          <p:cNvPr id="16" name="Rounded Rectangle 15"/>
+          <p:cNvSpPr/>
+          <p:nvPr/>
+        </p:nvSpPr>
+        <p:spPr>
+          <a:xfrm>
+            <a:off x="3568354" y="2516794"/>
+            <a:ext cx="5021153" cy="1806854"/>
+          </a:xfrm>
+          <a:prstGeom prst="roundRect">
+            <a:avLst/>
+          </a:prstGeom>
+          <a:noFill/>
+          <a:ln w="44450">
+            <a:solidFill>
+              <a:srgbClr val="FFD633"/>
+            </a:solidFill>
+          </a:ln>
+          <a:effectLst/>
+        </p:spPr>
+        <p:style>
+          <a:lnRef idx="1">
+            <a:schemeClr val="accent1"/>
+          </a:lnRef>
+          <a:fillRef idx="3">
+            <a:schemeClr val="accent1"/>
+          </a:fillRef>
+          <a:effectRef idx="2">
+            <a:schemeClr val="accent1"/>
+          </a:effectRef>
+          <a:fontRef idx="minor">
+            <a:schemeClr val="lt1"/>
+          </a:fontRef>
+        </p:style>
+        <p:txBody>
+          <a:bodyPr rtlCol="0" anchor="ctr"/>
+          <a:lstStyle/>
+          <a:p>
+            <a:pPr algn="ctr"/>
+          </a:p>
+        </p:txBody>
+      </p:sp>
+      <p:sp>
+        <p:nvSpPr>
+          <p:cNvPr id="17" name="TextBox 16"/>
           <p:cNvSpPr txBox="1"/>
           <p:nvPr/>
         </p:nvSpPr>
